--- a/content/W01/D2/slides/C2_W01_D02_half2_STUDENT.pptx
+++ b/content/W01/D2/slides/C2_W01_D02_half2_STUDENT.pptx
@@ -3272,7 +3272,7 @@
           <a:noFill/>
         </p:spPr>
         <p:txBody>
-          <a:bodyPr wrap="square" anchor="ctr">
+          <a:bodyPr wrap="square" anchor="ctr" lIns="0" rIns="0" tIns="0" bIns="0">
             <a:spAutoFit/>
           </a:bodyPr>
           <a:lstStyle/>
@@ -3335,7 +3335,7 @@
       </p:sp>
       <p:pic>
         <p:nvPicPr>
-          <p:cNvPr id="6" name="Picture 5" descr="4ae2568a1cfdddf2.png"/>
+          <p:cNvPr id="6" name="Picture 5" descr="9459fd6da38cde79.png"/>
           <p:cNvPicPr>
             <a:picLocks noChangeAspect="1"/>
           </p:cNvPicPr>
@@ -3349,8 +3349,8 @@
         </p:blipFill>
         <p:spPr>
           <a:xfrm>
-            <a:off x="1289544" y="1627632"/>
-            <a:ext cx="3445152" cy="4425696"/>
+            <a:off x="4614495" y="1627632"/>
+            <a:ext cx="2962704" cy="3805935"/>
           </a:xfrm>
           <a:prstGeom prst="rect">
             <a:avLst/>
@@ -3365,8 +3365,8 @@
         </p:nvSpPr>
         <p:spPr>
           <a:xfrm>
-            <a:off x="5771244" y="3385312"/>
-            <a:ext cx="5734650" cy="910336"/>
+            <a:off x="685800" y="5543296"/>
+            <a:ext cx="10820095" cy="510032"/>
           </a:xfrm>
           <a:prstGeom prst="rect">
             <a:avLst/>
@@ -3374,16 +3374,11 @@
           <a:noFill/>
         </p:spPr>
         <p:txBody>
-          <a:bodyPr wrap="square" anchor="t">
+          <a:bodyPr wrap="square" anchor="t" lIns="0" rIns="0" tIns="0" bIns="0">
             <a:spAutoFit/>
           </a:bodyPr>
           <a:lstStyle/>
           <a:p>
-            <a:pPr>
-              <a:spcAft>
-                <a:spcPts val="900"/>
-              </a:spcAft>
-            </a:pPr>
             <a:r>
               <a:rPr sz="2000" b="0">
                 <a:solidFill>
@@ -3457,7 +3452,7 @@
           <a:noFill/>
         </p:spPr>
         <p:txBody>
-          <a:bodyPr wrap="square" anchor="t">
+          <a:bodyPr wrap="square" anchor="t" lIns="0" rIns="0" tIns="0" bIns="0">
             <a:spAutoFit/>
           </a:bodyPr>
           <a:lstStyle/>
@@ -3491,7 +3486,7 @@
           <a:noFill/>
         </p:spPr>
         <p:txBody>
-          <a:bodyPr wrap="square" anchor="t">
+          <a:bodyPr wrap="square" anchor="t" lIns="0" rIns="0" tIns="0" bIns="0">
             <a:spAutoFit/>
           </a:bodyPr>
           <a:lstStyle/>
@@ -3694,7 +3689,7 @@
           <a:noFill/>
         </p:spPr>
         <p:txBody>
-          <a:bodyPr wrap="square" anchor="ctr">
+          <a:bodyPr wrap="square" anchor="ctr" lIns="0" rIns="0" tIns="0" bIns="0">
             <a:spAutoFit/>
           </a:bodyPr>
           <a:lstStyle/>
@@ -3764,7 +3759,7 @@
         <p:spPr>
           <a:xfrm>
             <a:off x="685800" y="1627632"/>
-            <a:ext cx="10820095" cy="3224783"/>
+            <a:ext cx="10820095" cy="2438146"/>
           </a:xfrm>
           <a:prstGeom prst="rect">
             <a:avLst/>
@@ -3808,7 +3803,7 @@
         <p:spPr>
           <a:xfrm>
             <a:off x="685800" y="1627632"/>
-            <a:ext cx="50292" cy="3224783"/>
+            <a:ext cx="50292" cy="2438146"/>
           </a:xfrm>
           <a:prstGeom prst="rect">
             <a:avLst/>
@@ -3852,7 +3847,7 @@
         <p:spPr>
           <a:xfrm>
             <a:off x="923544" y="1728216"/>
-            <a:ext cx="10417759" cy="3041903"/>
+            <a:ext cx="10417759" cy="2255266"/>
           </a:xfrm>
           <a:prstGeom prst="rect">
             <a:avLst/>
@@ -3860,7 +3855,7 @@
           <a:noFill/>
         </p:spPr>
         <p:txBody>
-          <a:bodyPr wrap="square" anchor="t">
+          <a:bodyPr wrap="square" anchor="t" lIns="0" rIns="0" tIns="0" bIns="0">
             <a:spAutoFit/>
           </a:bodyPr>
           <a:lstStyle/>
@@ -3871,7 +3866,7 @@
               </a:spcAft>
             </a:pPr>
             <a:r>
-              <a:rPr sz="1600" b="0">
+              <a:rPr sz="1100" b="0">
                 <a:solidFill>
                   <a:srgbClr val="E4ECF7"/>
                 </a:solidFill>
@@ -3894,7 +3889,7 @@
               </a:spcAft>
             </a:pPr>
             <a:r>
-              <a:rPr sz="1600" b="0">
+              <a:rPr sz="1100" b="0">
                 <a:solidFill>
                   <a:srgbClr val="E4ECF7"/>
                 </a:solidFill>
@@ -3910,7 +3905,7 @@
               </a:spcAft>
             </a:pPr>
             <a:r>
-              <a:rPr sz="1600" b="0">
+              <a:rPr sz="1100" b="0">
                 <a:solidFill>
                   <a:srgbClr val="E4ECF7"/>
                 </a:solidFill>
@@ -3926,7 +3921,7 @@
               </a:spcAft>
             </a:pPr>
             <a:r>
-              <a:rPr sz="1600" b="0">
+              <a:rPr sz="1100" b="0">
                 <a:solidFill>
                   <a:srgbClr val="E4ECF7"/>
                 </a:solidFill>
@@ -3949,7 +3944,7 @@
               </a:spcAft>
             </a:pPr>
             <a:r>
-              <a:rPr sz="1600" b="0">
+              <a:rPr sz="1100" b="0">
                 <a:solidFill>
                   <a:srgbClr val="E4ECF7"/>
                 </a:solidFill>
@@ -3965,7 +3960,7 @@
               </a:spcAft>
             </a:pPr>
             <a:r>
-              <a:rPr sz="1600" b="0">
+              <a:rPr sz="1100" b="0">
                 <a:solidFill>
                   <a:srgbClr val="E4ECF7"/>
                 </a:solidFill>
@@ -3988,7 +3983,7 @@
               </a:spcAft>
             </a:pPr>
             <a:r>
-              <a:rPr sz="1600" b="0">
+              <a:rPr sz="1100" b="0">
                 <a:solidFill>
                   <a:srgbClr val="E4ECF7"/>
                 </a:solidFill>
@@ -4004,7 +3999,7 @@
               </a:spcAft>
             </a:pPr>
             <a:r>
-              <a:rPr sz="1600" b="0">
+              <a:rPr sz="1100" b="0">
                 <a:solidFill>
                   <a:srgbClr val="E4ECF7"/>
                 </a:solidFill>
@@ -4023,8 +4018,8 @@
         </p:nvSpPr>
         <p:spPr>
           <a:xfrm>
-            <a:off x="685800" y="5017008"/>
-            <a:ext cx="10820095" cy="810768"/>
+            <a:off x="685800" y="4230370"/>
+            <a:ext cx="10820095" cy="652780"/>
           </a:xfrm>
           <a:prstGeom prst="rect">
             <a:avLst/>
@@ -4067,8 +4062,8 @@
         </p:nvSpPr>
         <p:spPr>
           <a:xfrm>
-            <a:off x="685800" y="5017008"/>
-            <a:ext cx="50292" cy="810768"/>
+            <a:off x="685800" y="4230370"/>
+            <a:ext cx="50292" cy="652780"/>
           </a:xfrm>
           <a:prstGeom prst="rect">
             <a:avLst/>
@@ -4111,8 +4106,8 @@
         </p:nvSpPr>
         <p:spPr>
           <a:xfrm>
-            <a:off x="923544" y="5117592"/>
-            <a:ext cx="10417759" cy="627888"/>
+            <a:off x="923544" y="4330954"/>
+            <a:ext cx="10417759" cy="469899"/>
           </a:xfrm>
           <a:prstGeom prst="rect">
             <a:avLst/>
@@ -4120,7 +4115,7 @@
           <a:noFill/>
         </p:spPr>
         <p:txBody>
-          <a:bodyPr wrap="square" anchor="t">
+          <a:bodyPr wrap="square" anchor="t" lIns="0" rIns="0" tIns="0" bIns="0">
             <a:spAutoFit/>
           </a:bodyPr>
           <a:lstStyle/>
@@ -4131,7 +4126,7 @@
               </a:spcAft>
             </a:pPr>
             <a:r>
-              <a:rPr sz="1600" b="0">
+              <a:rPr sz="1100" b="0">
                 <a:solidFill>
                   <a:srgbClr val="E4ECF7"/>
                 </a:solidFill>
@@ -4147,7 +4142,7 @@
               </a:spcAft>
             </a:pPr>
             <a:r>
-              <a:rPr sz="1600" b="0">
+              <a:rPr sz="1100" b="0">
                 <a:solidFill>
                   <a:srgbClr val="E4ECF7"/>
                 </a:solidFill>
@@ -4160,7 +4155,46 @@
       </p:sp>
       <p:sp>
         <p:nvSpPr>
-          <p:cNvPr id="13" name="Rectangle 12"/>
+          <p:cNvPr id="13" name="TextBox 12"/>
+          <p:cNvSpPr txBox="1"/>
+          <p:nvPr/>
+        </p:nvSpPr>
+        <p:spPr>
+          <a:xfrm>
+            <a:off x="685800" y="5047742"/>
+            <a:ext cx="10820095" cy="668528"/>
+          </a:xfrm>
+          <a:prstGeom prst="rect">
+            <a:avLst/>
+          </a:prstGeom>
+          <a:noFill/>
+        </p:spPr>
+        <p:txBody>
+          <a:bodyPr wrap="square" anchor="t" lIns="0" rIns="0" tIns="0" bIns="0">
+            <a:spAutoFit/>
+          </a:bodyPr>
+          <a:lstStyle/>
+          <a:p>
+            <a:pPr>
+              <a:spcAft>
+                <a:spcPts val="600"/>
+              </a:spcAft>
+            </a:pPr>
+            <a:r>
+              <a:rPr sz="1300" b="0">
+                <a:solidFill>
+                  <a:srgbClr val="1C1C1A"/>
+                </a:solidFill>
+                <a:latin typeface="Calibri"/>
+              </a:rPr>
+              <a:t>The number went out and a string came back. Nothing was corrupted and nothing warned you. The agreement simply never carried the type.</a:t>
+            </a:r>
+          </a:p>
+        </p:txBody>
+      </p:sp>
+      <p:sp>
+        <p:nvSpPr>
+          <p:cNvPr id="14" name="Rectangle 13"/>
           <p:cNvSpPr/>
           <p:nvPr/>
         </p:nvSpPr>
@@ -4204,7 +4238,7 @@
       </p:sp>
       <p:sp>
         <p:nvSpPr>
-          <p:cNvPr id="14" name="TextBox 13"/>
+          <p:cNvPr id="15" name="TextBox 14"/>
           <p:cNvSpPr txBox="1"/>
           <p:nvPr/>
         </p:nvSpPr>
@@ -4219,7 +4253,7 @@
           <a:noFill/>
         </p:spPr>
         <p:txBody>
-          <a:bodyPr wrap="square" anchor="t">
+          <a:bodyPr wrap="square" anchor="t" lIns="0" rIns="0" tIns="0" bIns="0">
             <a:spAutoFit/>
           </a:bodyPr>
           <a:lstStyle/>
@@ -4238,7 +4272,7 @@
       </p:sp>
       <p:sp>
         <p:nvSpPr>
-          <p:cNvPr id="15" name="TextBox 14"/>
+          <p:cNvPr id="16" name="TextBox 15"/>
           <p:cNvSpPr txBox="1"/>
           <p:nvPr/>
         </p:nvSpPr>
@@ -4253,7 +4287,7 @@
           <a:noFill/>
         </p:spPr>
         <p:txBody>
-          <a:bodyPr wrap="square" anchor="t">
+          <a:bodyPr wrap="square" anchor="t" lIns="0" rIns="0" tIns="0" bIns="0">
             <a:spAutoFit/>
           </a:bodyPr>
           <a:lstStyle/>
@@ -4403,7 +4437,7 @@
           <a:noFill/>
         </p:spPr>
         <p:txBody>
-          <a:bodyPr wrap="square" anchor="ctr">
+          <a:bodyPr wrap="square" anchor="ctr" lIns="0" rIns="0" tIns="0" bIns="0">
             <a:spAutoFit/>
           </a:bodyPr>
           <a:lstStyle/>
@@ -4481,7 +4515,7 @@
           <a:noFill/>
         </p:spPr>
         <p:txBody>
-          <a:bodyPr wrap="square" anchor="t">
+          <a:bodyPr wrap="square" anchor="t" lIns="0" rIns="0" tIns="0" bIns="0">
             <a:spAutoFit/>
           </a:bodyPr>
           <a:lstStyle/>
@@ -4580,7 +4614,7 @@
           <a:noFill/>
         </p:spPr>
         <p:txBody>
-          <a:bodyPr wrap="square" anchor="t">
+          <a:bodyPr wrap="square" anchor="t" lIns="0" rIns="0" tIns="0" bIns="0">
             <a:spAutoFit/>
           </a:bodyPr>
           <a:lstStyle/>
@@ -4614,7 +4648,7 @@
           <a:noFill/>
         </p:spPr>
         <p:txBody>
-          <a:bodyPr wrap="square" anchor="t">
+          <a:bodyPr wrap="square" anchor="t" lIns="0" rIns="0" tIns="0" bIns="0">
             <a:spAutoFit/>
           </a:bodyPr>
           <a:lstStyle/>
@@ -4764,7 +4798,7 @@
           <a:noFill/>
         </p:spPr>
         <p:txBody>
-          <a:bodyPr wrap="square" anchor="ctr">
+          <a:bodyPr wrap="square" anchor="ctr" lIns="0" rIns="0" tIns="0" bIns="0">
             <a:spAutoFit/>
           </a:bodyPr>
           <a:lstStyle/>
@@ -4833,8 +4867,8 @@
         </p:nvSpPr>
         <p:spPr>
           <a:xfrm>
-            <a:off x="685800" y="3330448"/>
-            <a:ext cx="10820095" cy="1020064"/>
+            <a:off x="685800" y="3157728"/>
+            <a:ext cx="10820095" cy="1365504"/>
           </a:xfrm>
           <a:prstGeom prst="rect">
             <a:avLst/>
@@ -4842,7 +4876,7 @@
           <a:noFill/>
         </p:spPr>
         <p:txBody>
-          <a:bodyPr wrap="square" anchor="t">
+          <a:bodyPr wrap="square" anchor="t" lIns="0" rIns="0" tIns="0" bIns="0">
             <a:spAutoFit/>
           </a:bodyPr>
           <a:lstStyle/>
@@ -4941,7 +4975,7 @@
           <a:noFill/>
         </p:spPr>
         <p:txBody>
-          <a:bodyPr wrap="square" anchor="t">
+          <a:bodyPr wrap="square" anchor="t" lIns="0" rIns="0" tIns="0" bIns="0">
             <a:spAutoFit/>
           </a:bodyPr>
           <a:lstStyle/>
@@ -4975,7 +5009,7 @@
           <a:noFill/>
         </p:spPr>
         <p:txBody>
-          <a:bodyPr wrap="square" anchor="t">
+          <a:bodyPr wrap="square" anchor="t" lIns="0" rIns="0" tIns="0" bIns="0">
             <a:spAutoFit/>
           </a:bodyPr>
           <a:lstStyle/>
@@ -5178,7 +5212,7 @@
           <a:noFill/>
         </p:spPr>
         <p:txBody>
-          <a:bodyPr wrap="square" anchor="ctr">
+          <a:bodyPr wrap="square" anchor="ctr" lIns="0" rIns="0" tIns="0" bIns="0">
             <a:spAutoFit/>
           </a:bodyPr>
           <a:lstStyle/>
@@ -5241,7 +5275,7 @@
       </p:sp>
       <p:pic>
         <p:nvPicPr>
-          <p:cNvPr id="7" name="Picture 6" descr="77c399921270bf06.png"/>
+          <p:cNvPr id="7" name="Picture 6" descr="213148cce132e979.png"/>
           <p:cNvPicPr>
             <a:picLocks noChangeAspect="1"/>
           </p:cNvPicPr>
@@ -5255,8 +5289,8 @@
         </p:blipFill>
         <p:spPr>
           <a:xfrm>
-            <a:off x="685800" y="2254859"/>
-            <a:ext cx="4652640" cy="3171240"/>
+            <a:off x="3557338" y="1627632"/>
+            <a:ext cx="5077018" cy="3460496"/>
           </a:xfrm>
           <a:prstGeom prst="rect">
             <a:avLst/>
@@ -5271,8 +5305,8 @@
         </p:nvSpPr>
         <p:spPr>
           <a:xfrm>
-            <a:off x="5771244" y="3212592"/>
-            <a:ext cx="5734650" cy="1255776"/>
+            <a:off x="685800" y="5197856"/>
+            <a:ext cx="10820095" cy="855471"/>
           </a:xfrm>
           <a:prstGeom prst="rect">
             <a:avLst/>
@@ -5280,16 +5314,11 @@
           <a:noFill/>
         </p:spPr>
         <p:txBody>
-          <a:bodyPr wrap="square" anchor="t">
+          <a:bodyPr wrap="square" anchor="t" lIns="0" rIns="0" tIns="0" bIns="0">
             <a:spAutoFit/>
           </a:bodyPr>
           <a:lstStyle/>
           <a:p>
-            <a:pPr>
-              <a:spcAft>
-                <a:spcPts val="900"/>
-              </a:spcAft>
-            </a:pPr>
             <a:r>
               <a:rPr sz="2000" b="0">
                 <a:solidFill>
@@ -5363,7 +5392,7 @@
           <a:noFill/>
         </p:spPr>
         <p:txBody>
-          <a:bodyPr wrap="square" anchor="t">
+          <a:bodyPr wrap="square" anchor="t" lIns="0" rIns="0" tIns="0" bIns="0">
             <a:spAutoFit/>
           </a:bodyPr>
           <a:lstStyle/>
@@ -5397,7 +5426,7 @@
           <a:noFill/>
         </p:spPr>
         <p:txBody>
-          <a:bodyPr wrap="square" anchor="t">
+          <a:bodyPr wrap="square" anchor="t" lIns="0" rIns="0" tIns="0" bIns="0">
             <a:spAutoFit/>
           </a:bodyPr>
           <a:lstStyle/>
@@ -5547,7 +5576,7 @@
           <a:noFill/>
         </p:spPr>
         <p:txBody>
-          <a:bodyPr wrap="square" anchor="ctr">
+          <a:bodyPr wrap="square" anchor="ctr" lIns="0" rIns="0" tIns="0" bIns="0">
             <a:spAutoFit/>
           </a:bodyPr>
           <a:lstStyle/>
@@ -5625,7 +5654,7 @@
           <a:noFill/>
         </p:spPr>
         <p:txBody>
-          <a:bodyPr wrap="square" anchor="t">
+          <a:bodyPr wrap="square" anchor="t" lIns="0" rIns="0" tIns="0" bIns="0">
             <a:spAutoFit/>
           </a:bodyPr>
           <a:lstStyle/>
@@ -5659,7 +5688,7 @@
           <a:noFill/>
         </p:spPr>
         <p:txBody>
-          <a:bodyPr wrap="square" anchor="t">
+          <a:bodyPr wrap="square" anchor="t" lIns="0" rIns="0" tIns="0" bIns="0">
             <a:spAutoFit/>
           </a:bodyPr>
           <a:lstStyle/>
@@ -5693,7 +5722,7 @@
           <a:noFill/>
         </p:spPr>
         <p:txBody>
-          <a:bodyPr wrap="square" anchor="t">
+          <a:bodyPr wrap="square" anchor="t" lIns="0" rIns="0" tIns="0" bIns="0">
             <a:spAutoFit/>
           </a:bodyPr>
           <a:lstStyle/>
@@ -5727,7 +5756,7 @@
           <a:noFill/>
         </p:spPr>
         <p:txBody>
-          <a:bodyPr wrap="square" anchor="t">
+          <a:bodyPr wrap="square" anchor="t" lIns="0" rIns="0" tIns="0" bIns="0">
             <a:spAutoFit/>
           </a:bodyPr>
           <a:lstStyle/>
@@ -5761,7 +5790,7 @@
           <a:noFill/>
         </p:spPr>
         <p:txBody>
-          <a:bodyPr wrap="square" anchor="t">
+          <a:bodyPr wrap="square" anchor="t" lIns="0" rIns="0" tIns="0" bIns="0">
             <a:spAutoFit/>
           </a:bodyPr>
           <a:lstStyle/>
@@ -5795,7 +5824,7 @@
           <a:noFill/>
         </p:spPr>
         <p:txBody>
-          <a:bodyPr wrap="square" anchor="t">
+          <a:bodyPr wrap="square" anchor="t" lIns="0" rIns="0" tIns="0" bIns="0">
             <a:spAutoFit/>
           </a:bodyPr>
           <a:lstStyle/>
@@ -5829,7 +5858,7 @@
           <a:noFill/>
         </p:spPr>
         <p:txBody>
-          <a:bodyPr wrap="square" anchor="t">
+          <a:bodyPr wrap="square" anchor="t" lIns="0" rIns="0" tIns="0" bIns="0">
             <a:spAutoFit/>
           </a:bodyPr>
           <a:lstStyle/>
@@ -5863,7 +5892,7 @@
           <a:noFill/>
         </p:spPr>
         <p:txBody>
-          <a:bodyPr wrap="square" anchor="t">
+          <a:bodyPr wrap="square" anchor="t" lIns="0" rIns="0" tIns="0" bIns="0">
             <a:spAutoFit/>
           </a:bodyPr>
           <a:lstStyle/>
@@ -5941,7 +5970,7 @@
           <a:noFill/>
         </p:spPr>
         <p:txBody>
-          <a:bodyPr wrap="square" anchor="t">
+          <a:bodyPr wrap="square" anchor="t" lIns="0" rIns="0" tIns="0" bIns="0">
             <a:spAutoFit/>
           </a:bodyPr>
           <a:lstStyle/>
@@ -5975,7 +6004,7 @@
           <a:noFill/>
         </p:spPr>
         <p:txBody>
-          <a:bodyPr wrap="square" anchor="t">
+          <a:bodyPr wrap="square" anchor="t" lIns="0" rIns="0" tIns="0" bIns="0">
             <a:spAutoFit/>
           </a:bodyPr>
           <a:lstStyle/>
@@ -6072,7 +6101,7 @@
           <a:noFill/>
         </p:spPr>
         <p:txBody>
-          <a:bodyPr wrap="square" anchor="ctr">
+          <a:bodyPr wrap="square" anchor="ctr" lIns="0" rIns="0" tIns="0" bIns="0">
             <a:spAutoFit/>
           </a:bodyPr>
           <a:lstStyle/>
@@ -6416,7 +6445,7 @@
           <a:noFill/>
         </p:spPr>
         <p:txBody>
-          <a:bodyPr wrap="square" anchor="t">
+          <a:bodyPr wrap="square" anchor="t" lIns="0" rIns="0" tIns="0" bIns="0">
             <a:spAutoFit/>
           </a:bodyPr>
           <a:lstStyle/>
@@ -6450,7 +6479,7 @@
           <a:noFill/>
         </p:spPr>
         <p:txBody>
-          <a:bodyPr wrap="square" anchor="t">
+          <a:bodyPr wrap="square" anchor="t" lIns="0" rIns="0" tIns="0" bIns="0">
             <a:spAutoFit/>
           </a:bodyPr>
           <a:lstStyle/>
@@ -6600,7 +6629,7 @@
           <a:noFill/>
         </p:spPr>
         <p:txBody>
-          <a:bodyPr wrap="square" anchor="ctr">
+          <a:bodyPr wrap="square" anchor="ctr" lIns="0" rIns="0" tIns="0" bIns="0">
             <a:spAutoFit/>
           </a:bodyPr>
           <a:lstStyle/>
@@ -6669,8 +6698,8 @@
         </p:nvSpPr>
         <p:spPr>
           <a:xfrm>
-            <a:off x="685800" y="3031744"/>
-            <a:ext cx="10820095" cy="542543"/>
+            <a:off x="685800" y="3030728"/>
+            <a:ext cx="10820095" cy="544576"/>
           </a:xfrm>
           <a:prstGeom prst="rect">
             <a:avLst/>
@@ -6713,8 +6742,8 @@
         </p:nvSpPr>
         <p:spPr>
           <a:xfrm>
-            <a:off x="685800" y="3031744"/>
-            <a:ext cx="50292" cy="542543"/>
+            <a:off x="685800" y="3030728"/>
+            <a:ext cx="50292" cy="544576"/>
           </a:xfrm>
           <a:prstGeom prst="rect">
             <a:avLst/>
@@ -6757,8 +6786,8 @@
         </p:nvSpPr>
         <p:spPr>
           <a:xfrm>
-            <a:off x="923544" y="3132328"/>
-            <a:ext cx="10417759" cy="359663"/>
+            <a:off x="923544" y="3131312"/>
+            <a:ext cx="10417759" cy="361696"/>
           </a:xfrm>
           <a:prstGeom prst="rect">
             <a:avLst/>
@@ -6766,7 +6795,7 @@
           <a:noFill/>
         </p:spPr>
         <p:txBody>
-          <a:bodyPr wrap="square" anchor="t">
+          <a:bodyPr wrap="square" anchor="t" lIns="0" rIns="0" tIns="0" bIns="0">
             <a:spAutoFit/>
           </a:bodyPr>
           <a:lstStyle/>
@@ -6796,7 +6825,7 @@
         </p:nvSpPr>
         <p:spPr>
           <a:xfrm>
-            <a:off x="685800" y="3738880"/>
+            <a:off x="685800" y="3739896"/>
             <a:ext cx="10820095" cy="910336"/>
           </a:xfrm>
           <a:prstGeom prst="rect">
@@ -6805,7 +6834,7 @@
           <a:noFill/>
         </p:spPr>
         <p:txBody>
-          <a:bodyPr wrap="square" anchor="t">
+          <a:bodyPr wrap="square" anchor="t" lIns="0" rIns="0" tIns="0" bIns="0">
             <a:spAutoFit/>
           </a:bodyPr>
           <a:lstStyle/>
@@ -6888,7 +6917,7 @@
           <a:noFill/>
         </p:spPr>
         <p:txBody>
-          <a:bodyPr wrap="square" anchor="t">
+          <a:bodyPr wrap="square" anchor="t" lIns="0" rIns="0" tIns="0" bIns="0">
             <a:spAutoFit/>
           </a:bodyPr>
           <a:lstStyle/>
@@ -6922,7 +6951,7 @@
           <a:noFill/>
         </p:spPr>
         <p:txBody>
-          <a:bodyPr wrap="square" anchor="t">
+          <a:bodyPr wrap="square" anchor="t" lIns="0" rIns="0" tIns="0" bIns="0">
             <a:spAutoFit/>
           </a:bodyPr>
           <a:lstStyle/>
@@ -7072,7 +7101,7 @@
           <a:noFill/>
         </p:spPr>
         <p:txBody>
-          <a:bodyPr wrap="square" anchor="ctr">
+          <a:bodyPr wrap="square" anchor="ctr" lIns="0" rIns="0" tIns="0" bIns="0">
             <a:spAutoFit/>
           </a:bodyPr>
           <a:lstStyle/>
@@ -7150,7 +7179,7 @@
           <a:noFill/>
         </p:spPr>
         <p:txBody>
-          <a:bodyPr wrap="square" anchor="t">
+          <a:bodyPr wrap="square" anchor="t" lIns="0" rIns="0" tIns="0" bIns="0">
             <a:spAutoFit/>
           </a:bodyPr>
           <a:lstStyle/>
@@ -7249,7 +7278,7 @@
           <a:noFill/>
         </p:spPr>
         <p:txBody>
-          <a:bodyPr wrap="square" anchor="t">
+          <a:bodyPr wrap="square" anchor="t" lIns="0" rIns="0" tIns="0" bIns="0">
             <a:spAutoFit/>
           </a:bodyPr>
           <a:lstStyle/>
@@ -7283,7 +7312,7 @@
           <a:noFill/>
         </p:spPr>
         <p:txBody>
-          <a:bodyPr wrap="square" anchor="t">
+          <a:bodyPr wrap="square" anchor="t" lIns="0" rIns="0" tIns="0" bIns="0">
             <a:spAutoFit/>
           </a:bodyPr>
           <a:lstStyle/>
@@ -7433,7 +7462,7 @@
           <a:noFill/>
         </p:spPr>
         <p:txBody>
-          <a:bodyPr wrap="square" anchor="ctr">
+          <a:bodyPr wrap="square" anchor="ctr" lIns="0" rIns="0" tIns="0" bIns="0">
             <a:spAutoFit/>
           </a:bodyPr>
           <a:lstStyle/>
@@ -7496,7 +7525,7 @@
       </p:sp>
       <p:pic>
         <p:nvPicPr>
-          <p:cNvPr id="6" name="Picture 5" descr="f77004556b447fd0.png"/>
+          <p:cNvPr id="6" name="Picture 5" descr="c043448eb37f3ed6.png"/>
           <p:cNvPicPr>
             <a:picLocks noChangeAspect="1"/>
           </p:cNvPicPr>
@@ -7510,7 +7539,7 @@
         </p:blipFill>
         <p:spPr>
           <a:xfrm>
-            <a:off x="685800" y="2690887"/>
+            <a:off x="685800" y="2645168"/>
             <a:ext cx="10820095" cy="1333984"/>
           </a:xfrm>
           <a:prstGeom prst="rect">
@@ -7526,8 +7555,8 @@
         </p:nvSpPr>
         <p:spPr>
           <a:xfrm>
-            <a:off x="685800" y="5197856"/>
-            <a:ext cx="10820095" cy="855471"/>
+            <a:off x="685800" y="4125456"/>
+            <a:ext cx="10820095" cy="910336"/>
           </a:xfrm>
           <a:prstGeom prst="rect">
             <a:avLst/>
@@ -7535,11 +7564,16 @@
           <a:noFill/>
         </p:spPr>
         <p:txBody>
-          <a:bodyPr wrap="square" anchor="t">
+          <a:bodyPr wrap="square" anchor="t" lIns="0" rIns="0" tIns="0" bIns="0">
             <a:spAutoFit/>
           </a:bodyPr>
           <a:lstStyle/>
           <a:p>
+            <a:pPr>
+              <a:spcAft>
+                <a:spcPts val="900"/>
+              </a:spcAft>
+            </a:pPr>
             <a:r>
               <a:rPr sz="2000" b="0">
                 <a:solidFill>
@@ -7613,7 +7647,7 @@
           <a:noFill/>
         </p:spPr>
         <p:txBody>
-          <a:bodyPr wrap="square" anchor="t">
+          <a:bodyPr wrap="square" anchor="t" lIns="0" rIns="0" tIns="0" bIns="0">
             <a:spAutoFit/>
           </a:bodyPr>
           <a:lstStyle/>
@@ -7647,7 +7681,7 @@
           <a:noFill/>
         </p:spPr>
         <p:txBody>
-          <a:bodyPr wrap="square" anchor="t">
+          <a:bodyPr wrap="square" anchor="t" lIns="0" rIns="0" tIns="0" bIns="0">
             <a:spAutoFit/>
           </a:bodyPr>
           <a:lstStyle/>
@@ -7797,7 +7831,7 @@
           <a:noFill/>
         </p:spPr>
         <p:txBody>
-          <a:bodyPr wrap="square" anchor="ctr">
+          <a:bodyPr wrap="square" anchor="ctr" lIns="0" rIns="0" tIns="0" bIns="0">
             <a:spAutoFit/>
           </a:bodyPr>
           <a:lstStyle/>
@@ -7866,8 +7900,8 @@
         </p:nvSpPr>
         <p:spPr>
           <a:xfrm>
-            <a:off x="685800" y="2897632"/>
-            <a:ext cx="10820095" cy="810768"/>
+            <a:off x="685800" y="2886456"/>
+            <a:ext cx="10820095" cy="833120"/>
           </a:xfrm>
           <a:prstGeom prst="rect">
             <a:avLst/>
@@ -7910,8 +7944,8 @@
         </p:nvSpPr>
         <p:spPr>
           <a:xfrm>
-            <a:off x="685800" y="2897632"/>
-            <a:ext cx="50292" cy="810768"/>
+            <a:off x="685800" y="2886456"/>
+            <a:ext cx="50292" cy="833120"/>
           </a:xfrm>
           <a:prstGeom prst="rect">
             <a:avLst/>
@@ -7954,8 +7988,8 @@
         </p:nvSpPr>
         <p:spPr>
           <a:xfrm>
-            <a:off x="923544" y="2998216"/>
-            <a:ext cx="10417759" cy="627888"/>
+            <a:off x="923544" y="2987040"/>
+            <a:ext cx="10417759" cy="650239"/>
           </a:xfrm>
           <a:prstGeom prst="rect">
             <a:avLst/>
@@ -7963,7 +7997,7 @@
           <a:noFill/>
         </p:spPr>
         <p:txBody>
-          <a:bodyPr wrap="square" anchor="t">
+          <a:bodyPr wrap="square" anchor="t" lIns="0" rIns="0" tIns="0" bIns="0">
             <a:spAutoFit/>
           </a:bodyPr>
           <a:lstStyle/>
@@ -8009,7 +8043,7 @@
         </p:nvSpPr>
         <p:spPr>
           <a:xfrm>
-            <a:off x="685800" y="3872992"/>
+            <a:off x="685800" y="3884168"/>
             <a:ext cx="10820095" cy="910336"/>
           </a:xfrm>
           <a:prstGeom prst="rect">
@@ -8018,7 +8052,7 @@
           <a:noFill/>
         </p:spPr>
         <p:txBody>
-          <a:bodyPr wrap="square" anchor="t">
+          <a:bodyPr wrap="square" anchor="t" lIns="0" rIns="0" tIns="0" bIns="0">
             <a:spAutoFit/>
           </a:bodyPr>
           <a:lstStyle/>
@@ -8101,7 +8135,7 @@
           <a:noFill/>
         </p:spPr>
         <p:txBody>
-          <a:bodyPr wrap="square" anchor="t">
+          <a:bodyPr wrap="square" anchor="t" lIns="0" rIns="0" tIns="0" bIns="0">
             <a:spAutoFit/>
           </a:bodyPr>
           <a:lstStyle/>
@@ -8135,7 +8169,7 @@
           <a:noFill/>
         </p:spPr>
         <p:txBody>
-          <a:bodyPr wrap="square" anchor="t">
+          <a:bodyPr wrap="square" anchor="t" lIns="0" rIns="0" tIns="0" bIns="0">
             <a:spAutoFit/>
           </a:bodyPr>
           <a:lstStyle/>
@@ -8285,7 +8319,7 @@
           <a:noFill/>
         </p:spPr>
         <p:txBody>
-          <a:bodyPr wrap="square" anchor="ctr">
+          <a:bodyPr wrap="square" anchor="ctr" lIns="0" rIns="0" tIns="0" bIns="0">
             <a:spAutoFit/>
           </a:bodyPr>
           <a:lstStyle/>
@@ -8636,7 +8670,7 @@
           <a:noFill/>
         </p:spPr>
         <p:txBody>
-          <a:bodyPr wrap="square" anchor="t">
+          <a:bodyPr wrap="square" anchor="t" lIns="0" rIns="0" tIns="0" bIns="0">
             <a:spAutoFit/>
           </a:bodyPr>
           <a:lstStyle/>
@@ -8719,7 +8753,7 @@
           <a:noFill/>
         </p:spPr>
         <p:txBody>
-          <a:bodyPr wrap="square" anchor="t">
+          <a:bodyPr wrap="square" anchor="t" lIns="0" rIns="0" tIns="0" bIns="0">
             <a:spAutoFit/>
           </a:bodyPr>
           <a:lstStyle/>
@@ -8753,7 +8787,7 @@
           <a:noFill/>
         </p:spPr>
         <p:txBody>
-          <a:bodyPr wrap="square" anchor="t">
+          <a:bodyPr wrap="square" anchor="t" lIns="0" rIns="0" tIns="0" bIns="0">
             <a:spAutoFit/>
           </a:bodyPr>
           <a:lstStyle/>
@@ -8956,7 +8990,7 @@
           <a:noFill/>
         </p:spPr>
         <p:txBody>
-          <a:bodyPr wrap="square" anchor="ctr">
+          <a:bodyPr wrap="square" anchor="ctr" lIns="0" rIns="0" tIns="0" bIns="0">
             <a:spAutoFit/>
           </a:bodyPr>
           <a:lstStyle/>
@@ -9026,7 +9060,7 @@
         <p:spPr>
           <a:xfrm>
             <a:off x="685800" y="1627632"/>
-            <a:ext cx="10820095" cy="564896"/>
+            <a:ext cx="10820095" cy="513080"/>
           </a:xfrm>
           <a:prstGeom prst="rect">
             <a:avLst/>
@@ -9034,18 +9068,18 @@
           <a:noFill/>
         </p:spPr>
         <p:txBody>
-          <a:bodyPr wrap="square" anchor="t">
+          <a:bodyPr wrap="square" anchor="t" lIns="0" rIns="0" tIns="0" bIns="0">
             <a:spAutoFit/>
           </a:bodyPr>
           <a:lstStyle/>
           <a:p>
             <a:pPr>
               <a:spcAft>
-                <a:spcPts val="900"/>
+                <a:spcPts val="800"/>
               </a:spcAft>
             </a:pPr>
             <a:r>
-              <a:rPr sz="2000" b="0">
+              <a:rPr sz="1700" b="0">
                 <a:solidFill>
                   <a:srgbClr val="1C1C1A"/>
                 </a:solidFill>
@@ -9064,8 +9098,8 @@
         </p:nvSpPr>
         <p:spPr>
           <a:xfrm>
-            <a:off x="685800" y="2320544"/>
-            <a:ext cx="10820095" cy="810768"/>
+            <a:off x="685800" y="2268728"/>
+            <a:ext cx="10820095" cy="760984"/>
           </a:xfrm>
           <a:prstGeom prst="rect">
             <a:avLst/>
@@ -9108,8 +9142,8 @@
         </p:nvSpPr>
         <p:spPr>
           <a:xfrm>
-            <a:off x="685800" y="2320544"/>
-            <a:ext cx="50292" cy="810768"/>
+            <a:off x="685800" y="2268728"/>
+            <a:ext cx="50292" cy="760984"/>
           </a:xfrm>
           <a:prstGeom prst="rect">
             <a:avLst/>
@@ -9152,8 +9186,8 @@
         </p:nvSpPr>
         <p:spPr>
           <a:xfrm>
-            <a:off x="923544" y="2421128"/>
-            <a:ext cx="10417759" cy="627888"/>
+            <a:off x="923544" y="2369312"/>
+            <a:ext cx="10417759" cy="578104"/>
           </a:xfrm>
           <a:prstGeom prst="rect">
             <a:avLst/>
@@ -9161,7 +9195,7 @@
           <a:noFill/>
         </p:spPr>
         <p:txBody>
-          <a:bodyPr wrap="square" anchor="t">
+          <a:bodyPr wrap="square" anchor="t" lIns="0" rIns="0" tIns="0" bIns="0">
             <a:spAutoFit/>
           </a:bodyPr>
           <a:lstStyle/>
@@ -9172,7 +9206,7 @@
               </a:spcAft>
             </a:pPr>
             <a:r>
-              <a:rPr sz="1600" b="0">
+              <a:rPr sz="1400" b="0">
                 <a:solidFill>
                   <a:srgbClr val="E4ECF7"/>
                 </a:solidFill>
@@ -9188,7 +9222,7 @@
               </a:spcAft>
             </a:pPr>
             <a:r>
-              <a:rPr sz="1600" b="0">
+              <a:rPr sz="1400" b="0">
                 <a:solidFill>
                   <a:srgbClr val="E4ECF7"/>
                 </a:solidFill>
@@ -9207,8 +9241,8 @@
         </p:nvSpPr>
         <p:spPr>
           <a:xfrm>
-            <a:off x="685800" y="3295904"/>
-            <a:ext cx="10820095" cy="1615440"/>
+            <a:off x="685800" y="3194304"/>
+            <a:ext cx="10820095" cy="1518412"/>
           </a:xfrm>
           <a:prstGeom prst="rect">
             <a:avLst/>
@@ -9251,8 +9285,8 @@
         </p:nvSpPr>
         <p:spPr>
           <a:xfrm>
-            <a:off x="685800" y="3295904"/>
-            <a:ext cx="50292" cy="1615440"/>
+            <a:off x="685800" y="3194304"/>
+            <a:ext cx="50292" cy="1518412"/>
           </a:xfrm>
           <a:prstGeom prst="rect">
             <a:avLst/>
@@ -9295,8 +9329,8 @@
         </p:nvSpPr>
         <p:spPr>
           <a:xfrm>
-            <a:off x="923544" y="3396488"/>
-            <a:ext cx="10417759" cy="1432560"/>
+            <a:off x="923544" y="3294888"/>
+            <a:ext cx="10417759" cy="1335532"/>
           </a:xfrm>
           <a:prstGeom prst="rect">
             <a:avLst/>
@@ -9304,7 +9338,7 @@
           <a:noFill/>
         </p:spPr>
         <p:txBody>
-          <a:bodyPr wrap="square" anchor="t">
+          <a:bodyPr wrap="square" anchor="t" lIns="0" rIns="0" tIns="0" bIns="0">
             <a:spAutoFit/>
           </a:bodyPr>
           <a:lstStyle/>
@@ -9315,7 +9349,7 @@
               </a:spcAft>
             </a:pPr>
             <a:r>
-              <a:rPr sz="1600" b="0">
+              <a:rPr sz="1400" b="0">
                 <a:solidFill>
                   <a:srgbClr val="E4ECF7"/>
                 </a:solidFill>
@@ -9331,7 +9365,7 @@
               </a:spcAft>
             </a:pPr>
             <a:r>
-              <a:rPr sz="1600" b="0">
+              <a:rPr sz="1400" b="0">
                 <a:solidFill>
                   <a:srgbClr val="E4ECF7"/>
                 </a:solidFill>
@@ -9347,7 +9381,7 @@
               </a:spcAft>
             </a:pPr>
             <a:r>
-              <a:rPr sz="1600" b="0">
+              <a:rPr sz="1400" b="0">
                 <a:solidFill>
                   <a:srgbClr val="E4ECF7"/>
                 </a:solidFill>
@@ -9363,7 +9397,7 @@
               </a:spcAft>
             </a:pPr>
             <a:r>
-              <a:rPr sz="1600" b="0">
+              <a:rPr sz="1400" b="0">
                 <a:solidFill>
                   <a:srgbClr val="E4ECF7"/>
                 </a:solidFill>
@@ -9379,7 +9413,7 @@
               </a:spcAft>
             </a:pPr>
             <a:r>
-              <a:rPr sz="1600" b="0">
+              <a:rPr sz="1400" b="0">
                 <a:solidFill>
                   <a:srgbClr val="E4ECF7"/>
                 </a:solidFill>
@@ -9398,8 +9432,8 @@
         </p:nvSpPr>
         <p:spPr>
           <a:xfrm>
-            <a:off x="685800" y="5075936"/>
-            <a:ext cx="10820095" cy="910336"/>
+            <a:off x="685800" y="4877308"/>
+            <a:ext cx="10820095" cy="806704"/>
           </a:xfrm>
           <a:prstGeom prst="rect">
             <a:avLst/>
@@ -9407,18 +9441,18 @@
           <a:noFill/>
         </p:spPr>
         <p:txBody>
-          <a:bodyPr wrap="square" anchor="t">
+          <a:bodyPr wrap="square" anchor="t" lIns="0" rIns="0" tIns="0" bIns="0">
             <a:spAutoFit/>
           </a:bodyPr>
           <a:lstStyle/>
           <a:p>
             <a:pPr>
               <a:spcAft>
-                <a:spcPts val="900"/>
+                <a:spcPts val="800"/>
               </a:spcAft>
             </a:pPr>
             <a:r>
-              <a:rPr sz="2000" b="0">
+              <a:rPr sz="1700" b="0">
                 <a:solidFill>
                   <a:srgbClr val="1C1C1A"/>
                 </a:solidFill>
@@ -9490,7 +9524,7 @@
           <a:noFill/>
         </p:spPr>
         <p:txBody>
-          <a:bodyPr wrap="square" anchor="t">
+          <a:bodyPr wrap="square" anchor="t" lIns="0" rIns="0" tIns="0" bIns="0">
             <a:spAutoFit/>
           </a:bodyPr>
           <a:lstStyle/>
@@ -9524,7 +9558,7 @@
           <a:noFill/>
         </p:spPr>
         <p:txBody>
-          <a:bodyPr wrap="square" anchor="t">
+          <a:bodyPr wrap="square" anchor="t" lIns="0" rIns="0" tIns="0" bIns="0">
             <a:spAutoFit/>
           </a:bodyPr>
           <a:lstStyle/>
@@ -9674,7 +9708,7 @@
           <a:noFill/>
         </p:spPr>
         <p:txBody>
-          <a:bodyPr wrap="square" anchor="ctr">
+          <a:bodyPr wrap="square" anchor="ctr" lIns="0" rIns="0" tIns="0" bIns="0">
             <a:spAutoFit/>
           </a:bodyPr>
           <a:lstStyle/>
@@ -9743,8 +9777,8 @@
         </p:nvSpPr>
         <p:spPr>
           <a:xfrm>
-            <a:off x="685800" y="3385312"/>
-            <a:ext cx="10820095" cy="910336"/>
+            <a:off x="685800" y="3212592"/>
+            <a:ext cx="10820095" cy="1255776"/>
           </a:xfrm>
           <a:prstGeom prst="rect">
             <a:avLst/>
@@ -9752,7 +9786,7 @@
           <a:noFill/>
         </p:spPr>
         <p:txBody>
-          <a:bodyPr wrap="square" anchor="t">
+          <a:bodyPr wrap="square" anchor="t" lIns="0" rIns="0" tIns="0" bIns="0">
             <a:spAutoFit/>
           </a:bodyPr>
           <a:lstStyle/>
@@ -9835,7 +9869,7 @@
           <a:noFill/>
         </p:spPr>
         <p:txBody>
-          <a:bodyPr wrap="square" anchor="t">
+          <a:bodyPr wrap="square" anchor="t" lIns="0" rIns="0" tIns="0" bIns="0">
             <a:spAutoFit/>
           </a:bodyPr>
           <a:lstStyle/>
@@ -9869,7 +9903,7 @@
           <a:noFill/>
         </p:spPr>
         <p:txBody>
-          <a:bodyPr wrap="square" anchor="t">
+          <a:bodyPr wrap="square" anchor="t" lIns="0" rIns="0" tIns="0" bIns="0">
             <a:spAutoFit/>
           </a:bodyPr>
           <a:lstStyle/>
@@ -10072,7 +10106,7 @@
           <a:noFill/>
         </p:spPr>
         <p:txBody>
-          <a:bodyPr wrap="square" anchor="ctr">
+          <a:bodyPr wrap="square" anchor="ctr" lIns="0" rIns="0" tIns="0" bIns="0">
             <a:spAutoFit/>
           </a:bodyPr>
           <a:lstStyle/>
@@ -10141,8 +10175,8 @@
         </p:nvSpPr>
         <p:spPr>
           <a:xfrm>
-            <a:off x="685800" y="2184400"/>
-            <a:ext cx="10820095" cy="3312160"/>
+            <a:off x="685800" y="1627632"/>
+            <a:ext cx="10820095" cy="4003040"/>
           </a:xfrm>
           <a:prstGeom prst="rect">
             <a:avLst/>
@@ -10150,7 +10184,7 @@
           <a:noFill/>
         </p:spPr>
         <p:txBody>
-          <a:bodyPr wrap="square" anchor="t">
+          <a:bodyPr wrap="square" anchor="t" lIns="0" rIns="0" tIns="0" bIns="0">
             <a:spAutoFit/>
           </a:bodyPr>
           <a:lstStyle/>
@@ -10281,7 +10315,7 @@
           <a:noFill/>
         </p:spPr>
         <p:txBody>
-          <a:bodyPr wrap="square" anchor="t">
+          <a:bodyPr wrap="square" anchor="t" lIns="0" rIns="0" tIns="0" bIns="0">
             <a:spAutoFit/>
           </a:bodyPr>
           <a:lstStyle/>
@@ -10315,7 +10349,7 @@
           <a:noFill/>
         </p:spPr>
         <p:txBody>
-          <a:bodyPr wrap="square" anchor="t">
+          <a:bodyPr wrap="square" anchor="t" lIns="0" rIns="0" tIns="0" bIns="0">
             <a:spAutoFit/>
           </a:bodyPr>
           <a:lstStyle/>
@@ -10518,7 +10552,7 @@
           <a:noFill/>
         </p:spPr>
         <p:txBody>
-          <a:bodyPr wrap="square" anchor="ctr">
+          <a:bodyPr wrap="square" anchor="ctr" lIns="0" rIns="0" tIns="0" bIns="0">
             <a:spAutoFit/>
           </a:bodyPr>
           <a:lstStyle/>
@@ -10588,8 +10622,8 @@
           <p:nvPr/>
         </p:nvGraphicFramePr>
         <p:xfrm>
-          <a:off x="685800" y="2354580"/>
-          <a:ext cx="10820095" cy="2971800"/>
+          <a:off x="685800" y="2484120"/>
+          <a:ext cx="10820094" cy="2712720"/>
         </p:xfrm>
         <a:graphic>
           <a:graphicData uri="http://schemas.openxmlformats.org/drawingml/2006/table">
@@ -10598,9 +10632,9 @@
                 <a:tableStyleId>{2D5ABB26-0587-4C30-8999-92F81FD0307C}</a:tableStyleId>
               </a:tblPr>
               <a:tblGrid>
-                <a:gridCol w="3606698"/>
-                <a:gridCol w="3606698"/>
-                <a:gridCol w="3606699"/>
+                <a:gridCol w="1084488"/>
+                <a:gridCol w="4867803"/>
+                <a:gridCol w="4867803"/>
               </a:tblGrid>
               <a:tr h="387096">
                 <a:tc>
@@ -10738,7 +10772,7 @@
                   </a:tcPr>
                 </a:tc>
               </a:tr>
-              <a:tr h="905256">
+              <a:tr h="646176">
                 <a:tc>
                   <a:txBody>
                     <a:bodyPr/>
@@ -11007,7 +11041,7 @@
           <a:noFill/>
         </p:spPr>
         <p:txBody>
-          <a:bodyPr wrap="square" anchor="t">
+          <a:bodyPr wrap="square" anchor="t" lIns="0" rIns="0" tIns="0" bIns="0">
             <a:spAutoFit/>
           </a:bodyPr>
           <a:lstStyle/>
@@ -11041,7 +11075,7 @@
           <a:noFill/>
         </p:spPr>
         <p:txBody>
-          <a:bodyPr wrap="square" anchor="t">
+          <a:bodyPr wrap="square" anchor="t" lIns="0" rIns="0" tIns="0" bIns="0">
             <a:spAutoFit/>
           </a:bodyPr>
           <a:lstStyle/>
@@ -11191,7 +11225,7 @@
           <a:noFill/>
         </p:spPr>
         <p:txBody>
-          <a:bodyPr wrap="square" anchor="ctr">
+          <a:bodyPr wrap="square" anchor="ctr" lIns="0" rIns="0" tIns="0" bIns="0">
             <a:spAutoFit/>
           </a:bodyPr>
           <a:lstStyle/>
@@ -11269,7 +11303,7 @@
           <a:noFill/>
         </p:spPr>
         <p:txBody>
-          <a:bodyPr wrap="square" anchor="t">
+          <a:bodyPr wrap="square" anchor="t" lIns="0" rIns="0" tIns="0" bIns="0">
             <a:spAutoFit/>
           </a:bodyPr>
           <a:lstStyle/>
@@ -11303,7 +11337,7 @@
           <a:noFill/>
         </p:spPr>
         <p:txBody>
-          <a:bodyPr wrap="square" anchor="t">
+          <a:bodyPr wrap="square" anchor="t" lIns="0" rIns="0" tIns="0" bIns="0">
             <a:spAutoFit/>
           </a:bodyPr>
           <a:lstStyle/>
@@ -11337,7 +11371,7 @@
           <a:noFill/>
         </p:spPr>
         <p:txBody>
-          <a:bodyPr wrap="square" anchor="t">
+          <a:bodyPr wrap="square" anchor="t" lIns="0" rIns="0" tIns="0" bIns="0">
             <a:spAutoFit/>
           </a:bodyPr>
           <a:lstStyle/>
@@ -11371,7 +11405,7 @@
           <a:noFill/>
         </p:spPr>
         <p:txBody>
-          <a:bodyPr wrap="square" anchor="t">
+          <a:bodyPr wrap="square" anchor="t" lIns="0" rIns="0" tIns="0" bIns="0">
             <a:spAutoFit/>
           </a:bodyPr>
           <a:lstStyle/>
@@ -11405,7 +11439,7 @@
           <a:noFill/>
         </p:spPr>
         <p:txBody>
-          <a:bodyPr wrap="square" anchor="t">
+          <a:bodyPr wrap="square" anchor="t" lIns="0" rIns="0" tIns="0" bIns="0">
             <a:spAutoFit/>
           </a:bodyPr>
           <a:lstStyle/>
@@ -11439,7 +11473,7 @@
           <a:noFill/>
         </p:spPr>
         <p:txBody>
-          <a:bodyPr wrap="square" anchor="t">
+          <a:bodyPr wrap="square" anchor="t" lIns="0" rIns="0" tIns="0" bIns="0">
             <a:spAutoFit/>
           </a:bodyPr>
           <a:lstStyle/>
@@ -11473,7 +11507,7 @@
           <a:noFill/>
         </p:spPr>
         <p:txBody>
-          <a:bodyPr wrap="square" anchor="t">
+          <a:bodyPr wrap="square" anchor="t" lIns="0" rIns="0" tIns="0" bIns="0">
             <a:spAutoFit/>
           </a:bodyPr>
           <a:lstStyle/>
@@ -11507,7 +11541,7 @@
           <a:noFill/>
         </p:spPr>
         <p:txBody>
-          <a:bodyPr wrap="square" anchor="t">
+          <a:bodyPr wrap="square" anchor="t" lIns="0" rIns="0" tIns="0" bIns="0">
             <a:spAutoFit/>
           </a:bodyPr>
           <a:lstStyle/>
@@ -11585,7 +11619,7 @@
           <a:noFill/>
         </p:spPr>
         <p:txBody>
-          <a:bodyPr wrap="square" anchor="t">
+          <a:bodyPr wrap="square" anchor="t" lIns="0" rIns="0" tIns="0" bIns="0">
             <a:spAutoFit/>
           </a:bodyPr>
           <a:lstStyle/>
@@ -11619,7 +11653,7 @@
           <a:noFill/>
         </p:spPr>
         <p:txBody>
-          <a:bodyPr wrap="square" anchor="t">
+          <a:bodyPr wrap="square" anchor="t" lIns="0" rIns="0" tIns="0" bIns="0">
             <a:spAutoFit/>
           </a:bodyPr>
           <a:lstStyle/>
@@ -11716,7 +11750,7 @@
           <a:noFill/>
         </p:spPr>
         <p:txBody>
-          <a:bodyPr wrap="square" anchor="ctr">
+          <a:bodyPr wrap="square" anchor="ctr" lIns="0" rIns="0" tIns="0" bIns="0">
             <a:spAutoFit/>
           </a:bodyPr>
           <a:lstStyle/>
@@ -12060,7 +12094,7 @@
           <a:noFill/>
         </p:spPr>
         <p:txBody>
-          <a:bodyPr wrap="square" anchor="t">
+          <a:bodyPr wrap="square" anchor="t" lIns="0" rIns="0" tIns="0" bIns="0">
             <a:spAutoFit/>
           </a:bodyPr>
           <a:lstStyle/>
@@ -12094,7 +12128,7 @@
           <a:noFill/>
         </p:spPr>
         <p:txBody>
-          <a:bodyPr wrap="square" anchor="t">
+          <a:bodyPr wrap="square" anchor="t" lIns="0" rIns="0" tIns="0" bIns="0">
             <a:spAutoFit/>
           </a:bodyPr>
           <a:lstStyle/>
@@ -12244,7 +12278,7 @@
           <a:noFill/>
         </p:spPr>
         <p:txBody>
-          <a:bodyPr wrap="square" anchor="ctr">
+          <a:bodyPr wrap="square" anchor="ctr" lIns="0" rIns="0" tIns="0" bIns="0">
             <a:spAutoFit/>
           </a:bodyPr>
           <a:lstStyle/>
@@ -12313,8 +12347,8 @@
         </p:nvSpPr>
         <p:spPr>
           <a:xfrm>
-            <a:off x="685800" y="3031744"/>
-            <a:ext cx="10820095" cy="542543"/>
+            <a:off x="685800" y="3030728"/>
+            <a:ext cx="10820095" cy="544576"/>
           </a:xfrm>
           <a:prstGeom prst="rect">
             <a:avLst/>
@@ -12357,8 +12391,8 @@
         </p:nvSpPr>
         <p:spPr>
           <a:xfrm>
-            <a:off x="685800" y="3031744"/>
-            <a:ext cx="50292" cy="542543"/>
+            <a:off x="685800" y="3030728"/>
+            <a:ext cx="50292" cy="544576"/>
           </a:xfrm>
           <a:prstGeom prst="rect">
             <a:avLst/>
@@ -12401,8 +12435,8 @@
         </p:nvSpPr>
         <p:spPr>
           <a:xfrm>
-            <a:off x="923544" y="3132328"/>
-            <a:ext cx="10417759" cy="359663"/>
+            <a:off x="923544" y="3131312"/>
+            <a:ext cx="10417759" cy="361696"/>
           </a:xfrm>
           <a:prstGeom prst="rect">
             <a:avLst/>
@@ -12410,7 +12444,7 @@
           <a:noFill/>
         </p:spPr>
         <p:txBody>
-          <a:bodyPr wrap="square" anchor="t">
+          <a:bodyPr wrap="square" anchor="t" lIns="0" rIns="0" tIns="0" bIns="0">
             <a:spAutoFit/>
           </a:bodyPr>
           <a:lstStyle/>
@@ -12440,7 +12474,7 @@
         </p:nvSpPr>
         <p:spPr>
           <a:xfrm>
-            <a:off x="685800" y="3738880"/>
+            <a:off x="685800" y="3739896"/>
             <a:ext cx="10820095" cy="910336"/>
           </a:xfrm>
           <a:prstGeom prst="rect">
@@ -12449,7 +12483,7 @@
           <a:noFill/>
         </p:spPr>
         <p:txBody>
-          <a:bodyPr wrap="square" anchor="t">
+          <a:bodyPr wrap="square" anchor="t" lIns="0" rIns="0" tIns="0" bIns="0">
             <a:spAutoFit/>
           </a:bodyPr>
           <a:lstStyle/>
@@ -12532,7 +12566,7 @@
           <a:noFill/>
         </p:spPr>
         <p:txBody>
-          <a:bodyPr wrap="square" anchor="t">
+          <a:bodyPr wrap="square" anchor="t" lIns="0" rIns="0" tIns="0" bIns="0">
             <a:spAutoFit/>
           </a:bodyPr>
           <a:lstStyle/>
@@ -12566,7 +12600,7 @@
           <a:noFill/>
         </p:spPr>
         <p:txBody>
-          <a:bodyPr wrap="square" anchor="t">
+          <a:bodyPr wrap="square" anchor="t" lIns="0" rIns="0" tIns="0" bIns="0">
             <a:spAutoFit/>
           </a:bodyPr>
           <a:lstStyle/>
@@ -12716,7 +12750,7 @@
           <a:noFill/>
         </p:spPr>
         <p:txBody>
-          <a:bodyPr wrap="square" anchor="ctr">
+          <a:bodyPr wrap="square" anchor="ctr" lIns="0" rIns="0" tIns="0" bIns="0">
             <a:spAutoFit/>
           </a:bodyPr>
           <a:lstStyle/>
@@ -12785,8 +12819,8 @@
         </p:nvSpPr>
         <p:spPr>
           <a:xfrm>
-            <a:off x="685800" y="2668016"/>
-            <a:ext cx="10820095" cy="1615440"/>
+            <a:off x="685800" y="2626360"/>
+            <a:ext cx="10820095" cy="1698752"/>
           </a:xfrm>
           <a:prstGeom prst="rect">
             <a:avLst/>
@@ -12829,8 +12863,8 @@
         </p:nvSpPr>
         <p:spPr>
           <a:xfrm>
-            <a:off x="685800" y="2668016"/>
-            <a:ext cx="50292" cy="1615440"/>
+            <a:off x="685800" y="2626360"/>
+            <a:ext cx="50292" cy="1698752"/>
           </a:xfrm>
           <a:prstGeom prst="rect">
             <a:avLst/>
@@ -12873,8 +12907,8 @@
         </p:nvSpPr>
         <p:spPr>
           <a:xfrm>
-            <a:off x="923544" y="2768600"/>
-            <a:ext cx="10417759" cy="1432560"/>
+            <a:off x="923544" y="2726944"/>
+            <a:ext cx="10417759" cy="1515872"/>
           </a:xfrm>
           <a:prstGeom prst="rect">
             <a:avLst/>
@@ -12882,7 +12916,7 @@
           <a:noFill/>
         </p:spPr>
         <p:txBody>
-          <a:bodyPr wrap="square" anchor="t">
+          <a:bodyPr wrap="square" anchor="t" lIns="0" rIns="0" tIns="0" bIns="0">
             <a:spAutoFit/>
           </a:bodyPr>
           <a:lstStyle/>
@@ -12967,7 +13001,7 @@
         </p:nvSpPr>
         <p:spPr>
           <a:xfrm>
-            <a:off x="685800" y="4448048"/>
+            <a:off x="685800" y="4489704"/>
             <a:ext cx="10820095" cy="564896"/>
           </a:xfrm>
           <a:prstGeom prst="rect">
@@ -12976,7 +13010,7 @@
           <a:noFill/>
         </p:spPr>
         <p:txBody>
-          <a:bodyPr wrap="square" anchor="t">
+          <a:bodyPr wrap="square" anchor="t" lIns="0" rIns="0" tIns="0" bIns="0">
             <a:spAutoFit/>
           </a:bodyPr>
           <a:lstStyle/>
@@ -13059,7 +13093,7 @@
           <a:noFill/>
         </p:spPr>
         <p:txBody>
-          <a:bodyPr wrap="square" anchor="t">
+          <a:bodyPr wrap="square" anchor="t" lIns="0" rIns="0" tIns="0" bIns="0">
             <a:spAutoFit/>
           </a:bodyPr>
           <a:lstStyle/>
@@ -13093,7 +13127,7 @@
           <a:noFill/>
         </p:spPr>
         <p:txBody>
-          <a:bodyPr wrap="square" anchor="t">
+          <a:bodyPr wrap="square" anchor="t" lIns="0" rIns="0" tIns="0" bIns="0">
             <a:spAutoFit/>
           </a:bodyPr>
           <a:lstStyle/>
@@ -13243,7 +13277,7 @@
           <a:noFill/>
         </p:spPr>
         <p:txBody>
-          <a:bodyPr wrap="square" anchor="ctr">
+          <a:bodyPr wrap="square" anchor="ctr" lIns="0" rIns="0" tIns="0" bIns="0">
             <a:spAutoFit/>
           </a:bodyPr>
           <a:lstStyle/>
@@ -13306,7 +13340,7 @@
       </p:sp>
       <p:pic>
         <p:nvPicPr>
-          <p:cNvPr id="6" name="Picture 5" descr="ed95556db6172c1e.png"/>
+          <p:cNvPr id="6" name="Picture 5" descr="23b3781b697df088.png"/>
           <p:cNvPicPr>
             <a:picLocks noChangeAspect="1"/>
           </p:cNvPicPr>
@@ -13320,8 +13354,8 @@
         </p:blipFill>
         <p:spPr>
           <a:xfrm>
-            <a:off x="1157740" y="1627632"/>
-            <a:ext cx="3708760" cy="4425696"/>
+            <a:off x="4645888" y="1627632"/>
+            <a:ext cx="2899917" cy="3460495"/>
           </a:xfrm>
           <a:prstGeom prst="rect">
             <a:avLst/>
@@ -13336,8 +13370,8 @@
         </p:nvSpPr>
         <p:spPr>
           <a:xfrm>
-            <a:off x="5771244" y="3212592"/>
-            <a:ext cx="5734650" cy="1255776"/>
+            <a:off x="685800" y="5197856"/>
+            <a:ext cx="10820095" cy="855471"/>
           </a:xfrm>
           <a:prstGeom prst="rect">
             <a:avLst/>
@@ -13345,16 +13379,11 @@
           <a:noFill/>
         </p:spPr>
         <p:txBody>
-          <a:bodyPr wrap="square" anchor="t">
+          <a:bodyPr wrap="square" anchor="t" lIns="0" rIns="0" tIns="0" bIns="0">
             <a:spAutoFit/>
           </a:bodyPr>
           <a:lstStyle/>
           <a:p>
-            <a:pPr>
-              <a:spcAft>
-                <a:spcPts val="900"/>
-              </a:spcAft>
-            </a:pPr>
             <a:r>
               <a:rPr sz="2000" b="0">
                 <a:solidFill>
@@ -13428,7 +13457,7 @@
           <a:noFill/>
         </p:spPr>
         <p:txBody>
-          <a:bodyPr wrap="square" anchor="t">
+          <a:bodyPr wrap="square" anchor="t" lIns="0" rIns="0" tIns="0" bIns="0">
             <a:spAutoFit/>
           </a:bodyPr>
           <a:lstStyle/>
@@ -13462,7 +13491,7 @@
           <a:noFill/>
         </p:spPr>
         <p:txBody>
-          <a:bodyPr wrap="square" anchor="t">
+          <a:bodyPr wrap="square" anchor="t" lIns="0" rIns="0" tIns="0" bIns="0">
             <a:spAutoFit/>
           </a:bodyPr>
           <a:lstStyle/>
@@ -13612,7 +13641,7 @@
           <a:noFill/>
         </p:spPr>
         <p:txBody>
-          <a:bodyPr wrap="square" anchor="ctr">
+          <a:bodyPr wrap="square" anchor="ctr" lIns="0" rIns="0" tIns="0" bIns="0">
             <a:spAutoFit/>
           </a:bodyPr>
           <a:lstStyle/>
@@ -13690,7 +13719,7 @@
           <a:noFill/>
         </p:spPr>
         <p:txBody>
-          <a:bodyPr wrap="square" anchor="t">
+          <a:bodyPr wrap="square" anchor="t" lIns="0" rIns="0" tIns="0" bIns="0">
             <a:spAutoFit/>
           </a:bodyPr>
           <a:lstStyle/>
@@ -13789,7 +13818,7 @@
           <a:noFill/>
         </p:spPr>
         <p:txBody>
-          <a:bodyPr wrap="square" anchor="t">
+          <a:bodyPr wrap="square" anchor="t" lIns="0" rIns="0" tIns="0" bIns="0">
             <a:spAutoFit/>
           </a:bodyPr>
           <a:lstStyle/>
@@ -13823,7 +13852,7 @@
           <a:noFill/>
         </p:spPr>
         <p:txBody>
-          <a:bodyPr wrap="square" anchor="t">
+          <a:bodyPr wrap="square" anchor="t" lIns="0" rIns="0" tIns="0" bIns="0">
             <a:spAutoFit/>
           </a:bodyPr>
           <a:lstStyle/>
@@ -13973,7 +14002,7 @@
           <a:noFill/>
         </p:spPr>
         <p:txBody>
-          <a:bodyPr wrap="square" anchor="ctr">
+          <a:bodyPr wrap="square" anchor="ctr" lIns="0" rIns="0" tIns="0" bIns="0">
             <a:spAutoFit/>
           </a:bodyPr>
           <a:lstStyle/>
@@ -14042,8 +14071,8 @@
         </p:nvSpPr>
         <p:spPr>
           <a:xfrm>
-            <a:off x="685800" y="3330448"/>
-            <a:ext cx="10820095" cy="1020064"/>
+            <a:off x="685800" y="3157728"/>
+            <a:ext cx="10820095" cy="1365504"/>
           </a:xfrm>
           <a:prstGeom prst="rect">
             <a:avLst/>
@@ -14051,7 +14080,7 @@
           <a:noFill/>
         </p:spPr>
         <p:txBody>
-          <a:bodyPr wrap="square" anchor="t">
+          <a:bodyPr wrap="square" anchor="t" lIns="0" rIns="0" tIns="0" bIns="0">
             <a:spAutoFit/>
           </a:bodyPr>
           <a:lstStyle/>
@@ -14150,7 +14179,7 @@
           <a:noFill/>
         </p:spPr>
         <p:txBody>
-          <a:bodyPr wrap="square" anchor="t">
+          <a:bodyPr wrap="square" anchor="t" lIns="0" rIns="0" tIns="0" bIns="0">
             <a:spAutoFit/>
           </a:bodyPr>
           <a:lstStyle/>
@@ -14184,7 +14213,7 @@
           <a:noFill/>
         </p:spPr>
         <p:txBody>
-          <a:bodyPr wrap="square" anchor="t">
+          <a:bodyPr wrap="square" anchor="t" lIns="0" rIns="0" tIns="0" bIns="0">
             <a:spAutoFit/>
           </a:bodyPr>
           <a:lstStyle/>
@@ -14387,7 +14416,7 @@
           <a:noFill/>
         </p:spPr>
         <p:txBody>
-          <a:bodyPr wrap="square" anchor="ctr">
+          <a:bodyPr wrap="square" anchor="ctr" lIns="0" rIns="0" tIns="0" bIns="0">
             <a:spAutoFit/>
           </a:bodyPr>
           <a:lstStyle/>
@@ -14457,7 +14486,7 @@
         <p:spPr>
           <a:xfrm>
             <a:off x="685800" y="1627632"/>
-            <a:ext cx="10820095" cy="564896"/>
+            <a:ext cx="10820095" cy="478536"/>
           </a:xfrm>
           <a:prstGeom prst="rect">
             <a:avLst/>
@@ -14465,18 +14494,18 @@
           <a:noFill/>
         </p:spPr>
         <p:txBody>
-          <a:bodyPr wrap="square" anchor="t">
+          <a:bodyPr wrap="square" anchor="t" lIns="0" rIns="0" tIns="0" bIns="0">
             <a:spAutoFit/>
           </a:bodyPr>
           <a:lstStyle/>
           <a:p>
             <a:pPr>
               <a:spcAft>
-                <a:spcPts val="900"/>
+                <a:spcPts val="700"/>
               </a:spcAft>
             </a:pPr>
             <a:r>
-              <a:rPr sz="2000" b="0">
+              <a:rPr sz="1500" b="0">
                 <a:solidFill>
                   <a:srgbClr val="1C1C1A"/>
                 </a:solidFill>
@@ -14495,8 +14524,8 @@
         </p:nvSpPr>
         <p:spPr>
           <a:xfrm>
-            <a:off x="685800" y="2320544"/>
-            <a:ext cx="10820095" cy="1078992"/>
+            <a:off x="685800" y="2234184"/>
+            <a:ext cx="10820095" cy="905256"/>
           </a:xfrm>
           <a:prstGeom prst="rect">
             <a:avLst/>
@@ -14539,8 +14568,8 @@
         </p:nvSpPr>
         <p:spPr>
           <a:xfrm>
-            <a:off x="685800" y="2320544"/>
-            <a:ext cx="50292" cy="1078992"/>
+            <a:off x="685800" y="2234184"/>
+            <a:ext cx="50292" cy="905256"/>
           </a:xfrm>
           <a:prstGeom prst="rect">
             <a:avLst/>
@@ -14583,8 +14612,8 @@
         </p:nvSpPr>
         <p:spPr>
           <a:xfrm>
-            <a:off x="923544" y="2421128"/>
-            <a:ext cx="10417759" cy="896112"/>
+            <a:off x="923544" y="2334768"/>
+            <a:ext cx="10417759" cy="722376"/>
           </a:xfrm>
           <a:prstGeom prst="rect">
             <a:avLst/>
@@ -14592,7 +14621,7 @@
           <a:noFill/>
         </p:spPr>
         <p:txBody>
-          <a:bodyPr wrap="square" anchor="t">
+          <a:bodyPr wrap="square" anchor="t" lIns="0" rIns="0" tIns="0" bIns="0">
             <a:spAutoFit/>
           </a:bodyPr>
           <a:lstStyle/>
@@ -14603,7 +14632,7 @@
               </a:spcAft>
             </a:pPr>
             <a:r>
-              <a:rPr sz="1600" b="0">
+              <a:rPr sz="1200" b="0">
                 <a:solidFill>
                   <a:srgbClr val="E4ECF7"/>
                 </a:solidFill>
@@ -14619,7 +14648,7 @@
               </a:spcAft>
             </a:pPr>
             <a:r>
-              <a:rPr sz="1600" b="0">
+              <a:rPr sz="1200" b="0">
                 <a:solidFill>
                   <a:srgbClr val="E4ECF7"/>
                 </a:solidFill>
@@ -14635,7 +14664,7 @@
               </a:spcAft>
             </a:pPr>
             <a:r>
-              <a:rPr sz="1600" b="0">
+              <a:rPr sz="1200" b="0">
                 <a:solidFill>
                   <a:srgbClr val="E4ECF7"/>
                 </a:solidFill>
@@ -14654,8 +14683,8 @@
         </p:nvSpPr>
         <p:spPr>
           <a:xfrm>
-            <a:off x="685800" y="3564128"/>
-            <a:ext cx="10820095" cy="810768"/>
+            <a:off x="685800" y="3304032"/>
+            <a:ext cx="10820095" cy="688848"/>
           </a:xfrm>
           <a:prstGeom prst="rect">
             <a:avLst/>
@@ -14698,8 +14727,8 @@
         </p:nvSpPr>
         <p:spPr>
           <a:xfrm>
-            <a:off x="685800" y="3564128"/>
-            <a:ext cx="50292" cy="810768"/>
+            <a:off x="685800" y="3304032"/>
+            <a:ext cx="50292" cy="688848"/>
           </a:xfrm>
           <a:prstGeom prst="rect">
             <a:avLst/>
@@ -14742,8 +14771,8 @@
         </p:nvSpPr>
         <p:spPr>
           <a:xfrm>
-            <a:off x="923544" y="3664712"/>
-            <a:ext cx="10417759" cy="627888"/>
+            <a:off x="923544" y="3404616"/>
+            <a:ext cx="10417759" cy="505967"/>
           </a:xfrm>
           <a:prstGeom prst="rect">
             <a:avLst/>
@@ -14751,7 +14780,7 @@
           <a:noFill/>
         </p:spPr>
         <p:txBody>
-          <a:bodyPr wrap="square" anchor="t">
+          <a:bodyPr wrap="square" anchor="t" lIns="0" rIns="0" tIns="0" bIns="0">
             <a:spAutoFit/>
           </a:bodyPr>
           <a:lstStyle/>
@@ -14762,7 +14791,7 @@
               </a:spcAft>
             </a:pPr>
             <a:r>
-              <a:rPr sz="1600" b="0">
+              <a:rPr sz="1200" b="0">
                 <a:solidFill>
                   <a:srgbClr val="E4ECF7"/>
                 </a:solidFill>
@@ -14778,7 +14807,7 @@
               </a:spcAft>
             </a:pPr>
             <a:r>
-              <a:rPr sz="1600" b="0">
+              <a:rPr sz="1200" b="0">
                 <a:solidFill>
                   <a:srgbClr val="E4ECF7"/>
                 </a:solidFill>
@@ -14797,8 +14826,8 @@
         </p:nvSpPr>
         <p:spPr>
           <a:xfrm>
-            <a:off x="685800" y="4539488"/>
-            <a:ext cx="10820095" cy="2511552"/>
+            <a:off x="685800" y="4157472"/>
+            <a:ext cx="10820095" cy="1475232"/>
           </a:xfrm>
           <a:prstGeom prst="rect">
             <a:avLst/>
@@ -14806,18 +14835,18 @@
           <a:noFill/>
         </p:spPr>
         <p:txBody>
-          <a:bodyPr wrap="square" anchor="t">
+          <a:bodyPr wrap="square" anchor="t" lIns="0" rIns="0" tIns="0" bIns="0">
             <a:spAutoFit/>
           </a:bodyPr>
           <a:lstStyle/>
           <a:p>
             <a:pPr>
               <a:spcAft>
-                <a:spcPts val="900"/>
+                <a:spcPts val="700"/>
               </a:spcAft>
             </a:pPr>
             <a:r>
-              <a:rPr sz="2000" b="0">
+              <a:rPr sz="1500" b="0">
                 <a:solidFill>
                   <a:srgbClr val="1C1C1A"/>
                 </a:solidFill>
@@ -14829,11 +14858,11 @@
           <a:p>
             <a:pPr>
               <a:spcAft>
-                <a:spcPts val="900"/>
+                <a:spcPts val="700"/>
               </a:spcAft>
             </a:pPr>
             <a:r>
-              <a:rPr sz="2000" b="0">
+              <a:rPr sz="1500" b="0">
                 <a:solidFill>
                   <a:srgbClr val="1C1C1A"/>
                 </a:solidFill>
@@ -14845,11 +14874,11 @@
           <a:p>
             <a:pPr>
               <a:spcAft>
-                <a:spcPts val="900"/>
+                <a:spcPts val="700"/>
               </a:spcAft>
             </a:pPr>
             <a:r>
-              <a:rPr sz="2000" b="0">
+              <a:rPr sz="1500" b="0">
                 <a:solidFill>
                   <a:srgbClr val="1C1C1A"/>
                 </a:solidFill>
@@ -14921,7 +14950,7 @@
           <a:noFill/>
         </p:spPr>
         <p:txBody>
-          <a:bodyPr wrap="square" anchor="t">
+          <a:bodyPr wrap="square" anchor="t" lIns="0" rIns="0" tIns="0" bIns="0">
             <a:spAutoFit/>
           </a:bodyPr>
           <a:lstStyle/>
@@ -14955,7 +14984,7 @@
           <a:noFill/>
         </p:spPr>
         <p:txBody>
-          <a:bodyPr wrap="square" anchor="t">
+          <a:bodyPr wrap="square" anchor="t" lIns="0" rIns="0" tIns="0" bIns="0">
             <a:spAutoFit/>
           </a:bodyPr>
           <a:lstStyle/>
@@ -15158,7 +15187,7 @@
           <a:noFill/>
         </p:spPr>
         <p:txBody>
-          <a:bodyPr wrap="square" anchor="ctr">
+          <a:bodyPr wrap="square" anchor="ctr" lIns="0" rIns="0" tIns="0" bIns="0">
             <a:spAutoFit/>
           </a:bodyPr>
           <a:lstStyle/>
@@ -15236,7 +15265,7 @@
           <a:noFill/>
         </p:spPr>
         <p:txBody>
-          <a:bodyPr wrap="square" anchor="t">
+          <a:bodyPr wrap="square" anchor="t" lIns="0" rIns="0" tIns="0" bIns="0">
             <a:spAutoFit/>
           </a:bodyPr>
           <a:lstStyle/>
@@ -15299,7 +15328,7 @@
         <p:spPr>
           <a:xfrm>
             <a:off x="685800" y="3921760"/>
-            <a:ext cx="10820095" cy="542543"/>
+            <a:ext cx="10820095" cy="544576"/>
           </a:xfrm>
           <a:prstGeom prst="rect">
             <a:avLst/>
@@ -15343,7 +15372,7 @@
         <p:spPr>
           <a:xfrm>
             <a:off x="685800" y="3921760"/>
-            <a:ext cx="50292" cy="542543"/>
+            <a:ext cx="50292" cy="544576"/>
           </a:xfrm>
           <a:prstGeom prst="rect">
             <a:avLst/>
@@ -15387,7 +15416,7 @@
         <p:spPr>
           <a:xfrm>
             <a:off x="923544" y="4022344"/>
-            <a:ext cx="10417759" cy="359663"/>
+            <a:ext cx="10417759" cy="361696"/>
           </a:xfrm>
           <a:prstGeom prst="rect">
             <a:avLst/>
@@ -15395,7 +15424,7 @@
           <a:noFill/>
         </p:spPr>
         <p:txBody>
-          <a:bodyPr wrap="square" anchor="t">
+          <a:bodyPr wrap="square" anchor="t" lIns="0" rIns="0" tIns="0" bIns="0">
             <a:spAutoFit/>
           </a:bodyPr>
           <a:lstStyle/>
@@ -15425,7 +15454,7 @@
         </p:nvSpPr>
         <p:spPr>
           <a:xfrm>
-            <a:off x="685800" y="4628895"/>
+            <a:off x="685800" y="4630927"/>
             <a:ext cx="10820095" cy="910336"/>
           </a:xfrm>
           <a:prstGeom prst="rect">
@@ -15434,7 +15463,7 @@
           <a:noFill/>
         </p:spPr>
         <p:txBody>
-          <a:bodyPr wrap="square" anchor="t">
+          <a:bodyPr wrap="square" anchor="t" lIns="0" rIns="0" tIns="0" bIns="0">
             <a:spAutoFit/>
           </a:bodyPr>
           <a:lstStyle/>
@@ -15517,7 +15546,7 @@
           <a:noFill/>
         </p:spPr>
         <p:txBody>
-          <a:bodyPr wrap="square" anchor="t">
+          <a:bodyPr wrap="square" anchor="t" lIns="0" rIns="0" tIns="0" bIns="0">
             <a:spAutoFit/>
           </a:bodyPr>
           <a:lstStyle/>
@@ -15551,7 +15580,7 @@
           <a:noFill/>
         </p:spPr>
         <p:txBody>
-          <a:bodyPr wrap="square" anchor="t">
+          <a:bodyPr wrap="square" anchor="t" lIns="0" rIns="0" tIns="0" bIns="0">
             <a:spAutoFit/>
           </a:bodyPr>
           <a:lstStyle/>
@@ -15701,7 +15730,7 @@
           <a:noFill/>
         </p:spPr>
         <p:txBody>
-          <a:bodyPr wrap="square" anchor="ctr">
+          <a:bodyPr wrap="square" anchor="ctr" lIns="0" rIns="0" tIns="0" bIns="0">
             <a:spAutoFit/>
           </a:bodyPr>
           <a:lstStyle/>
@@ -15779,7 +15808,7 @@
           <a:noFill/>
         </p:spPr>
         <p:txBody>
-          <a:bodyPr wrap="square" anchor="t">
+          <a:bodyPr wrap="square" anchor="t" lIns="0" rIns="0" tIns="0" bIns="0">
             <a:spAutoFit/>
           </a:bodyPr>
           <a:lstStyle/>
@@ -15813,7 +15842,7 @@
           <a:noFill/>
         </p:spPr>
         <p:txBody>
-          <a:bodyPr wrap="square" anchor="t">
+          <a:bodyPr wrap="square" anchor="t" lIns="0" rIns="0" tIns="0" bIns="0">
             <a:spAutoFit/>
           </a:bodyPr>
           <a:lstStyle/>
@@ -15847,7 +15876,7 @@
           <a:noFill/>
         </p:spPr>
         <p:txBody>
-          <a:bodyPr wrap="square" anchor="t">
+          <a:bodyPr wrap="square" anchor="t" lIns="0" rIns="0" tIns="0" bIns="0">
             <a:spAutoFit/>
           </a:bodyPr>
           <a:lstStyle/>
@@ -15881,7 +15910,7 @@
           <a:noFill/>
         </p:spPr>
         <p:txBody>
-          <a:bodyPr wrap="square" anchor="t">
+          <a:bodyPr wrap="square" anchor="t" lIns="0" rIns="0" tIns="0" bIns="0">
             <a:spAutoFit/>
           </a:bodyPr>
           <a:lstStyle/>
@@ -15915,7 +15944,7 @@
           <a:noFill/>
         </p:spPr>
         <p:txBody>
-          <a:bodyPr wrap="square" anchor="t">
+          <a:bodyPr wrap="square" anchor="t" lIns="0" rIns="0" tIns="0" bIns="0">
             <a:spAutoFit/>
           </a:bodyPr>
           <a:lstStyle/>
@@ -15949,7 +15978,7 @@
           <a:noFill/>
         </p:spPr>
         <p:txBody>
-          <a:bodyPr wrap="square" anchor="t">
+          <a:bodyPr wrap="square" anchor="t" lIns="0" rIns="0" tIns="0" bIns="0">
             <a:spAutoFit/>
           </a:bodyPr>
           <a:lstStyle/>
@@ -15983,7 +16012,7 @@
           <a:noFill/>
         </p:spPr>
         <p:txBody>
-          <a:bodyPr wrap="square" anchor="t">
+          <a:bodyPr wrap="square" anchor="t" lIns="0" rIns="0" tIns="0" bIns="0">
             <a:spAutoFit/>
           </a:bodyPr>
           <a:lstStyle/>
@@ -16017,7 +16046,7 @@
           <a:noFill/>
         </p:spPr>
         <p:txBody>
-          <a:bodyPr wrap="square" anchor="t">
+          <a:bodyPr wrap="square" anchor="t" lIns="0" rIns="0" tIns="0" bIns="0">
             <a:spAutoFit/>
           </a:bodyPr>
           <a:lstStyle/>
@@ -16095,7 +16124,7 @@
           <a:noFill/>
         </p:spPr>
         <p:txBody>
-          <a:bodyPr wrap="square" anchor="t">
+          <a:bodyPr wrap="square" anchor="t" lIns="0" rIns="0" tIns="0" bIns="0">
             <a:spAutoFit/>
           </a:bodyPr>
           <a:lstStyle/>
@@ -16129,7 +16158,7 @@
           <a:noFill/>
         </p:spPr>
         <p:txBody>
-          <a:bodyPr wrap="square" anchor="t">
+          <a:bodyPr wrap="square" anchor="t" lIns="0" rIns="0" tIns="0" bIns="0">
             <a:spAutoFit/>
           </a:bodyPr>
           <a:lstStyle/>
@@ -16226,7 +16255,7 @@
           <a:noFill/>
         </p:spPr>
         <p:txBody>
-          <a:bodyPr wrap="square" anchor="ctr">
+          <a:bodyPr wrap="square" anchor="ctr" lIns="0" rIns="0" tIns="0" bIns="0">
             <a:spAutoFit/>
           </a:bodyPr>
           <a:lstStyle/>
@@ -16570,7 +16599,7 @@
           <a:noFill/>
         </p:spPr>
         <p:txBody>
-          <a:bodyPr wrap="square" anchor="t">
+          <a:bodyPr wrap="square" anchor="t" lIns="0" rIns="0" tIns="0" bIns="0">
             <a:spAutoFit/>
           </a:bodyPr>
           <a:lstStyle/>
@@ -16604,7 +16633,7 @@
           <a:noFill/>
         </p:spPr>
         <p:txBody>
-          <a:bodyPr wrap="square" anchor="t">
+          <a:bodyPr wrap="square" anchor="t" lIns="0" rIns="0" tIns="0" bIns="0">
             <a:spAutoFit/>
           </a:bodyPr>
           <a:lstStyle/>
@@ -16754,7 +16783,7 @@
           <a:noFill/>
         </p:spPr>
         <p:txBody>
-          <a:bodyPr wrap="square" anchor="ctr">
+          <a:bodyPr wrap="square" anchor="ctr" lIns="0" rIns="0" tIns="0" bIns="0">
             <a:spAutoFit/>
           </a:bodyPr>
           <a:lstStyle/>
@@ -16823,8 +16852,8 @@
         </p:nvSpPr>
         <p:spPr>
           <a:xfrm>
-            <a:off x="685800" y="2802128"/>
-            <a:ext cx="10820095" cy="1347216"/>
+            <a:off x="685800" y="2770632"/>
+            <a:ext cx="10820095" cy="1410208"/>
           </a:xfrm>
           <a:prstGeom prst="rect">
             <a:avLst/>
@@ -16867,8 +16896,8 @@
         </p:nvSpPr>
         <p:spPr>
           <a:xfrm>
-            <a:off x="685800" y="2802128"/>
-            <a:ext cx="50292" cy="1347216"/>
+            <a:off x="685800" y="2770632"/>
+            <a:ext cx="50292" cy="1410208"/>
           </a:xfrm>
           <a:prstGeom prst="rect">
             <a:avLst/>
@@ -16911,8 +16940,8 @@
         </p:nvSpPr>
         <p:spPr>
           <a:xfrm>
-            <a:off x="923544" y="2902712"/>
-            <a:ext cx="10417759" cy="1164336"/>
+            <a:off x="923544" y="2871216"/>
+            <a:ext cx="10417759" cy="1227328"/>
           </a:xfrm>
           <a:prstGeom prst="rect">
             <a:avLst/>
@@ -16920,7 +16949,7 @@
           <a:noFill/>
         </p:spPr>
         <p:txBody>
-          <a:bodyPr wrap="square" anchor="t">
+          <a:bodyPr wrap="square" anchor="t" lIns="0" rIns="0" tIns="0" bIns="0">
             <a:spAutoFit/>
           </a:bodyPr>
           <a:lstStyle/>
@@ -16989,7 +17018,7 @@
         </p:nvSpPr>
         <p:spPr>
           <a:xfrm>
-            <a:off x="685800" y="4313936"/>
+            <a:off x="685800" y="4345432"/>
             <a:ext cx="10820095" cy="564896"/>
           </a:xfrm>
           <a:prstGeom prst="rect">
@@ -16998,7 +17027,7 @@
           <a:noFill/>
         </p:spPr>
         <p:txBody>
-          <a:bodyPr wrap="square" anchor="t">
+          <a:bodyPr wrap="square" anchor="t" lIns="0" rIns="0" tIns="0" bIns="0">
             <a:spAutoFit/>
           </a:bodyPr>
           <a:lstStyle/>
@@ -17081,7 +17110,7 @@
           <a:noFill/>
         </p:spPr>
         <p:txBody>
-          <a:bodyPr wrap="square" anchor="t">
+          <a:bodyPr wrap="square" anchor="t" lIns="0" rIns="0" tIns="0" bIns="0">
             <a:spAutoFit/>
           </a:bodyPr>
           <a:lstStyle/>
@@ -17115,7 +17144,7 @@
           <a:noFill/>
         </p:spPr>
         <p:txBody>
-          <a:bodyPr wrap="square" anchor="t">
+          <a:bodyPr wrap="square" anchor="t" lIns="0" rIns="0" tIns="0" bIns="0">
             <a:spAutoFit/>
           </a:bodyPr>
           <a:lstStyle/>
@@ -17265,7 +17294,7 @@
           <a:noFill/>
         </p:spPr>
         <p:txBody>
-          <a:bodyPr wrap="square" anchor="ctr">
+          <a:bodyPr wrap="square" anchor="ctr" lIns="0" rIns="0" tIns="0" bIns="0">
             <a:spAutoFit/>
           </a:bodyPr>
           <a:lstStyle/>
@@ -17334,8 +17363,8 @@
         </p:nvSpPr>
         <p:spPr>
           <a:xfrm>
-            <a:off x="685800" y="2495296"/>
-            <a:ext cx="10820095" cy="1615440"/>
+            <a:off x="685800" y="2453640"/>
+            <a:ext cx="10820095" cy="1698752"/>
           </a:xfrm>
           <a:prstGeom prst="rect">
             <a:avLst/>
@@ -17378,8 +17407,8 @@
         </p:nvSpPr>
         <p:spPr>
           <a:xfrm>
-            <a:off x="685800" y="2495296"/>
-            <a:ext cx="50292" cy="1615440"/>
+            <a:off x="685800" y="2453640"/>
+            <a:ext cx="50292" cy="1698752"/>
           </a:xfrm>
           <a:prstGeom prst="rect">
             <a:avLst/>
@@ -17422,8 +17451,8 @@
         </p:nvSpPr>
         <p:spPr>
           <a:xfrm>
-            <a:off x="923544" y="2595880"/>
-            <a:ext cx="10417759" cy="1432560"/>
+            <a:off x="923544" y="2554224"/>
+            <a:ext cx="10417759" cy="1515872"/>
           </a:xfrm>
           <a:prstGeom prst="rect">
             <a:avLst/>
@@ -17431,7 +17460,7 @@
           <a:noFill/>
         </p:spPr>
         <p:txBody>
-          <a:bodyPr wrap="square" anchor="t">
+          <a:bodyPr wrap="square" anchor="t" lIns="0" rIns="0" tIns="0" bIns="0">
             <a:spAutoFit/>
           </a:bodyPr>
           <a:lstStyle/>
@@ -17525,7 +17554,7 @@
         </p:nvSpPr>
         <p:spPr>
           <a:xfrm>
-            <a:off x="685800" y="4275328"/>
+            <a:off x="685800" y="4316984"/>
             <a:ext cx="10820095" cy="910336"/>
           </a:xfrm>
           <a:prstGeom prst="rect">
@@ -17534,7 +17563,7 @@
           <a:noFill/>
         </p:spPr>
         <p:txBody>
-          <a:bodyPr wrap="square" anchor="t">
+          <a:bodyPr wrap="square" anchor="t" lIns="0" rIns="0" tIns="0" bIns="0">
             <a:spAutoFit/>
           </a:bodyPr>
           <a:lstStyle/>
@@ -17617,7 +17646,7 @@
           <a:noFill/>
         </p:spPr>
         <p:txBody>
-          <a:bodyPr wrap="square" anchor="t">
+          <a:bodyPr wrap="square" anchor="t" lIns="0" rIns="0" tIns="0" bIns="0">
             <a:spAutoFit/>
           </a:bodyPr>
           <a:lstStyle/>
@@ -17651,7 +17680,7 @@
           <a:noFill/>
         </p:spPr>
         <p:txBody>
-          <a:bodyPr wrap="square" anchor="t">
+          <a:bodyPr wrap="square" anchor="t" lIns="0" rIns="0" tIns="0" bIns="0">
             <a:spAutoFit/>
           </a:bodyPr>
           <a:lstStyle/>
@@ -17801,7 +17830,7 @@
           <a:noFill/>
         </p:spPr>
         <p:txBody>
-          <a:bodyPr wrap="square" anchor="ctr">
+          <a:bodyPr wrap="square" anchor="ctr" lIns="0" rIns="0" tIns="0" bIns="0">
             <a:spAutoFit/>
           </a:bodyPr>
           <a:lstStyle/>
@@ -17864,7 +17893,7 @@
       </p:sp>
       <p:pic>
         <p:nvPicPr>
-          <p:cNvPr id="6" name="Picture 5" descr="eaf6deea91943d9b.png"/>
+          <p:cNvPr id="6" name="Picture 5" descr="6ed0cf0fc055bd6d.png"/>
           <p:cNvPicPr>
             <a:picLocks noChangeAspect="1"/>
           </p:cNvPicPr>
@@ -17903,7 +17932,7 @@
           <a:noFill/>
         </p:spPr>
         <p:txBody>
-          <a:bodyPr wrap="square" anchor="t">
+          <a:bodyPr wrap="square" anchor="t" lIns="0" rIns="0" tIns="0" bIns="0">
             <a:spAutoFit/>
           </a:bodyPr>
           <a:lstStyle/>
@@ -17981,7 +18010,7 @@
           <a:noFill/>
         </p:spPr>
         <p:txBody>
-          <a:bodyPr wrap="square" anchor="t">
+          <a:bodyPr wrap="square" anchor="t" lIns="0" rIns="0" tIns="0" bIns="0">
             <a:spAutoFit/>
           </a:bodyPr>
           <a:lstStyle/>
@@ -18015,7 +18044,7 @@
           <a:noFill/>
         </p:spPr>
         <p:txBody>
-          <a:bodyPr wrap="square" anchor="t">
+          <a:bodyPr wrap="square" anchor="t" lIns="0" rIns="0" tIns="0" bIns="0">
             <a:spAutoFit/>
           </a:bodyPr>
           <a:lstStyle/>
@@ -18165,7 +18194,7 @@
           <a:noFill/>
         </p:spPr>
         <p:txBody>
-          <a:bodyPr wrap="square" anchor="ctr">
+          <a:bodyPr wrap="square" anchor="ctr" lIns="0" rIns="0" tIns="0" bIns="0">
             <a:spAutoFit/>
           </a:bodyPr>
           <a:lstStyle/>
@@ -18243,7 +18272,7 @@
           <a:noFill/>
         </p:spPr>
         <p:txBody>
-          <a:bodyPr wrap="square" anchor="t">
+          <a:bodyPr wrap="square" anchor="t" lIns="0" rIns="0" tIns="0" bIns="0">
             <a:spAutoFit/>
           </a:bodyPr>
           <a:lstStyle/>
@@ -18342,7 +18371,7 @@
           <a:noFill/>
         </p:spPr>
         <p:txBody>
-          <a:bodyPr wrap="square" anchor="t">
+          <a:bodyPr wrap="square" anchor="t" lIns="0" rIns="0" tIns="0" bIns="0">
             <a:spAutoFit/>
           </a:bodyPr>
           <a:lstStyle/>
@@ -18376,7 +18405,7 @@
           <a:noFill/>
         </p:spPr>
         <p:txBody>
-          <a:bodyPr wrap="square" anchor="t">
+          <a:bodyPr wrap="square" anchor="t" lIns="0" rIns="0" tIns="0" bIns="0">
             <a:spAutoFit/>
           </a:bodyPr>
           <a:lstStyle/>
@@ -18579,7 +18608,7 @@
           <a:noFill/>
         </p:spPr>
         <p:txBody>
-          <a:bodyPr wrap="square" anchor="ctr">
+          <a:bodyPr wrap="square" anchor="ctr" lIns="0" rIns="0" tIns="0" bIns="0">
             <a:spAutoFit/>
           </a:bodyPr>
           <a:lstStyle/>
@@ -18642,7 +18671,7 @@
       </p:sp>
       <p:pic>
         <p:nvPicPr>
-          <p:cNvPr id="7" name="Picture 6" descr="80a98536dc844086.png"/>
+          <p:cNvPr id="7" name="Picture 6" descr="f9140a5576b22a35.png"/>
           <p:cNvPicPr>
             <a:picLocks noChangeAspect="1"/>
           </p:cNvPicPr>
@@ -18656,8 +18685,8 @@
         </p:blipFill>
         <p:spPr>
           <a:xfrm>
-            <a:off x="685800" y="1927571"/>
-            <a:ext cx="4652640" cy="3825816"/>
+            <a:off x="685799" y="1627632"/>
+            <a:ext cx="10820095" cy="2877138"/>
           </a:xfrm>
           <a:prstGeom prst="rect">
             <a:avLst/>
@@ -18672,8 +18701,8 @@
         </p:nvSpPr>
         <p:spPr>
           <a:xfrm>
-            <a:off x="5771244" y="3342132"/>
-            <a:ext cx="5734650" cy="996696"/>
+            <a:off x="685800" y="4651074"/>
+            <a:ext cx="10820095" cy="1255776"/>
           </a:xfrm>
           <a:prstGeom prst="rect">
             <a:avLst/>
@@ -18681,18 +18710,18 @@
           <a:noFill/>
         </p:spPr>
         <p:txBody>
-          <a:bodyPr wrap="square" anchor="t">
+          <a:bodyPr wrap="square" anchor="t" lIns="0" rIns="0" tIns="0" bIns="0">
             <a:spAutoFit/>
           </a:bodyPr>
           <a:lstStyle/>
           <a:p>
             <a:pPr>
               <a:spcAft>
-                <a:spcPts val="700"/>
+                <a:spcPts val="900"/>
               </a:spcAft>
             </a:pPr>
             <a:r>
-              <a:rPr sz="1500" b="0">
+              <a:rPr sz="2000" b="0">
                 <a:solidFill>
                   <a:srgbClr val="1C1C1A"/>
                 </a:solidFill>
@@ -18764,7 +18793,7 @@
           <a:noFill/>
         </p:spPr>
         <p:txBody>
-          <a:bodyPr wrap="square" anchor="t">
+          <a:bodyPr wrap="square" anchor="t" lIns="0" rIns="0" tIns="0" bIns="0">
             <a:spAutoFit/>
           </a:bodyPr>
           <a:lstStyle/>
@@ -18798,7 +18827,7 @@
           <a:noFill/>
         </p:spPr>
         <p:txBody>
-          <a:bodyPr wrap="square" anchor="t">
+          <a:bodyPr wrap="square" anchor="t" lIns="0" rIns="0" tIns="0" bIns="0">
             <a:spAutoFit/>
           </a:bodyPr>
           <a:lstStyle/>
@@ -18948,7 +18977,7 @@
           <a:noFill/>
         </p:spPr>
         <p:txBody>
-          <a:bodyPr wrap="square" anchor="ctr">
+          <a:bodyPr wrap="square" anchor="ctr" lIns="0" rIns="0" tIns="0" bIns="0">
             <a:spAutoFit/>
           </a:bodyPr>
           <a:lstStyle/>
@@ -19017,8 +19046,8 @@
         </p:nvSpPr>
         <p:spPr>
           <a:xfrm>
-            <a:off x="685800" y="3330448"/>
-            <a:ext cx="10820095" cy="1020064"/>
+            <a:off x="685800" y="3157728"/>
+            <a:ext cx="10820095" cy="1365504"/>
           </a:xfrm>
           <a:prstGeom prst="rect">
             <a:avLst/>
@@ -19026,7 +19055,7 @@
           <a:noFill/>
         </p:spPr>
         <p:txBody>
-          <a:bodyPr wrap="square" anchor="t">
+          <a:bodyPr wrap="square" anchor="t" lIns="0" rIns="0" tIns="0" bIns="0">
             <a:spAutoFit/>
           </a:bodyPr>
           <a:lstStyle/>
@@ -19125,7 +19154,7 @@
           <a:noFill/>
         </p:spPr>
         <p:txBody>
-          <a:bodyPr wrap="square" anchor="t">
+          <a:bodyPr wrap="square" anchor="t" lIns="0" rIns="0" tIns="0" bIns="0">
             <a:spAutoFit/>
           </a:bodyPr>
           <a:lstStyle/>
@@ -19159,7 +19188,7 @@
           <a:noFill/>
         </p:spPr>
         <p:txBody>
-          <a:bodyPr wrap="square" anchor="t">
+          <a:bodyPr wrap="square" anchor="t" lIns="0" rIns="0" tIns="0" bIns="0">
             <a:spAutoFit/>
           </a:bodyPr>
           <a:lstStyle/>
@@ -19309,7 +19338,7 @@
           <a:noFill/>
         </p:spPr>
         <p:txBody>
-          <a:bodyPr wrap="square" anchor="ctr">
+          <a:bodyPr wrap="square" anchor="ctr" lIns="0" rIns="0" tIns="0" bIns="0">
             <a:spAutoFit/>
           </a:bodyPr>
           <a:lstStyle/>
@@ -19387,7 +19416,7 @@
           <a:noFill/>
         </p:spPr>
         <p:txBody>
-          <a:bodyPr wrap="square" anchor="t">
+          <a:bodyPr wrap="square" anchor="t" lIns="0" rIns="0" tIns="0" bIns="0">
             <a:spAutoFit/>
           </a:bodyPr>
           <a:lstStyle/>
@@ -19486,7 +19515,7 @@
           <a:noFill/>
         </p:spPr>
         <p:txBody>
-          <a:bodyPr wrap="square" anchor="t">
+          <a:bodyPr wrap="square" anchor="t" lIns="0" rIns="0" tIns="0" bIns="0">
             <a:spAutoFit/>
           </a:bodyPr>
           <a:lstStyle/>
@@ -19520,7 +19549,7 @@
           <a:noFill/>
         </p:spPr>
         <p:txBody>
-          <a:bodyPr wrap="square" anchor="t">
+          <a:bodyPr wrap="square" anchor="t" lIns="0" rIns="0" tIns="0" bIns="0">
             <a:spAutoFit/>
           </a:bodyPr>
           <a:lstStyle/>
@@ -19723,7 +19752,7 @@
           <a:noFill/>
         </p:spPr>
         <p:txBody>
-          <a:bodyPr wrap="square" anchor="ctr">
+          <a:bodyPr wrap="square" anchor="ctr" lIns="0" rIns="0" tIns="0" bIns="0">
             <a:spAutoFit/>
           </a:bodyPr>
           <a:lstStyle/>
@@ -19793,7 +19822,7 @@
         <p:spPr>
           <a:xfrm>
             <a:off x="685800" y="1627632"/>
-            <a:ext cx="10820095" cy="910336"/>
+            <a:ext cx="10820095" cy="513080"/>
           </a:xfrm>
           <a:prstGeom prst="rect">
             <a:avLst/>
@@ -19801,18 +19830,18 @@
           <a:noFill/>
         </p:spPr>
         <p:txBody>
-          <a:bodyPr wrap="square" anchor="t">
+          <a:bodyPr wrap="square" anchor="t" lIns="0" rIns="0" tIns="0" bIns="0">
             <a:spAutoFit/>
           </a:bodyPr>
           <a:lstStyle/>
           <a:p>
             <a:pPr>
               <a:spcAft>
-                <a:spcPts val="900"/>
+                <a:spcPts val="800"/>
               </a:spcAft>
             </a:pPr>
             <a:r>
-              <a:rPr sz="2000" b="0">
+              <a:rPr sz="1700" b="0">
                 <a:solidFill>
                   <a:srgbClr val="1C1C1A"/>
                 </a:solidFill>
@@ -19831,8 +19860,8 @@
         </p:nvSpPr>
         <p:spPr>
           <a:xfrm>
-            <a:off x="685800" y="2665984"/>
-            <a:ext cx="10820095" cy="542543"/>
+            <a:off x="685800" y="2268728"/>
+            <a:ext cx="10820095" cy="508508"/>
           </a:xfrm>
           <a:prstGeom prst="rect">
             <a:avLst/>
@@ -19875,8 +19904,8 @@
         </p:nvSpPr>
         <p:spPr>
           <a:xfrm>
-            <a:off x="685800" y="2665984"/>
-            <a:ext cx="50292" cy="542543"/>
+            <a:off x="685800" y="2268728"/>
+            <a:ext cx="50292" cy="508508"/>
           </a:xfrm>
           <a:prstGeom prst="rect">
             <a:avLst/>
@@ -19919,8 +19948,8 @@
         </p:nvSpPr>
         <p:spPr>
           <a:xfrm>
-            <a:off x="923544" y="2766568"/>
-            <a:ext cx="10417759" cy="359663"/>
+            <a:off x="923544" y="2369312"/>
+            <a:ext cx="10417759" cy="325628"/>
           </a:xfrm>
           <a:prstGeom prst="rect">
             <a:avLst/>
@@ -19928,7 +19957,7 @@
           <a:noFill/>
         </p:spPr>
         <p:txBody>
-          <a:bodyPr wrap="square" anchor="t">
+          <a:bodyPr wrap="square" anchor="t" lIns="0" rIns="0" tIns="0" bIns="0">
             <a:spAutoFit/>
           </a:bodyPr>
           <a:lstStyle/>
@@ -19939,7 +19968,7 @@
               </a:spcAft>
             </a:pPr>
             <a:r>
-              <a:rPr sz="1600" b="0">
+              <a:rPr sz="1400" b="0">
                 <a:solidFill>
                   <a:srgbClr val="E4ECF7"/>
                 </a:solidFill>
@@ -19959,8 +19988,8 @@
           <p:nvPr/>
         </p:nvGraphicFramePr>
         <p:xfrm>
-          <a:off x="685800" y="3373120"/>
-          <a:ext cx="10820095" cy="2325624"/>
+          <a:off x="685800" y="2941828"/>
+          <a:ext cx="10820094" cy="1859280"/>
         </p:xfrm>
         <a:graphic>
           <a:graphicData uri="http://schemas.openxmlformats.org/drawingml/2006/table">
@@ -19969,17 +19998,17 @@
                 <a:tableStyleId>{2D5ABB26-0587-4C30-8999-92F81FD0307C}</a:tableStyleId>
               </a:tblPr>
               <a:tblGrid>
-                <a:gridCol w="5410047"/>
-                <a:gridCol w="5410048"/>
+                <a:gridCol w="3112357"/>
+                <a:gridCol w="7707737"/>
               </a:tblGrid>
-              <a:tr h="387096">
+              <a:tr h="352552">
                 <a:tc>
                   <a:txBody>
                     <a:bodyPr/>
                     <a:lstStyle/>
                     <a:p>
                       <a:r>
-                        <a:rPr sz="1600" b="1">
+                        <a:rPr sz="1400" b="1">
                           <a:solidFill>
                             <a:srgbClr val="FFFFFF"/>
                           </a:solidFill>
@@ -20001,7 +20030,7 @@
                     <a:lstStyle/>
                     <a:p>
                       <a:r>
-                        <a:rPr sz="1600" b="1">
+                        <a:rPr sz="1400" b="1">
                           <a:solidFill>
                             <a:srgbClr val="FFFFFF"/>
                           </a:solidFill>
@@ -20018,14 +20047,14 @@
                   </a:tcPr>
                 </a:tc>
               </a:tr>
-              <a:tr h="646176">
+              <a:tr h="352552">
                 <a:tc>
                   <a:txBody>
                     <a:bodyPr/>
                     <a:lstStyle/>
                     <a:p>
                       <a:r>
-                        <a:rPr sz="1500" b="0">
+                        <a:rPr sz="1300" b="0">
                           <a:solidFill>
                             <a:srgbClr val="1C1C1A"/>
                           </a:solidFill>
@@ -20047,7 +20076,7 @@
                     <a:lstStyle/>
                     <a:p>
                       <a:r>
-                        <a:rPr sz="1500" b="0">
+                        <a:rPr sz="1300" b="0">
                           <a:solidFill>
                             <a:srgbClr val="1C1C1A"/>
                           </a:solidFill>
@@ -20064,14 +20093,14 @@
                   </a:tcPr>
                 </a:tc>
               </a:tr>
-              <a:tr h="646176">
+              <a:tr h="577088">
                 <a:tc>
                   <a:txBody>
                     <a:bodyPr/>
                     <a:lstStyle/>
                     <a:p>
                       <a:r>
-                        <a:rPr sz="1500" b="0">
+                        <a:rPr sz="1300" b="0">
                           <a:solidFill>
                             <a:srgbClr val="1C1C1A"/>
                           </a:solidFill>
@@ -20093,7 +20122,7 @@
                     <a:lstStyle/>
                     <a:p>
                       <a:r>
-                        <a:rPr sz="1500" b="0">
+                        <a:rPr sz="1300" b="0">
                           <a:solidFill>
                             <a:srgbClr val="1C1C1A"/>
                           </a:solidFill>
@@ -20110,14 +20139,14 @@
                   </a:tcPr>
                 </a:tc>
               </a:tr>
-              <a:tr h="646176">
+              <a:tr h="577088">
                 <a:tc>
                   <a:txBody>
                     <a:bodyPr/>
                     <a:lstStyle/>
                     <a:p>
                       <a:r>
-                        <a:rPr sz="1500" b="0">
+                        <a:rPr sz="1300" b="0">
                           <a:solidFill>
                             <a:srgbClr val="1C1C1A"/>
                           </a:solidFill>
@@ -20139,7 +20168,7 @@
                     <a:lstStyle/>
                     <a:p>
                       <a:r>
-                        <a:rPr sz="1500" b="0">
+                        <a:rPr sz="1300" b="0">
                           <a:solidFill>
                             <a:srgbClr val="1C1C1A"/>
                           </a:solidFill>
@@ -20162,7 +20191,46 @@
       </p:graphicFrame>
       <p:sp>
         <p:nvSpPr>
-          <p:cNvPr id="12" name="Rectangle 11"/>
+          <p:cNvPr id="12" name="TextBox 11"/>
+          <p:cNvSpPr txBox="1"/>
+          <p:nvPr/>
+        </p:nvSpPr>
+        <p:spPr>
+          <a:xfrm>
+            <a:off x="685800" y="5057140"/>
+            <a:ext cx="10820095" cy="806704"/>
+          </a:xfrm>
+          <a:prstGeom prst="rect">
+            <a:avLst/>
+          </a:prstGeom>
+          <a:noFill/>
+        </p:spPr>
+        <p:txBody>
+          <a:bodyPr wrap="square" anchor="t" lIns="0" rIns="0" tIns="0" bIns="0">
+            <a:spAutoFit/>
+          </a:bodyPr>
+          <a:lstStyle/>
+          <a:p>
+            <a:pPr>
+              <a:spcAft>
+                <a:spcPts val="800"/>
+              </a:spcAft>
+            </a:pPr>
+            <a:r>
+              <a:rPr sz="1700" b="0">
+                <a:solidFill>
+                  <a:srgbClr val="1C1C1A"/>
+                </a:solidFill>
+                <a:latin typeface="Calibri"/>
+              </a:rPr>
+              <a:t>The message points at where the parser gave up, which is usually one line past where the damage is. Look at line 47 as well as 48.</a:t>
+            </a:r>
+          </a:p>
+        </p:txBody>
+      </p:sp>
+      <p:sp>
+        <p:nvSpPr>
+          <p:cNvPr id="13" name="Rectangle 12"/>
           <p:cNvSpPr/>
           <p:nvPr/>
         </p:nvSpPr>
@@ -20206,7 +20274,7 @@
       </p:sp>
       <p:sp>
         <p:nvSpPr>
-          <p:cNvPr id="13" name="TextBox 12"/>
+          <p:cNvPr id="14" name="TextBox 13"/>
           <p:cNvSpPr txBox="1"/>
           <p:nvPr/>
         </p:nvSpPr>
@@ -20221,7 +20289,7 @@
           <a:noFill/>
         </p:spPr>
         <p:txBody>
-          <a:bodyPr wrap="square" anchor="t">
+          <a:bodyPr wrap="square" anchor="t" lIns="0" rIns="0" tIns="0" bIns="0">
             <a:spAutoFit/>
           </a:bodyPr>
           <a:lstStyle/>
@@ -20240,7 +20308,7 @@
       </p:sp>
       <p:sp>
         <p:nvSpPr>
-          <p:cNvPr id="14" name="TextBox 13"/>
+          <p:cNvPr id="15" name="TextBox 14"/>
           <p:cNvSpPr txBox="1"/>
           <p:nvPr/>
         </p:nvSpPr>
@@ -20255,7 +20323,7 @@
           <a:noFill/>
         </p:spPr>
         <p:txBody>
-          <a:bodyPr wrap="square" anchor="t">
+          <a:bodyPr wrap="square" anchor="t" lIns="0" rIns="0" tIns="0" bIns="0">
             <a:spAutoFit/>
           </a:bodyPr>
           <a:lstStyle/>
@@ -20458,7 +20526,7 @@
           <a:noFill/>
         </p:spPr>
         <p:txBody>
-          <a:bodyPr wrap="square" anchor="ctr">
+          <a:bodyPr wrap="square" anchor="ctr" lIns="0" rIns="0" tIns="0" bIns="0">
             <a:spAutoFit/>
           </a:bodyPr>
           <a:lstStyle/>
@@ -20529,7 +20597,7 @@
         </p:nvGraphicFramePr>
         <p:xfrm>
           <a:off x="685800" y="2030476"/>
-          <a:ext cx="10820095" cy="2453640"/>
+          <a:ext cx="10820094" cy="2453640"/>
         </p:xfrm>
         <a:graphic>
           <a:graphicData uri="http://schemas.openxmlformats.org/drawingml/2006/table">
@@ -20539,7 +20607,7 @@
               </a:tblPr>
               <a:tblGrid>
                 <a:gridCol w="5410047"/>
-                <a:gridCol w="5410048"/>
+                <a:gridCol w="5410047"/>
               </a:tblGrid>
               <a:tr h="387096">
                 <a:tc>
@@ -20792,7 +20860,7 @@
           <a:noFill/>
         </p:spPr>
         <p:txBody>
-          <a:bodyPr wrap="square" anchor="t">
+          <a:bodyPr wrap="square" anchor="t" lIns="0" rIns="0" tIns="0" bIns="0">
             <a:spAutoFit/>
           </a:bodyPr>
           <a:lstStyle/>
@@ -20875,7 +20943,7 @@
           <a:noFill/>
         </p:spPr>
         <p:txBody>
-          <a:bodyPr wrap="square" anchor="t">
+          <a:bodyPr wrap="square" anchor="t" lIns="0" rIns="0" tIns="0" bIns="0">
             <a:spAutoFit/>
           </a:bodyPr>
           <a:lstStyle/>
@@ -20909,7 +20977,7 @@
           <a:noFill/>
         </p:spPr>
         <p:txBody>
-          <a:bodyPr wrap="square" anchor="t">
+          <a:bodyPr wrap="square" anchor="t" lIns="0" rIns="0" tIns="0" bIns="0">
             <a:spAutoFit/>
           </a:bodyPr>
           <a:lstStyle/>
@@ -21059,7 +21127,7 @@
           <a:noFill/>
         </p:spPr>
         <p:txBody>
-          <a:bodyPr wrap="square" anchor="ctr">
+          <a:bodyPr wrap="square" anchor="ctr" lIns="0" rIns="0" tIns="0" bIns="0">
             <a:spAutoFit/>
           </a:bodyPr>
           <a:lstStyle/>
@@ -21137,7 +21205,7 @@
           <a:noFill/>
         </p:spPr>
         <p:txBody>
-          <a:bodyPr wrap="square" anchor="t">
+          <a:bodyPr wrap="square" anchor="t" lIns="0" rIns="0" tIns="0" bIns="0">
             <a:spAutoFit/>
           </a:bodyPr>
           <a:lstStyle/>
@@ -21171,7 +21239,7 @@
           <a:noFill/>
         </p:spPr>
         <p:txBody>
-          <a:bodyPr wrap="square" anchor="t">
+          <a:bodyPr wrap="square" anchor="t" lIns="0" rIns="0" tIns="0" bIns="0">
             <a:spAutoFit/>
           </a:bodyPr>
           <a:lstStyle/>
@@ -21205,7 +21273,7 @@
           <a:noFill/>
         </p:spPr>
         <p:txBody>
-          <a:bodyPr wrap="square" anchor="t">
+          <a:bodyPr wrap="square" anchor="t" lIns="0" rIns="0" tIns="0" bIns="0">
             <a:spAutoFit/>
           </a:bodyPr>
           <a:lstStyle/>
@@ -21239,7 +21307,7 @@
           <a:noFill/>
         </p:spPr>
         <p:txBody>
-          <a:bodyPr wrap="square" anchor="t">
+          <a:bodyPr wrap="square" anchor="t" lIns="0" rIns="0" tIns="0" bIns="0">
             <a:spAutoFit/>
           </a:bodyPr>
           <a:lstStyle/>
@@ -21273,7 +21341,7 @@
           <a:noFill/>
         </p:spPr>
         <p:txBody>
-          <a:bodyPr wrap="square" anchor="t">
+          <a:bodyPr wrap="square" anchor="t" lIns="0" rIns="0" tIns="0" bIns="0">
             <a:spAutoFit/>
           </a:bodyPr>
           <a:lstStyle/>
@@ -21307,7 +21375,7 @@
           <a:noFill/>
         </p:spPr>
         <p:txBody>
-          <a:bodyPr wrap="square" anchor="t">
+          <a:bodyPr wrap="square" anchor="t" lIns="0" rIns="0" tIns="0" bIns="0">
             <a:spAutoFit/>
           </a:bodyPr>
           <a:lstStyle/>
@@ -21341,7 +21409,7 @@
           <a:noFill/>
         </p:spPr>
         <p:txBody>
-          <a:bodyPr wrap="square" anchor="t">
+          <a:bodyPr wrap="square" anchor="t" lIns="0" rIns="0" tIns="0" bIns="0">
             <a:spAutoFit/>
           </a:bodyPr>
           <a:lstStyle/>
@@ -21375,7 +21443,7 @@
           <a:noFill/>
         </p:spPr>
         <p:txBody>
-          <a:bodyPr wrap="square" anchor="t">
+          <a:bodyPr wrap="square" anchor="t" lIns="0" rIns="0" tIns="0" bIns="0">
             <a:spAutoFit/>
           </a:bodyPr>
           <a:lstStyle/>
@@ -21453,7 +21521,7 @@
           <a:noFill/>
         </p:spPr>
         <p:txBody>
-          <a:bodyPr wrap="square" anchor="t">
+          <a:bodyPr wrap="square" anchor="t" lIns="0" rIns="0" tIns="0" bIns="0">
             <a:spAutoFit/>
           </a:bodyPr>
           <a:lstStyle/>
@@ -21487,7 +21555,7 @@
           <a:noFill/>
         </p:spPr>
         <p:txBody>
-          <a:bodyPr wrap="square" anchor="t">
+          <a:bodyPr wrap="square" anchor="t" lIns="0" rIns="0" tIns="0" bIns="0">
             <a:spAutoFit/>
           </a:bodyPr>
           <a:lstStyle/>
@@ -21584,7 +21652,7 @@
           <a:noFill/>
         </p:spPr>
         <p:txBody>
-          <a:bodyPr wrap="square" anchor="ctr">
+          <a:bodyPr wrap="square" anchor="ctr" lIns="0" rIns="0" tIns="0" bIns="0">
             <a:spAutoFit/>
           </a:bodyPr>
           <a:lstStyle/>
@@ -21928,7 +21996,7 @@
           <a:noFill/>
         </p:spPr>
         <p:txBody>
-          <a:bodyPr wrap="square" anchor="t">
+          <a:bodyPr wrap="square" anchor="t" lIns="0" rIns="0" tIns="0" bIns="0">
             <a:spAutoFit/>
           </a:bodyPr>
           <a:lstStyle/>
@@ -21962,7 +22030,7 @@
           <a:noFill/>
         </p:spPr>
         <p:txBody>
-          <a:bodyPr wrap="square" anchor="t">
+          <a:bodyPr wrap="square" anchor="t" lIns="0" rIns="0" tIns="0" bIns="0">
             <a:spAutoFit/>
           </a:bodyPr>
           <a:lstStyle/>
@@ -22112,7 +22180,7 @@
           <a:noFill/>
         </p:spPr>
         <p:txBody>
-          <a:bodyPr wrap="square" anchor="ctr">
+          <a:bodyPr wrap="square" anchor="ctr" lIns="0" rIns="0" tIns="0" bIns="0">
             <a:spAutoFit/>
           </a:bodyPr>
           <a:lstStyle/>
@@ -22181,8 +22249,8 @@
         </p:nvSpPr>
         <p:spPr>
           <a:xfrm>
-            <a:off x="685800" y="3070352"/>
-            <a:ext cx="10820095" cy="810768"/>
+            <a:off x="685800" y="3059176"/>
+            <a:ext cx="10820095" cy="833120"/>
           </a:xfrm>
           <a:prstGeom prst="rect">
             <a:avLst/>
@@ -22225,8 +22293,8 @@
         </p:nvSpPr>
         <p:spPr>
           <a:xfrm>
-            <a:off x="685800" y="3070352"/>
-            <a:ext cx="50292" cy="810768"/>
+            <a:off x="685800" y="3059176"/>
+            <a:ext cx="50292" cy="833120"/>
           </a:xfrm>
           <a:prstGeom prst="rect">
             <a:avLst/>
@@ -22269,8 +22337,8 @@
         </p:nvSpPr>
         <p:spPr>
           <a:xfrm>
-            <a:off x="923544" y="3170936"/>
-            <a:ext cx="10417759" cy="627888"/>
+            <a:off x="923544" y="3159760"/>
+            <a:ext cx="10417759" cy="650239"/>
           </a:xfrm>
           <a:prstGeom prst="rect">
             <a:avLst/>
@@ -22278,7 +22346,7 @@
           <a:noFill/>
         </p:spPr>
         <p:txBody>
-          <a:bodyPr wrap="square" anchor="t">
+          <a:bodyPr wrap="square" anchor="t" lIns="0" rIns="0" tIns="0" bIns="0">
             <a:spAutoFit/>
           </a:bodyPr>
           <a:lstStyle/>
@@ -22324,7 +22392,7 @@
         </p:nvSpPr>
         <p:spPr>
           <a:xfrm>
-            <a:off x="685800" y="4045712"/>
+            <a:off x="685800" y="4056888"/>
             <a:ext cx="10820095" cy="564896"/>
           </a:xfrm>
           <a:prstGeom prst="rect">
@@ -22333,7 +22401,7 @@
           <a:noFill/>
         </p:spPr>
         <p:txBody>
-          <a:bodyPr wrap="square" anchor="t">
+          <a:bodyPr wrap="square" anchor="t" lIns="0" rIns="0" tIns="0" bIns="0">
             <a:spAutoFit/>
           </a:bodyPr>
           <a:lstStyle/>
@@ -22416,7 +22484,7 @@
           <a:noFill/>
         </p:spPr>
         <p:txBody>
-          <a:bodyPr wrap="square" anchor="t">
+          <a:bodyPr wrap="square" anchor="t" lIns="0" rIns="0" tIns="0" bIns="0">
             <a:spAutoFit/>
           </a:bodyPr>
           <a:lstStyle/>
@@ -22450,7 +22518,7 @@
           <a:noFill/>
         </p:spPr>
         <p:txBody>
-          <a:bodyPr wrap="square" anchor="t">
+          <a:bodyPr wrap="square" anchor="t" lIns="0" rIns="0" tIns="0" bIns="0">
             <a:spAutoFit/>
           </a:bodyPr>
           <a:lstStyle/>
@@ -22600,7 +22668,7 @@
           <a:noFill/>
         </p:spPr>
         <p:txBody>
-          <a:bodyPr wrap="square" anchor="ctr">
+          <a:bodyPr wrap="square" anchor="ctr" lIns="0" rIns="0" tIns="0" bIns="0">
             <a:spAutoFit/>
           </a:bodyPr>
           <a:lstStyle/>
@@ -22663,7 +22731,7 @@
       </p:sp>
       <p:pic>
         <p:nvPicPr>
-          <p:cNvPr id="6" name="Picture 5" descr="5a562a539b6248cd.png"/>
+          <p:cNvPr id="6" name="Picture 5" descr="aa2900dceb746a9d.png"/>
           <p:cNvPicPr>
             <a:picLocks noChangeAspect="1"/>
           </p:cNvPicPr>
@@ -22677,7 +22745,7 @@
         </p:blipFill>
         <p:spPr>
           <a:xfrm>
-            <a:off x="685800" y="2943067"/>
+            <a:off x="685800" y="4022059"/>
             <a:ext cx="10820095" cy="1685096"/>
           </a:xfrm>
           <a:prstGeom prst="rect">
@@ -22746,7 +22814,7 @@
           <a:noFill/>
         </p:spPr>
         <p:txBody>
-          <a:bodyPr wrap="square" anchor="t">
+          <a:bodyPr wrap="square" anchor="t" lIns="0" rIns="0" tIns="0" bIns="0">
             <a:spAutoFit/>
           </a:bodyPr>
           <a:lstStyle/>
@@ -22780,7 +22848,7 @@
           <a:noFill/>
         </p:spPr>
         <p:txBody>
-          <a:bodyPr wrap="square" anchor="t">
+          <a:bodyPr wrap="square" anchor="t" lIns="0" rIns="0" tIns="0" bIns="0">
             <a:spAutoFit/>
           </a:bodyPr>
           <a:lstStyle/>
@@ -22930,7 +22998,7 @@
           <a:noFill/>
         </p:spPr>
         <p:txBody>
-          <a:bodyPr wrap="square" anchor="ctr">
+          <a:bodyPr wrap="square" anchor="ctr" lIns="0" rIns="0" tIns="0" bIns="0">
             <a:spAutoFit/>
           </a:bodyPr>
           <a:lstStyle/>
@@ -22999,8 +23067,8 @@
         </p:nvSpPr>
         <p:spPr>
           <a:xfrm>
-            <a:off x="685800" y="2629408"/>
-            <a:ext cx="10820095" cy="1347216"/>
+            <a:off x="685800" y="2597912"/>
+            <a:ext cx="10820095" cy="1410208"/>
           </a:xfrm>
           <a:prstGeom prst="rect">
             <a:avLst/>
@@ -23043,8 +23111,8 @@
         </p:nvSpPr>
         <p:spPr>
           <a:xfrm>
-            <a:off x="685800" y="2629408"/>
-            <a:ext cx="50292" cy="1347216"/>
+            <a:off x="685800" y="2597912"/>
+            <a:ext cx="50292" cy="1410208"/>
           </a:xfrm>
           <a:prstGeom prst="rect">
             <a:avLst/>
@@ -23087,8 +23155,8 @@
         </p:nvSpPr>
         <p:spPr>
           <a:xfrm>
-            <a:off x="923544" y="2729992"/>
-            <a:ext cx="10417759" cy="1164336"/>
+            <a:off x="923544" y="2698496"/>
+            <a:ext cx="10417759" cy="1227328"/>
           </a:xfrm>
           <a:prstGeom prst="rect">
             <a:avLst/>
@@ -23096,7 +23164,7 @@
           <a:noFill/>
         </p:spPr>
         <p:txBody>
-          <a:bodyPr wrap="square" anchor="t">
+          <a:bodyPr wrap="square" anchor="t" lIns="0" rIns="0" tIns="0" bIns="0">
             <a:spAutoFit/>
           </a:bodyPr>
           <a:lstStyle/>
@@ -23158,7 +23226,7 @@
         </p:nvSpPr>
         <p:spPr>
           <a:xfrm>
-            <a:off x="685800" y="4141216"/>
+            <a:off x="685800" y="4172712"/>
             <a:ext cx="10820095" cy="910336"/>
           </a:xfrm>
           <a:prstGeom prst="rect">
@@ -23167,7 +23235,7 @@
           <a:noFill/>
         </p:spPr>
         <p:txBody>
-          <a:bodyPr wrap="square" anchor="t">
+          <a:bodyPr wrap="square" anchor="t" lIns="0" rIns="0" tIns="0" bIns="0">
             <a:spAutoFit/>
           </a:bodyPr>
           <a:lstStyle/>
@@ -23250,7 +23318,7 @@
           <a:noFill/>
         </p:spPr>
         <p:txBody>
-          <a:bodyPr wrap="square" anchor="t">
+          <a:bodyPr wrap="square" anchor="t" lIns="0" rIns="0" tIns="0" bIns="0">
             <a:spAutoFit/>
           </a:bodyPr>
           <a:lstStyle/>
@@ -23284,7 +23352,7 @@
           <a:noFill/>
         </p:spPr>
         <p:txBody>
-          <a:bodyPr wrap="square" anchor="t">
+          <a:bodyPr wrap="square" anchor="t" lIns="0" rIns="0" tIns="0" bIns="0">
             <a:spAutoFit/>
           </a:bodyPr>
           <a:lstStyle/>
@@ -23487,7 +23555,7 @@
           <a:noFill/>
         </p:spPr>
         <p:txBody>
-          <a:bodyPr wrap="square" anchor="ctr">
+          <a:bodyPr wrap="square" anchor="ctr" lIns="0" rIns="0" tIns="0" bIns="0">
             <a:spAutoFit/>
           </a:bodyPr>
           <a:lstStyle/>
@@ -23556,7 +23624,7 @@
         </p:nvSpPr>
         <p:spPr>
           <a:xfrm>
-            <a:off x="685800" y="2112264"/>
+            <a:off x="685800" y="2111248"/>
             <a:ext cx="10820095" cy="1710944"/>
           </a:xfrm>
           <a:prstGeom prst="rect">
@@ -23565,7 +23633,7 @@
           <a:noFill/>
         </p:spPr>
         <p:txBody>
-          <a:bodyPr wrap="square" anchor="t">
+          <a:bodyPr wrap="square" anchor="t" lIns="0" rIns="0" tIns="0" bIns="0">
             <a:spAutoFit/>
           </a:bodyPr>
           <a:lstStyle/>
@@ -23611,8 +23679,8 @@
         </p:nvSpPr>
         <p:spPr>
           <a:xfrm>
-            <a:off x="685800" y="3951224"/>
-            <a:ext cx="10820095" cy="542543"/>
+            <a:off x="685800" y="3950208"/>
+            <a:ext cx="10820095" cy="544576"/>
           </a:xfrm>
           <a:prstGeom prst="rect">
             <a:avLst/>
@@ -23655,8 +23723,8 @@
         </p:nvSpPr>
         <p:spPr>
           <a:xfrm>
-            <a:off x="685800" y="3951224"/>
-            <a:ext cx="50292" cy="542543"/>
+            <a:off x="685800" y="3950208"/>
+            <a:ext cx="50292" cy="544576"/>
           </a:xfrm>
           <a:prstGeom prst="rect">
             <a:avLst/>
@@ -23699,8 +23767,8 @@
         </p:nvSpPr>
         <p:spPr>
           <a:xfrm>
-            <a:off x="923544" y="4051808"/>
-            <a:ext cx="10417759" cy="359663"/>
+            <a:off x="923544" y="4050792"/>
+            <a:ext cx="10417759" cy="361696"/>
           </a:xfrm>
           <a:prstGeom prst="rect">
             <a:avLst/>
@@ -23708,7 +23776,7 @@
           <a:noFill/>
         </p:spPr>
         <p:txBody>
-          <a:bodyPr wrap="square" anchor="t">
+          <a:bodyPr wrap="square" anchor="t" lIns="0" rIns="0" tIns="0" bIns="0">
             <a:spAutoFit/>
           </a:bodyPr>
           <a:lstStyle/>
@@ -23738,7 +23806,7 @@
         </p:nvSpPr>
         <p:spPr>
           <a:xfrm>
-            <a:off x="685800" y="4658360"/>
+            <a:off x="685800" y="4659376"/>
             <a:ext cx="10820095" cy="910336"/>
           </a:xfrm>
           <a:prstGeom prst="rect">
@@ -23747,7 +23815,7 @@
           <a:noFill/>
         </p:spPr>
         <p:txBody>
-          <a:bodyPr wrap="square" anchor="t">
+          <a:bodyPr wrap="square" anchor="t" lIns="0" rIns="0" tIns="0" bIns="0">
             <a:spAutoFit/>
           </a:bodyPr>
           <a:lstStyle/>
@@ -23830,7 +23898,7 @@
           <a:noFill/>
         </p:spPr>
         <p:txBody>
-          <a:bodyPr wrap="square" anchor="t">
+          <a:bodyPr wrap="square" anchor="t" lIns="0" rIns="0" tIns="0" bIns="0">
             <a:spAutoFit/>
           </a:bodyPr>
           <a:lstStyle/>
@@ -23864,7 +23932,7 @@
           <a:noFill/>
         </p:spPr>
         <p:txBody>
-          <a:bodyPr wrap="square" anchor="t">
+          <a:bodyPr wrap="square" anchor="t" lIns="0" rIns="0" tIns="0" bIns="0">
             <a:spAutoFit/>
           </a:bodyPr>
           <a:lstStyle/>
@@ -24014,7 +24082,7 @@
           <a:noFill/>
         </p:spPr>
         <p:txBody>
-          <a:bodyPr wrap="square" anchor="ctr">
+          <a:bodyPr wrap="square" anchor="ctr" lIns="0" rIns="0" tIns="0" bIns="0">
             <a:spAutoFit/>
           </a:bodyPr>
           <a:lstStyle/>
@@ -24092,7 +24160,7 @@
           <a:noFill/>
         </p:spPr>
         <p:txBody>
-          <a:bodyPr wrap="square" anchor="t">
+          <a:bodyPr wrap="square" anchor="t" lIns="0" rIns="0" tIns="0" bIns="0">
             <a:spAutoFit/>
           </a:bodyPr>
           <a:lstStyle/>
@@ -24191,7 +24259,7 @@
           <a:noFill/>
         </p:spPr>
         <p:txBody>
-          <a:bodyPr wrap="square" anchor="t">
+          <a:bodyPr wrap="square" anchor="t" lIns="0" rIns="0" tIns="0" bIns="0">
             <a:spAutoFit/>
           </a:bodyPr>
           <a:lstStyle/>
@@ -24225,7 +24293,7 @@
           <a:noFill/>
         </p:spPr>
         <p:txBody>
-          <a:bodyPr wrap="square" anchor="t">
+          <a:bodyPr wrap="square" anchor="t" lIns="0" rIns="0" tIns="0" bIns="0">
             <a:spAutoFit/>
           </a:bodyPr>
           <a:lstStyle/>
@@ -24428,7 +24496,7 @@
           <a:noFill/>
         </p:spPr>
         <p:txBody>
-          <a:bodyPr wrap="square" anchor="ctr">
+          <a:bodyPr wrap="square" anchor="ctr" lIns="0" rIns="0" tIns="0" bIns="0">
             <a:spAutoFit/>
           </a:bodyPr>
           <a:lstStyle/>
@@ -24498,7 +24566,7 @@
         <p:spPr>
           <a:xfrm>
             <a:off x="685800" y="1627632"/>
-            <a:ext cx="10820095" cy="1883664"/>
+            <a:ext cx="10820095" cy="1987295"/>
           </a:xfrm>
           <a:prstGeom prst="rect">
             <a:avLst/>
@@ -24542,7 +24610,7 @@
         <p:spPr>
           <a:xfrm>
             <a:off x="685800" y="1627632"/>
-            <a:ext cx="50292" cy="1883664"/>
+            <a:ext cx="50292" cy="1987295"/>
           </a:xfrm>
           <a:prstGeom prst="rect">
             <a:avLst/>
@@ -24586,7 +24654,7 @@
         <p:spPr>
           <a:xfrm>
             <a:off x="923544" y="1728216"/>
-            <a:ext cx="10417759" cy="1700784"/>
+            <a:ext cx="10417759" cy="1804415"/>
           </a:xfrm>
           <a:prstGeom prst="rect">
             <a:avLst/>
@@ -24594,7 +24662,7 @@
           <a:noFill/>
         </p:spPr>
         <p:txBody>
-          <a:bodyPr wrap="square" anchor="t">
+          <a:bodyPr wrap="square" anchor="t" lIns="0" rIns="0" tIns="0" bIns="0">
             <a:spAutoFit/>
           </a:bodyPr>
           <a:lstStyle/>
@@ -24704,8 +24772,8 @@
         </p:nvSpPr>
         <p:spPr>
           <a:xfrm>
-            <a:off x="685800" y="3675887"/>
-            <a:ext cx="10820095" cy="542543"/>
+            <a:off x="685800" y="3779519"/>
+            <a:ext cx="10820095" cy="544576"/>
           </a:xfrm>
           <a:prstGeom prst="rect">
             <a:avLst/>
@@ -24748,8 +24816,8 @@
         </p:nvSpPr>
         <p:spPr>
           <a:xfrm>
-            <a:off x="685800" y="3675887"/>
-            <a:ext cx="50292" cy="542543"/>
+            <a:off x="685800" y="3779519"/>
+            <a:ext cx="50292" cy="544576"/>
           </a:xfrm>
           <a:prstGeom prst="rect">
             <a:avLst/>
@@ -24792,8 +24860,8 @@
         </p:nvSpPr>
         <p:spPr>
           <a:xfrm>
-            <a:off x="923544" y="3776472"/>
-            <a:ext cx="10417759" cy="359663"/>
+            <a:off x="923544" y="3880104"/>
+            <a:ext cx="10417759" cy="361696"/>
           </a:xfrm>
           <a:prstGeom prst="rect">
             <a:avLst/>
@@ -24801,7 +24869,7 @@
           <a:noFill/>
         </p:spPr>
         <p:txBody>
-          <a:bodyPr wrap="square" anchor="t">
+          <a:bodyPr wrap="square" anchor="t" lIns="0" rIns="0" tIns="0" bIns="0">
             <a:spAutoFit/>
           </a:bodyPr>
           <a:lstStyle/>
@@ -24831,7 +24899,7 @@
         </p:nvSpPr>
         <p:spPr>
           <a:xfrm>
-            <a:off x="685800" y="4383024"/>
+            <a:off x="685800" y="4488687"/>
             <a:ext cx="10820095" cy="1255776"/>
           </a:xfrm>
           <a:prstGeom prst="rect">
@@ -24840,7 +24908,7 @@
           <a:noFill/>
         </p:spPr>
         <p:txBody>
-          <a:bodyPr wrap="square" anchor="t">
+          <a:bodyPr wrap="square" anchor="t" lIns="0" rIns="0" tIns="0" bIns="0">
             <a:spAutoFit/>
           </a:bodyPr>
           <a:lstStyle/>
@@ -24923,7 +24991,7 @@
           <a:noFill/>
         </p:spPr>
         <p:txBody>
-          <a:bodyPr wrap="square" anchor="t">
+          <a:bodyPr wrap="square" anchor="t" lIns="0" rIns="0" tIns="0" bIns="0">
             <a:spAutoFit/>
           </a:bodyPr>
           <a:lstStyle/>
@@ -24957,7 +25025,7 @@
           <a:noFill/>
         </p:spPr>
         <p:txBody>
-          <a:bodyPr wrap="square" anchor="t">
+          <a:bodyPr wrap="square" anchor="t" lIns="0" rIns="0" tIns="0" bIns="0">
             <a:spAutoFit/>
           </a:bodyPr>
           <a:lstStyle/>
@@ -25107,7 +25175,7 @@
           <a:noFill/>
         </p:spPr>
         <p:txBody>
-          <a:bodyPr wrap="square" anchor="ctr">
+          <a:bodyPr wrap="square" anchor="ctr" lIns="0" rIns="0" tIns="0" bIns="0">
             <a:spAutoFit/>
           </a:bodyPr>
           <a:lstStyle/>
@@ -25168,9 +25236,48 @@
           </a:p>
         </p:txBody>
       </p:sp>
+      <p:sp>
+        <p:nvSpPr>
+          <p:cNvPr id="6" name="TextBox 5"/>
+          <p:cNvSpPr txBox="1"/>
+          <p:nvPr/>
+        </p:nvSpPr>
+        <p:spPr>
+          <a:xfrm>
+            <a:off x="685800" y="2196591"/>
+            <a:ext cx="10820095" cy="910336"/>
+          </a:xfrm>
+          <a:prstGeom prst="rect">
+            <a:avLst/>
+          </a:prstGeom>
+          <a:noFill/>
+        </p:spPr>
+        <p:txBody>
+          <a:bodyPr wrap="square" anchor="t" lIns="0" rIns="0" tIns="0" bIns="0">
+            <a:spAutoFit/>
+          </a:bodyPr>
+          <a:lstStyle/>
+          <a:p>
+            <a:pPr>
+              <a:spcAft>
+                <a:spcPts val="900"/>
+              </a:spcAft>
+            </a:pPr>
+            <a:r>
+              <a:rPr sz="2000" b="0">
+                <a:solidFill>
+                  <a:srgbClr val="1C1C1A"/>
+                </a:solidFill>
+                <a:latin typeface="Calibri"/>
+              </a:rPr>
+              <a:t>Every arrow that crosses the dashed line loses something or has to be told something.</a:t>
+            </a:r>
+          </a:p>
+        </p:txBody>
+      </p:sp>
       <p:pic>
         <p:nvPicPr>
-          <p:cNvPr id="6" name="Picture 5" descr="3ca005fc42b0e019.png"/>
+          <p:cNvPr id="7" name="Picture 6" descr="2289d1e1b2b3f646.png"/>
           <p:cNvPicPr>
             <a:picLocks noChangeAspect="1"/>
           </p:cNvPicPr>
@@ -25184,48 +25291,14 @@
         </p:blipFill>
         <p:spPr>
           <a:xfrm>
-            <a:off x="685800" y="1904596"/>
-            <a:ext cx="10820095" cy="3252006"/>
+            <a:off x="2140731" y="3675887"/>
+            <a:ext cx="7910232" cy="2377440"/>
           </a:xfrm>
           <a:prstGeom prst="rect">
             <a:avLst/>
           </a:prstGeom>
         </p:spPr>
       </p:pic>
-      <p:sp>
-        <p:nvSpPr>
-          <p:cNvPr id="7" name="TextBox 6"/>
-          <p:cNvSpPr txBox="1"/>
-          <p:nvPr/>
-        </p:nvSpPr>
-        <p:spPr>
-          <a:xfrm>
-            <a:off x="685800" y="5543296"/>
-            <a:ext cx="10820095" cy="510032"/>
-          </a:xfrm>
-          <a:prstGeom prst="rect">
-            <a:avLst/>
-          </a:prstGeom>
-          <a:noFill/>
-        </p:spPr>
-        <p:txBody>
-          <a:bodyPr wrap="square" anchor="t">
-            <a:spAutoFit/>
-          </a:bodyPr>
-          <a:lstStyle/>
-          <a:p>
-            <a:r>
-              <a:rPr sz="2000" b="0">
-                <a:solidFill>
-                  <a:srgbClr val="1C1C1A"/>
-                </a:solidFill>
-                <a:latin typeface="Calibri"/>
-              </a:rPr>
-              <a:t>Every arrow that crosses the dashed line loses something or has to be told something.</a:t>
-            </a:r>
-          </a:p>
-        </p:txBody>
-      </p:sp>
       <p:sp>
         <p:nvSpPr>
           <p:cNvPr id="8" name="Rectangle 7"/>
@@ -25287,7 +25360,7 @@
           <a:noFill/>
         </p:spPr>
         <p:txBody>
-          <a:bodyPr wrap="square" anchor="t">
+          <a:bodyPr wrap="square" anchor="t" lIns="0" rIns="0" tIns="0" bIns="0">
             <a:spAutoFit/>
           </a:bodyPr>
           <a:lstStyle/>
@@ -25321,7 +25394,7 @@
           <a:noFill/>
         </p:spPr>
         <p:txBody>
-          <a:bodyPr wrap="square" anchor="t">
+          <a:bodyPr wrap="square" anchor="t" lIns="0" rIns="0" tIns="0" bIns="0">
             <a:spAutoFit/>
           </a:bodyPr>
           <a:lstStyle/>
@@ -25471,7 +25544,7 @@
           <a:noFill/>
         </p:spPr>
         <p:txBody>
-          <a:bodyPr wrap="square" anchor="ctr">
+          <a:bodyPr wrap="square" anchor="ctr" lIns="0" rIns="0" tIns="0" bIns="0">
             <a:spAutoFit/>
           </a:bodyPr>
           <a:lstStyle/>
@@ -25540,8 +25613,8 @@
         </p:nvSpPr>
         <p:spPr>
           <a:xfrm>
-            <a:off x="685800" y="2930144"/>
-            <a:ext cx="10820095" cy="1820672"/>
+            <a:off x="685800" y="2757424"/>
+            <a:ext cx="10820095" cy="2166112"/>
           </a:xfrm>
           <a:prstGeom prst="rect">
             <a:avLst/>
@@ -25549,7 +25622,7 @@
           <a:noFill/>
         </p:spPr>
         <p:txBody>
-          <a:bodyPr wrap="square" anchor="t">
+          <a:bodyPr wrap="square" anchor="t" lIns="0" rIns="0" tIns="0" bIns="0">
             <a:spAutoFit/>
           </a:bodyPr>
           <a:lstStyle/>
@@ -25664,7 +25737,7 @@
           <a:noFill/>
         </p:spPr>
         <p:txBody>
-          <a:bodyPr wrap="square" anchor="t">
+          <a:bodyPr wrap="square" anchor="t" lIns="0" rIns="0" tIns="0" bIns="0">
             <a:spAutoFit/>
           </a:bodyPr>
           <a:lstStyle/>
@@ -25698,7 +25771,7 @@
           <a:noFill/>
         </p:spPr>
         <p:txBody>
-          <a:bodyPr wrap="square" anchor="t">
+          <a:bodyPr wrap="square" anchor="t" lIns="0" rIns="0" tIns="0" bIns="0">
             <a:spAutoFit/>
           </a:bodyPr>
           <a:lstStyle/>
@@ -25901,7 +25974,7 @@
           <a:noFill/>
         </p:spPr>
         <p:txBody>
-          <a:bodyPr wrap="square" anchor="ctr">
+          <a:bodyPr wrap="square" anchor="ctr" lIns="0" rIns="0" tIns="0" bIns="0">
             <a:spAutoFit/>
           </a:bodyPr>
           <a:lstStyle/>
@@ -25964,7 +26037,7 @@
       </p:sp>
       <p:pic>
         <p:nvPicPr>
-          <p:cNvPr id="7" name="Picture 6" descr="23f778dc93097a9c.png"/>
+          <p:cNvPr id="7" name="Picture 6" descr="1b525f104ab006fc.png"/>
           <p:cNvPicPr>
             <a:picLocks noChangeAspect="1"/>
           </p:cNvPicPr>
@@ -26003,7 +26076,7 @@
           <a:noFill/>
         </p:spPr>
         <p:txBody>
-          <a:bodyPr wrap="square" anchor="t">
+          <a:bodyPr wrap="square" anchor="t" lIns="0" rIns="0" tIns="0" bIns="0">
             <a:spAutoFit/>
           </a:bodyPr>
           <a:lstStyle/>
@@ -26086,7 +26159,7 @@
           <a:noFill/>
         </p:spPr>
         <p:txBody>
-          <a:bodyPr wrap="square" anchor="t">
+          <a:bodyPr wrap="square" anchor="t" lIns="0" rIns="0" tIns="0" bIns="0">
             <a:spAutoFit/>
           </a:bodyPr>
           <a:lstStyle/>
@@ -26120,7 +26193,7 @@
           <a:noFill/>
         </p:spPr>
         <p:txBody>
-          <a:bodyPr wrap="square" anchor="t">
+          <a:bodyPr wrap="square" anchor="t" lIns="0" rIns="0" tIns="0" bIns="0">
             <a:spAutoFit/>
           </a:bodyPr>
           <a:lstStyle/>
@@ -26323,7 +26396,7 @@
           <a:noFill/>
         </p:spPr>
         <p:txBody>
-          <a:bodyPr wrap="square" anchor="ctr">
+          <a:bodyPr wrap="square" anchor="ctr" lIns="0" rIns="0" tIns="0" bIns="0">
             <a:spAutoFit/>
           </a:bodyPr>
           <a:lstStyle/>
@@ -26393,7 +26466,7 @@
         <p:spPr>
           <a:xfrm>
             <a:off x="685800" y="1627632"/>
-            <a:ext cx="10820095" cy="1710944"/>
+            <a:ext cx="10820095" cy="1365504"/>
           </a:xfrm>
           <a:prstGeom prst="rect">
             <a:avLst/>
@@ -26401,18 +26474,18 @@
           <a:noFill/>
         </p:spPr>
         <p:txBody>
-          <a:bodyPr wrap="square" anchor="t">
+          <a:bodyPr wrap="square" anchor="t" lIns="0" rIns="0" tIns="0" bIns="0">
             <a:spAutoFit/>
           </a:bodyPr>
           <a:lstStyle/>
           <a:p>
             <a:pPr>
               <a:spcAft>
-                <a:spcPts val="900"/>
+                <a:spcPts val="700"/>
               </a:spcAft>
             </a:pPr>
             <a:r>
-              <a:rPr sz="2000" b="0">
+              <a:rPr sz="1500" b="0">
                 <a:solidFill>
                   <a:srgbClr val="1C1C1A"/>
                 </a:solidFill>
@@ -26424,11 +26497,11 @@
           <a:p>
             <a:pPr>
               <a:spcAft>
-                <a:spcPts val="900"/>
+                <a:spcPts val="700"/>
               </a:spcAft>
             </a:pPr>
             <a:r>
-              <a:rPr sz="2000" b="0">
+              <a:rPr sz="1500" b="0">
                 <a:solidFill>
                   <a:srgbClr val="1C1C1A"/>
                 </a:solidFill>
@@ -26448,8 +26521,8 @@
           <p:nvPr/>
         </p:nvGraphicFramePr>
         <p:xfrm>
-          <a:off x="685800" y="3466592"/>
-          <a:ext cx="10820095" cy="1935480"/>
+          <a:off x="685800" y="3121152"/>
+          <a:ext cx="10820094" cy="1590040"/>
         </p:xfrm>
         <a:graphic>
           <a:graphicData uri="http://schemas.openxmlformats.org/drawingml/2006/table">
@@ -26458,17 +26531,17 @@
                 <a:tableStyleId>{2D5ABB26-0587-4C30-8999-92F81FD0307C}</a:tableStyleId>
               </a:tblPr>
               <a:tblGrid>
-                <a:gridCol w="5410047"/>
-                <a:gridCol w="5410048"/>
+                <a:gridCol w="6568362"/>
+                <a:gridCol w="4251732"/>
               </a:tblGrid>
-              <a:tr h="387096">
+              <a:tr h="318008">
                 <a:tc>
                   <a:txBody>
                     <a:bodyPr/>
                     <a:lstStyle/>
                     <a:p>
                       <a:r>
-                        <a:rPr sz="1600" b="1">
+                        <a:rPr sz="1200" b="1">
                           <a:solidFill>
                             <a:srgbClr val="FFFFFF"/>
                           </a:solidFill>
@@ -26490,7 +26563,7 @@
                     <a:lstStyle/>
                     <a:p>
                       <a:r>
-                        <a:rPr sz="1600" b="1">
+                        <a:rPr sz="1200" b="1">
                           <a:solidFill>
                             <a:srgbClr val="FFFFFF"/>
                           </a:solidFill>
@@ -26507,14 +26580,14 @@
                   </a:tcPr>
                 </a:tc>
               </a:tr>
-              <a:tr h="387096">
+              <a:tr h="318008">
                 <a:tc>
                   <a:txBody>
                     <a:bodyPr/>
                     <a:lstStyle/>
                     <a:p>
                       <a:r>
-                        <a:rPr sz="1500" b="0">
+                        <a:rPr sz="1100" b="0">
                           <a:solidFill>
                             <a:srgbClr val="1C1C1A"/>
                           </a:solidFill>
@@ -26536,7 +26609,7 @@
                     <a:lstStyle/>
                     <a:p>
                       <a:r>
-                        <a:rPr sz="1500" b="0">
+                        <a:rPr sz="1100" b="0">
                           <a:solidFill>
                             <a:srgbClr val="1C1C1A"/>
                           </a:solidFill>
@@ -26553,14 +26626,14 @@
                   </a:tcPr>
                 </a:tc>
               </a:tr>
-              <a:tr h="387096">
+              <a:tr h="318008">
                 <a:tc>
                   <a:txBody>
                     <a:bodyPr/>
                     <a:lstStyle/>
                     <a:p>
                       <a:r>
-                        <a:rPr sz="1500" b="0">
+                        <a:rPr sz="1100" b="0">
                           <a:solidFill>
                             <a:srgbClr val="1C1C1A"/>
                           </a:solidFill>
@@ -26582,7 +26655,7 @@
                     <a:lstStyle/>
                     <a:p>
                       <a:r>
-                        <a:rPr sz="1500" b="0">
+                        <a:rPr sz="1100" b="0">
                           <a:solidFill>
                             <a:srgbClr val="1C1C1A"/>
                           </a:solidFill>
@@ -26599,14 +26672,14 @@
                   </a:tcPr>
                 </a:tc>
               </a:tr>
-              <a:tr h="387096">
+              <a:tr h="318008">
                 <a:tc>
                   <a:txBody>
                     <a:bodyPr/>
                     <a:lstStyle/>
                     <a:p>
                       <a:r>
-                        <a:rPr sz="1500" b="0">
+                        <a:rPr sz="1100" b="0">
                           <a:solidFill>
                             <a:srgbClr val="1C1C1A"/>
                           </a:solidFill>
@@ -26628,7 +26701,7 @@
                     <a:lstStyle/>
                     <a:p>
                       <a:r>
-                        <a:rPr sz="1500" b="0">
+                        <a:rPr sz="1100" b="0">
                           <a:solidFill>
                             <a:srgbClr val="1C1C1A"/>
                           </a:solidFill>
@@ -26645,14 +26718,14 @@
                   </a:tcPr>
                 </a:tc>
               </a:tr>
-              <a:tr h="387096">
+              <a:tr h="318008">
                 <a:tc>
                   <a:txBody>
                     <a:bodyPr/>
                     <a:lstStyle/>
                     <a:p>
                       <a:r>
-                        <a:rPr sz="1500" b="0">
+                        <a:rPr sz="1100" b="0">
                           <a:solidFill>
                             <a:srgbClr val="1C1C1A"/>
                           </a:solidFill>
@@ -26674,7 +26747,7 @@
                     <a:lstStyle/>
                     <a:p>
                       <a:r>
-                        <a:rPr sz="1500" b="0">
+                        <a:rPr sz="1100" b="0">
                           <a:solidFill>
                             <a:srgbClr val="1C1C1A"/>
                           </a:solidFill>
@@ -26703,8 +26776,8 @@
         </p:nvSpPr>
         <p:spPr>
           <a:xfrm>
-            <a:off x="685800" y="5658104"/>
-            <a:ext cx="10820095" cy="910336"/>
+            <a:off x="685800" y="4967224"/>
+            <a:ext cx="10820095" cy="737616"/>
           </a:xfrm>
           <a:prstGeom prst="rect">
             <a:avLst/>
@@ -26712,18 +26785,18 @@
           <a:noFill/>
         </p:spPr>
         <p:txBody>
-          <a:bodyPr wrap="square" anchor="t">
+          <a:bodyPr wrap="square" anchor="t" lIns="0" rIns="0" tIns="0" bIns="0">
             <a:spAutoFit/>
           </a:bodyPr>
           <a:lstStyle/>
           <a:p>
             <a:pPr>
               <a:spcAft>
-                <a:spcPts val="900"/>
+                <a:spcPts val="700"/>
               </a:spcAft>
             </a:pPr>
             <a:r>
-              <a:rPr sz="2000" b="0">
+              <a:rPr sz="1500" b="0">
                 <a:solidFill>
                   <a:srgbClr val="1C1C1A"/>
                 </a:solidFill>
@@ -26795,7 +26868,7 @@
           <a:noFill/>
         </p:spPr>
         <p:txBody>
-          <a:bodyPr wrap="square" anchor="t">
+          <a:bodyPr wrap="square" anchor="t" lIns="0" rIns="0" tIns="0" bIns="0">
             <a:spAutoFit/>
           </a:bodyPr>
           <a:lstStyle/>
@@ -26829,7 +26902,7 @@
           <a:noFill/>
         </p:spPr>
         <p:txBody>
-          <a:bodyPr wrap="square" anchor="t">
+          <a:bodyPr wrap="square" anchor="t" lIns="0" rIns="0" tIns="0" bIns="0">
             <a:spAutoFit/>
           </a:bodyPr>
           <a:lstStyle/>
@@ -27032,7 +27105,7 @@
           <a:noFill/>
         </p:spPr>
         <p:txBody>
-          <a:bodyPr wrap="square" anchor="ctr">
+          <a:bodyPr wrap="square" anchor="ctr" lIns="0" rIns="0" tIns="0" bIns="0">
             <a:spAutoFit/>
           </a:bodyPr>
           <a:lstStyle/>
@@ -27110,7 +27183,7 @@
           <a:noFill/>
         </p:spPr>
         <p:txBody>
-          <a:bodyPr wrap="square" anchor="t">
+          <a:bodyPr wrap="square" anchor="t" lIns="0" rIns="0" tIns="0" bIns="0">
             <a:spAutoFit/>
           </a:bodyPr>
           <a:lstStyle/>
@@ -27209,7 +27282,7 @@
           <a:noFill/>
         </p:spPr>
         <p:txBody>
-          <a:bodyPr wrap="square" anchor="t">
+          <a:bodyPr wrap="square" anchor="t" lIns="0" rIns="0" tIns="0" bIns="0">
             <a:spAutoFit/>
           </a:bodyPr>
           <a:lstStyle/>
@@ -27243,7 +27316,7 @@
           <a:noFill/>
         </p:spPr>
         <p:txBody>
-          <a:bodyPr wrap="square" anchor="t">
+          <a:bodyPr wrap="square" anchor="t" lIns="0" rIns="0" tIns="0" bIns="0">
             <a:spAutoFit/>
           </a:bodyPr>
           <a:lstStyle/>
@@ -27393,7 +27466,7 @@
           <a:noFill/>
         </p:spPr>
         <p:txBody>
-          <a:bodyPr wrap="square" anchor="ctr">
+          <a:bodyPr wrap="square" anchor="ctr" lIns="0" rIns="0" tIns="0" bIns="0">
             <a:spAutoFit/>
           </a:bodyPr>
           <a:lstStyle/>
@@ -27456,7 +27529,7 @@
       </p:sp>
       <p:pic>
         <p:nvPicPr>
-          <p:cNvPr id="6" name="Picture 5" descr="4ae2568a1cfdddf2.png"/>
+          <p:cNvPr id="6" name="Picture 5" descr="9459fd6da38cde79.png"/>
           <p:cNvPicPr>
             <a:picLocks noChangeAspect="1"/>
           </p:cNvPicPr>
@@ -27470,8 +27543,8 @@
         </p:blipFill>
         <p:spPr>
           <a:xfrm>
-            <a:off x="1289544" y="1627632"/>
-            <a:ext cx="3445152" cy="4425696"/>
+            <a:off x="4748947" y="1627632"/>
+            <a:ext cx="2693799" cy="3460496"/>
           </a:xfrm>
           <a:prstGeom prst="rect">
             <a:avLst/>
@@ -27486,8 +27559,8 @@
         </p:nvSpPr>
         <p:spPr>
           <a:xfrm>
-            <a:off x="5771244" y="2985008"/>
-            <a:ext cx="5734650" cy="1710944"/>
+            <a:off x="685800" y="5197856"/>
+            <a:ext cx="10820095" cy="855471"/>
           </a:xfrm>
           <a:prstGeom prst="rect">
             <a:avLst/>
@@ -27495,16 +27568,11 @@
           <a:noFill/>
         </p:spPr>
         <p:txBody>
-          <a:bodyPr wrap="square" anchor="t">
+          <a:bodyPr wrap="square" anchor="t" lIns="0" rIns="0" tIns="0" bIns="0">
             <a:spAutoFit/>
           </a:bodyPr>
           <a:lstStyle/>
           <a:p>
-            <a:pPr>
-              <a:spcAft>
-                <a:spcPts val="900"/>
-              </a:spcAft>
-            </a:pPr>
             <a:r>
               <a:rPr sz="2000" b="0">
                 <a:solidFill>
@@ -27512,23 +27580,7 @@
                 </a:solidFill>
                 <a:latin typeface="Calibri"/>
               </a:rPr>
-              <a:t>"CSV or JSON for nested records, and what does flattening cost?"</a:t>
-            </a:r>
-          </a:p>
-          <a:p>
-            <a:pPr>
-              <a:spcAft>
-                <a:spcPts val="900"/>
-              </a:spcAft>
-            </a:pPr>
-            <a:r>
-              <a:rPr sz="2000" b="0">
-                <a:solidFill>
-                  <a:srgbClr val="1C1C1A"/>
-                </a:solidFill>
-                <a:latin typeface="Calibri"/>
-              </a:rPr>
-              <a:t>You have both files open in front of you. Answer from those.</a:t>
+              <a:t>"CSV or JSON for nested records, and what does flattening cost?" You have both files open in front of you. Answer from those.</a:t>
             </a:r>
           </a:p>
         </p:txBody>
@@ -27594,7 +27646,7 @@
           <a:noFill/>
         </p:spPr>
         <p:txBody>
-          <a:bodyPr wrap="square" anchor="t">
+          <a:bodyPr wrap="square" anchor="t" lIns="0" rIns="0" tIns="0" bIns="0">
             <a:spAutoFit/>
           </a:bodyPr>
           <a:lstStyle/>
@@ -27628,7 +27680,7 @@
           <a:noFill/>
         </p:spPr>
         <p:txBody>
-          <a:bodyPr wrap="square" anchor="t">
+          <a:bodyPr wrap="square" anchor="t" lIns="0" rIns="0" tIns="0" bIns="0">
             <a:spAutoFit/>
           </a:bodyPr>
           <a:lstStyle/>
@@ -27778,7 +27830,7 @@
           <a:noFill/>
         </p:spPr>
         <p:txBody>
-          <a:bodyPr wrap="square" anchor="ctr">
+          <a:bodyPr wrap="square" anchor="ctr" lIns="0" rIns="0" tIns="0" bIns="0">
             <a:spAutoFit/>
           </a:bodyPr>
           <a:lstStyle/>
@@ -27856,7 +27908,7 @@
           <a:noFill/>
         </p:spPr>
         <p:txBody>
-          <a:bodyPr wrap="square" anchor="t">
+          <a:bodyPr wrap="square" anchor="t" lIns="0" rIns="0" tIns="0" bIns="0">
             <a:spAutoFit/>
           </a:bodyPr>
           <a:lstStyle/>
@@ -27890,7 +27942,7 @@
           <a:noFill/>
         </p:spPr>
         <p:txBody>
-          <a:bodyPr wrap="square" anchor="t">
+          <a:bodyPr wrap="square" anchor="t" lIns="0" rIns="0" tIns="0" bIns="0">
             <a:spAutoFit/>
           </a:bodyPr>
           <a:lstStyle/>
@@ -27924,7 +27976,7 @@
           <a:noFill/>
         </p:spPr>
         <p:txBody>
-          <a:bodyPr wrap="square" anchor="t">
+          <a:bodyPr wrap="square" anchor="t" lIns="0" rIns="0" tIns="0" bIns="0">
             <a:spAutoFit/>
           </a:bodyPr>
           <a:lstStyle/>
@@ -27958,7 +28010,7 @@
           <a:noFill/>
         </p:spPr>
         <p:txBody>
-          <a:bodyPr wrap="square" anchor="t">
+          <a:bodyPr wrap="square" anchor="t" lIns="0" rIns="0" tIns="0" bIns="0">
             <a:spAutoFit/>
           </a:bodyPr>
           <a:lstStyle/>
@@ -27992,7 +28044,7 @@
           <a:noFill/>
         </p:spPr>
         <p:txBody>
-          <a:bodyPr wrap="square" anchor="t">
+          <a:bodyPr wrap="square" anchor="t" lIns="0" rIns="0" tIns="0" bIns="0">
             <a:spAutoFit/>
           </a:bodyPr>
           <a:lstStyle/>
@@ -28026,7 +28078,7 @@
           <a:noFill/>
         </p:spPr>
         <p:txBody>
-          <a:bodyPr wrap="square" anchor="t">
+          <a:bodyPr wrap="square" anchor="t" lIns="0" rIns="0" tIns="0" bIns="0">
             <a:spAutoFit/>
           </a:bodyPr>
           <a:lstStyle/>
@@ -28060,7 +28112,7 @@
           <a:noFill/>
         </p:spPr>
         <p:txBody>
-          <a:bodyPr wrap="square" anchor="t">
+          <a:bodyPr wrap="square" anchor="t" lIns="0" rIns="0" tIns="0" bIns="0">
             <a:spAutoFit/>
           </a:bodyPr>
           <a:lstStyle/>
@@ -28094,7 +28146,7 @@
           <a:noFill/>
         </p:spPr>
         <p:txBody>
-          <a:bodyPr wrap="square" anchor="t">
+          <a:bodyPr wrap="square" anchor="t" lIns="0" rIns="0" tIns="0" bIns="0">
             <a:spAutoFit/>
           </a:bodyPr>
           <a:lstStyle/>
@@ -28172,7 +28224,7 @@
           <a:noFill/>
         </p:spPr>
         <p:txBody>
-          <a:bodyPr wrap="square" anchor="t">
+          <a:bodyPr wrap="square" anchor="t" lIns="0" rIns="0" tIns="0" bIns="0">
             <a:spAutoFit/>
           </a:bodyPr>
           <a:lstStyle/>
@@ -28206,7 +28258,7 @@
           <a:noFill/>
         </p:spPr>
         <p:txBody>
-          <a:bodyPr wrap="square" anchor="t">
+          <a:bodyPr wrap="square" anchor="t" lIns="0" rIns="0" tIns="0" bIns="0">
             <a:spAutoFit/>
           </a:bodyPr>
           <a:lstStyle/>
@@ -28303,7 +28355,7 @@
           <a:noFill/>
         </p:spPr>
         <p:txBody>
-          <a:bodyPr wrap="square" anchor="ctr">
+          <a:bodyPr wrap="square" anchor="ctr" lIns="0" rIns="0" tIns="0" bIns="0">
             <a:spAutoFit/>
           </a:bodyPr>
           <a:lstStyle/>
@@ -28647,7 +28699,7 @@
           <a:noFill/>
         </p:spPr>
         <p:txBody>
-          <a:bodyPr wrap="square" anchor="t">
+          <a:bodyPr wrap="square" anchor="t" lIns="0" rIns="0" tIns="0" bIns="0">
             <a:spAutoFit/>
           </a:bodyPr>
           <a:lstStyle/>
@@ -28681,7 +28733,7 @@
           <a:noFill/>
         </p:spPr>
         <p:txBody>
-          <a:bodyPr wrap="square" anchor="t">
+          <a:bodyPr wrap="square" anchor="t" lIns="0" rIns="0" tIns="0" bIns="0">
             <a:spAutoFit/>
           </a:bodyPr>
           <a:lstStyle/>
@@ -28831,7 +28883,7 @@
           <a:noFill/>
         </p:spPr>
         <p:txBody>
-          <a:bodyPr wrap="square" anchor="ctr">
+          <a:bodyPr wrap="square" anchor="ctr" lIns="0" rIns="0" tIns="0" bIns="0">
             <a:spAutoFit/>
           </a:bodyPr>
           <a:lstStyle/>
@@ -28909,7 +28961,7 @@
           <a:noFill/>
         </p:spPr>
         <p:txBody>
-          <a:bodyPr wrap="square" anchor="t">
+          <a:bodyPr wrap="square" anchor="t" lIns="0" rIns="0" tIns="0" bIns="0">
             <a:spAutoFit/>
           </a:bodyPr>
           <a:lstStyle/>
@@ -28992,7 +29044,7 @@
           <a:noFill/>
         </p:spPr>
         <p:txBody>
-          <a:bodyPr wrap="square" anchor="t">
+          <a:bodyPr wrap="square" anchor="t" lIns="0" rIns="0" tIns="0" bIns="0">
             <a:spAutoFit/>
           </a:bodyPr>
           <a:lstStyle/>
@@ -29026,7 +29078,7 @@
           <a:noFill/>
         </p:spPr>
         <p:txBody>
-          <a:bodyPr wrap="square" anchor="t">
+          <a:bodyPr wrap="square" anchor="t" lIns="0" rIns="0" tIns="0" bIns="0">
             <a:spAutoFit/>
           </a:bodyPr>
           <a:lstStyle/>
@@ -29176,7 +29228,7 @@
           <a:noFill/>
         </p:spPr>
         <p:txBody>
-          <a:bodyPr wrap="square" anchor="ctr">
+          <a:bodyPr wrap="square" anchor="ctr" lIns="0" rIns="0" tIns="0" bIns="0">
             <a:spAutoFit/>
           </a:bodyPr>
           <a:lstStyle/>
@@ -29254,7 +29306,7 @@
           <a:noFill/>
         </p:spPr>
         <p:txBody>
-          <a:bodyPr wrap="square" anchor="t">
+          <a:bodyPr wrap="square" anchor="t" lIns="0" rIns="0" tIns="0" bIns="0">
             <a:spAutoFit/>
           </a:bodyPr>
           <a:lstStyle/>
@@ -29401,7 +29453,7 @@
           <a:noFill/>
         </p:spPr>
         <p:txBody>
-          <a:bodyPr wrap="square" anchor="t">
+          <a:bodyPr wrap="square" anchor="t" lIns="0" rIns="0" tIns="0" bIns="0">
             <a:spAutoFit/>
           </a:bodyPr>
           <a:lstStyle/>
@@ -29435,7 +29487,7 @@
           <a:noFill/>
         </p:spPr>
         <p:txBody>
-          <a:bodyPr wrap="square" anchor="t">
+          <a:bodyPr wrap="square" anchor="t" lIns="0" rIns="0" tIns="0" bIns="0">
             <a:spAutoFit/>
           </a:bodyPr>
           <a:lstStyle/>
@@ -29585,7 +29637,7 @@
           <a:noFill/>
         </p:spPr>
         <p:txBody>
-          <a:bodyPr wrap="square" anchor="ctr">
+          <a:bodyPr wrap="square" anchor="ctr" lIns="0" rIns="0" tIns="0" bIns="0">
             <a:spAutoFit/>
           </a:bodyPr>
           <a:lstStyle/>
@@ -29655,7 +29707,7 @@
         <p:spPr>
           <a:xfrm>
             <a:off x="685800" y="1627632"/>
-            <a:ext cx="10820095" cy="1310640"/>
+            <a:ext cx="10820095" cy="778764"/>
           </a:xfrm>
           <a:prstGeom prst="rect">
             <a:avLst/>
@@ -29699,7 +29751,7 @@
         <p:spPr>
           <a:xfrm>
             <a:off x="685800" y="1627632"/>
-            <a:ext cx="50292" cy="1310640"/>
+            <a:ext cx="50292" cy="778764"/>
           </a:xfrm>
           <a:prstGeom prst="rect">
             <a:avLst/>
@@ -29743,7 +29795,7 @@
         <p:spPr>
           <a:xfrm>
             <a:off x="941832" y="1719072"/>
-            <a:ext cx="10362895" cy="1164336"/>
+            <a:ext cx="10362895" cy="632460"/>
           </a:xfrm>
           <a:prstGeom prst="rect">
             <a:avLst/>
@@ -29751,13 +29803,13 @@
           <a:noFill/>
         </p:spPr>
         <p:txBody>
-          <a:bodyPr wrap="square" anchor="ctr">
+          <a:bodyPr wrap="square" anchor="ctr" lIns="0" rIns="0" tIns="0" bIns="0">
             <a:spAutoFit/>
           </a:bodyPr>
           <a:lstStyle/>
           <a:p>
             <a:r>
-              <a:rPr sz="2000" b="1">
+              <a:rPr sz="1500" b="1">
                 <a:solidFill>
                   <a:srgbClr val="2B4A7D"/>
                 </a:solidFill>
@@ -29766,7 +29818,7 @@
               <a:t>The claim. </a:t>
             </a:r>
             <a:r>
-              <a:rPr sz="2000" b="0">
+              <a:rPr sz="1500" b="0">
                 <a:solidFill>
                   <a:srgbClr val="1C1C1A"/>
                 </a:solidFill>
@@ -29786,8 +29838,8 @@
           <p:nvPr/>
         </p:nvGraphicFramePr>
         <p:xfrm>
-          <a:off x="685800" y="3102864"/>
-          <a:ext cx="10820095" cy="2325624"/>
+          <a:off x="685800" y="2570988"/>
+          <a:ext cx="10820094" cy="1243584"/>
         </p:xfrm>
         <a:graphic>
           <a:graphicData uri="http://schemas.openxmlformats.org/drawingml/2006/table">
@@ -29796,17 +29848,17 @@
                 <a:tableStyleId>{2D5ABB26-0587-4C30-8999-92F81FD0307C}</a:tableStyleId>
               </a:tblPr>
               <a:tblGrid>
-                <a:gridCol w="5410047"/>
-                <a:gridCol w="5410048"/>
+                <a:gridCol w="2374150"/>
+                <a:gridCol w="8445944"/>
               </a:tblGrid>
-              <a:tr h="387096">
+              <a:tr h="310896">
                 <a:tc>
                   <a:txBody>
                     <a:bodyPr/>
                     <a:lstStyle/>
                     <a:p>
                       <a:r>
-                        <a:rPr sz="1600" b="1">
+                        <a:rPr sz="1000" b="1">
                           <a:solidFill>
                             <a:srgbClr val="FFFFFF"/>
                           </a:solidFill>
@@ -29828,7 +29880,7 @@
                     <a:lstStyle/>
                     <a:p>
                       <a:r>
-                        <a:rPr sz="1600" b="1">
+                        <a:rPr sz="1000" b="1">
                           <a:solidFill>
                             <a:srgbClr val="FFFFFF"/>
                           </a:solidFill>
@@ -29845,14 +29897,14 @@
                   </a:tcPr>
                 </a:tc>
               </a:tr>
-              <a:tr h="646176">
+              <a:tr h="310896">
                 <a:tc>
                   <a:txBody>
                     <a:bodyPr/>
                     <a:lstStyle/>
                     <a:p>
                       <a:r>
-                        <a:rPr sz="1500" b="0">
+                        <a:rPr sz="900" b="0">
                           <a:solidFill>
                             <a:srgbClr val="1C1C1A"/>
                           </a:solidFill>
@@ -29874,7 +29926,7 @@
                     <a:lstStyle/>
                     <a:p>
                       <a:r>
-                        <a:rPr sz="1500" b="0">
+                        <a:rPr sz="900" b="0">
                           <a:solidFill>
                             <a:srgbClr val="1C1C1A"/>
                           </a:solidFill>
@@ -29891,14 +29943,14 @@
                   </a:tcPr>
                 </a:tc>
               </a:tr>
-              <a:tr h="646176">
+              <a:tr h="310896">
                 <a:tc>
                   <a:txBody>
                     <a:bodyPr/>
                     <a:lstStyle/>
                     <a:p>
                       <a:r>
-                        <a:rPr sz="1500" b="0">
+                        <a:rPr sz="900" b="0">
                           <a:solidFill>
                             <a:srgbClr val="1C1C1A"/>
                           </a:solidFill>
@@ -29920,7 +29972,7 @@
                     <a:lstStyle/>
                     <a:p>
                       <a:r>
-                        <a:rPr sz="1500" b="0">
+                        <a:rPr sz="900" b="0">
                           <a:solidFill>
                             <a:srgbClr val="1C1C1A"/>
                           </a:solidFill>
@@ -29937,14 +29989,14 @@
                   </a:tcPr>
                 </a:tc>
               </a:tr>
-              <a:tr h="646176">
+              <a:tr h="310896">
                 <a:tc>
                   <a:txBody>
                     <a:bodyPr/>
                     <a:lstStyle/>
                     <a:p>
                       <a:r>
-                        <a:rPr sz="1500" b="0">
+                        <a:rPr sz="900" b="0">
                           <a:solidFill>
                             <a:srgbClr val="1C1C1A"/>
                           </a:solidFill>
@@ -29966,7 +30018,7 @@
                     <a:lstStyle/>
                     <a:p>
                       <a:r>
-                        <a:rPr sz="1500" b="0">
+                        <a:rPr sz="900" b="0">
                           <a:solidFill>
                             <a:srgbClr val="1C1C1A"/>
                           </a:solidFill>
@@ -29995,8 +30047,8 @@
         </p:nvSpPr>
         <p:spPr>
           <a:xfrm>
-            <a:off x="685800" y="5684520"/>
-            <a:ext cx="10820095" cy="910336"/>
+            <a:off x="685800" y="4070604"/>
+            <a:ext cx="10820095" cy="737616"/>
           </a:xfrm>
           <a:prstGeom prst="rect">
             <a:avLst/>
@@ -30004,18 +30056,18 @@
           <a:noFill/>
         </p:spPr>
         <p:txBody>
-          <a:bodyPr wrap="square" anchor="t">
+          <a:bodyPr wrap="square" anchor="t" lIns="0" rIns="0" tIns="0" bIns="0">
             <a:spAutoFit/>
           </a:bodyPr>
           <a:lstStyle/>
           <a:p>
             <a:pPr>
               <a:spcAft>
-                <a:spcPts val="900"/>
+                <a:spcPts val="700"/>
               </a:spcAft>
             </a:pPr>
             <a:r>
-              <a:rPr sz="2000" b="0">
+              <a:rPr sz="1500" b="0">
                 <a:solidFill>
                   <a:srgbClr val="1C1C1A"/>
                 </a:solidFill>
@@ -30029,6 +30081,161 @@
       <p:sp>
         <p:nvSpPr>
           <p:cNvPr id="11" name="Rectangle 10"/>
+          <p:cNvSpPr/>
+          <p:nvPr/>
+        </p:nvSpPr>
+        <p:spPr>
+          <a:xfrm>
+            <a:off x="685800" y="4936236"/>
+            <a:ext cx="10820095" cy="508254"/>
+          </a:xfrm>
+          <a:prstGeom prst="rect">
+            <a:avLst/>
+          </a:prstGeom>
+          <a:solidFill>
+            <a:srgbClr val="E4ECF7"/>
+          </a:solidFill>
+          <a:ln>
+            <a:noFill/>
+          </a:ln>
+          <a:effectLst/>
+        </p:spPr>
+        <p:style>
+          <a:lnRef idx="1">
+            <a:schemeClr val="accent1"/>
+          </a:lnRef>
+          <a:fillRef idx="3">
+            <a:schemeClr val="accent1"/>
+          </a:fillRef>
+          <a:effectRef idx="2">
+            <a:schemeClr val="accent1"/>
+          </a:effectRef>
+          <a:fontRef idx="minor">
+            <a:schemeClr val="lt1"/>
+          </a:fontRef>
+        </p:style>
+        <p:txBody>
+          <a:bodyPr rtlCol="0" anchor="ctr" wrap="square"/>
+          <a:lstStyle/>
+          <a:p>
+            <a:pPr algn="ctr"/>
+          </a:p>
+        </p:txBody>
+      </p:sp>
+      <p:sp>
+        <p:nvSpPr>
+          <p:cNvPr id="12" name="Rectangle 11"/>
+          <p:cNvSpPr/>
+          <p:nvPr/>
+        </p:nvSpPr>
+        <p:spPr>
+          <a:xfrm>
+            <a:off x="685800" y="4936236"/>
+            <a:ext cx="50292" cy="508254"/>
+          </a:xfrm>
+          <a:prstGeom prst="rect">
+            <a:avLst/>
+          </a:prstGeom>
+          <a:solidFill>
+            <a:srgbClr val="2B4A7D"/>
+          </a:solidFill>
+          <a:ln>
+            <a:noFill/>
+          </a:ln>
+          <a:effectLst/>
+        </p:spPr>
+        <p:style>
+          <a:lnRef idx="1">
+            <a:schemeClr val="accent1"/>
+          </a:lnRef>
+          <a:fillRef idx="3">
+            <a:schemeClr val="accent1"/>
+          </a:fillRef>
+          <a:effectRef idx="2">
+            <a:schemeClr val="accent1"/>
+          </a:effectRef>
+          <a:fontRef idx="minor">
+            <a:schemeClr val="lt1"/>
+          </a:fontRef>
+        </p:style>
+        <p:txBody>
+          <a:bodyPr rtlCol="0" anchor="ctr" wrap="square"/>
+          <a:lstStyle/>
+          <a:p>
+            <a:pPr algn="ctr"/>
+          </a:p>
+        </p:txBody>
+      </p:sp>
+      <p:sp>
+        <p:nvSpPr>
+          <p:cNvPr id="13" name="TextBox 12"/>
+          <p:cNvSpPr txBox="1"/>
+          <p:nvPr/>
+        </p:nvSpPr>
+        <p:spPr>
+          <a:xfrm>
+            <a:off x="941832" y="5027676"/>
+            <a:ext cx="10362895" cy="361950"/>
+          </a:xfrm>
+          <a:prstGeom prst="rect">
+            <a:avLst/>
+          </a:prstGeom>
+          <a:noFill/>
+        </p:spPr>
+        <p:txBody>
+          <a:bodyPr wrap="square" anchor="ctr" lIns="0" rIns="0" tIns="0" bIns="0">
+            <a:spAutoFit/>
+          </a:bodyPr>
+          <a:lstStyle/>
+          <a:p>
+            <a:r>
+              <a:rPr sz="1500" b="1">
+                <a:solidFill>
+                  <a:srgbClr val="2B4A7D"/>
+                </a:solidFill>
+                <a:latin typeface="Calibri"/>
+              </a:rPr>
+              <a:t>The mental model. </a:t>
+            </a:r>
+            <a:r>
+              <a:rPr sz="1500" b="0">
+                <a:solidFill>
+                  <a:srgbClr val="1C1C1A"/>
+                </a:solidFill>
+                <a:latin typeface="Calibri"/>
+              </a:rPr>
+              <a:t>A CSV is a photograph of a table. Everything in a photograph is ink.</a:t>
+            </a:r>
+          </a:p>
+        </p:txBody>
+      </p:sp>
+      <p:pic>
+        <p:nvPicPr>
+          <p:cNvPr id="14" name="Picture 13" descr="b4a0fd1ba09eeedf.png"/>
+          <p:cNvPicPr>
+            <a:picLocks noChangeAspect="1"/>
+          </p:cNvPicPr>
+          <p:nvPr/>
+        </p:nvPicPr>
+        <p:blipFill>
+          <a:blip r:embed="rId2"/>
+          <a:stretch>
+            <a:fillRect/>
+          </a:stretch>
+        </p:blipFill>
+        <p:spPr>
+          <a:xfrm>
+            <a:off x="2901543" y="5609082"/>
+            <a:ext cx="6388608" cy="1097280"/>
+          </a:xfrm>
+          <a:prstGeom prst="rect">
+            <a:avLst/>
+          </a:prstGeom>
+        </p:spPr>
+      </p:pic>
+      <p:sp>
+        <p:nvSpPr>
+          <p:cNvPr id="15" name="Rectangle 14"/>
           <p:cNvSpPr/>
           <p:nvPr/>
         </p:nvSpPr>
@@ -30072,7 +30279,7 @@
       </p:sp>
       <p:sp>
         <p:nvSpPr>
-          <p:cNvPr id="12" name="TextBox 11"/>
+          <p:cNvPr id="16" name="TextBox 15"/>
           <p:cNvSpPr txBox="1"/>
           <p:nvPr/>
         </p:nvSpPr>
@@ -30087,7 +30294,7 @@
           <a:noFill/>
         </p:spPr>
         <p:txBody>
-          <a:bodyPr wrap="square" anchor="t">
+          <a:bodyPr wrap="square" anchor="t" lIns="0" rIns="0" tIns="0" bIns="0">
             <a:spAutoFit/>
           </a:bodyPr>
           <a:lstStyle/>
@@ -30106,7 +30313,7 @@
       </p:sp>
       <p:sp>
         <p:nvSpPr>
-          <p:cNvPr id="13" name="TextBox 12"/>
+          <p:cNvPr id="17" name="TextBox 16"/>
           <p:cNvSpPr txBox="1"/>
           <p:nvPr/>
         </p:nvSpPr>
@@ -30121,7 +30328,7 @@
           <a:noFill/>
         </p:spPr>
         <p:txBody>
-          <a:bodyPr wrap="square" anchor="t">
+          <a:bodyPr wrap="square" anchor="t" lIns="0" rIns="0" tIns="0" bIns="0">
             <a:spAutoFit/>
           </a:bodyPr>
           <a:lstStyle/>
@@ -30218,7 +30425,7 @@
           <a:noFill/>
         </p:spPr>
         <p:txBody>
-          <a:bodyPr wrap="square" anchor="ctr">
+          <a:bodyPr wrap="square" anchor="ctr" lIns="0" rIns="0" tIns="0" bIns="0">
             <a:spAutoFit/>
           </a:bodyPr>
           <a:lstStyle/>
@@ -30562,7 +30769,7 @@
           <a:noFill/>
         </p:spPr>
         <p:txBody>
-          <a:bodyPr wrap="square" anchor="t">
+          <a:bodyPr wrap="square" anchor="t" lIns="0" rIns="0" tIns="0" bIns="0">
             <a:spAutoFit/>
           </a:bodyPr>
           <a:lstStyle/>
@@ -30596,7 +30803,7 @@
           <a:noFill/>
         </p:spPr>
         <p:txBody>
-          <a:bodyPr wrap="square" anchor="t">
+          <a:bodyPr wrap="square" anchor="t" lIns="0" rIns="0" tIns="0" bIns="0">
             <a:spAutoFit/>
           </a:bodyPr>
           <a:lstStyle/>
@@ -30799,7 +31006,7 @@
           <a:noFill/>
         </p:spPr>
         <p:txBody>
-          <a:bodyPr wrap="square" anchor="ctr">
+          <a:bodyPr wrap="square" anchor="ctr" lIns="0" rIns="0" tIns="0" bIns="0">
             <a:spAutoFit/>
           </a:bodyPr>
           <a:lstStyle/>
@@ -30877,7 +31084,7 @@
           <a:noFill/>
         </p:spPr>
         <p:txBody>
-          <a:bodyPr wrap="square" anchor="t">
+          <a:bodyPr wrap="square" anchor="t" lIns="0" rIns="0" tIns="0" bIns="0">
             <a:spAutoFit/>
           </a:bodyPr>
           <a:lstStyle/>
@@ -30976,7 +31183,7 @@
           <a:noFill/>
         </p:spPr>
         <p:txBody>
-          <a:bodyPr wrap="square" anchor="t">
+          <a:bodyPr wrap="square" anchor="t" lIns="0" rIns="0" tIns="0" bIns="0">
             <a:spAutoFit/>
           </a:bodyPr>
           <a:lstStyle/>
@@ -31010,7 +31217,7 @@
           <a:noFill/>
         </p:spPr>
         <p:txBody>
-          <a:bodyPr wrap="square" anchor="t">
+          <a:bodyPr wrap="square" anchor="t" lIns="0" rIns="0" tIns="0" bIns="0">
             <a:spAutoFit/>
           </a:bodyPr>
           <a:lstStyle/>
@@ -31160,7 +31367,7 @@
           <a:noFill/>
         </p:spPr>
         <p:txBody>
-          <a:bodyPr wrap="square" anchor="ctr">
+          <a:bodyPr wrap="square" anchor="ctr" lIns="0" rIns="0" tIns="0" bIns="0">
             <a:spAutoFit/>
           </a:bodyPr>
           <a:lstStyle/>
@@ -31238,7 +31445,7 @@
           <a:noFill/>
         </p:spPr>
         <p:txBody>
-          <a:bodyPr wrap="square" anchor="t">
+          <a:bodyPr wrap="square" anchor="t" lIns="0" rIns="0" tIns="0" bIns="0">
             <a:spAutoFit/>
           </a:bodyPr>
           <a:lstStyle/>
@@ -31385,7 +31592,7 @@
           <a:noFill/>
         </p:spPr>
         <p:txBody>
-          <a:bodyPr wrap="square" anchor="t">
+          <a:bodyPr wrap="square" anchor="t" lIns="0" rIns="0" tIns="0" bIns="0">
             <a:spAutoFit/>
           </a:bodyPr>
           <a:lstStyle/>
@@ -31419,7 +31626,7 @@
           <a:noFill/>
         </p:spPr>
         <p:txBody>
-          <a:bodyPr wrap="square" anchor="t">
+          <a:bodyPr wrap="square" anchor="t" lIns="0" rIns="0" tIns="0" bIns="0">
             <a:spAutoFit/>
           </a:bodyPr>
           <a:lstStyle/>
@@ -31569,7 +31776,7 @@
           <a:noFill/>
         </p:spPr>
         <p:txBody>
-          <a:bodyPr wrap="square" anchor="ctr">
+          <a:bodyPr wrap="square" anchor="ctr" lIns="0" rIns="0" tIns="0" bIns="0">
             <a:spAutoFit/>
           </a:bodyPr>
           <a:lstStyle/>
@@ -31639,7 +31846,7 @@
         <p:spPr>
           <a:xfrm>
             <a:off x="685800" y="1627632"/>
-            <a:ext cx="10820095" cy="965200"/>
+            <a:ext cx="10820095" cy="472186"/>
           </a:xfrm>
           <a:prstGeom prst="rect">
             <a:avLst/>
@@ -31683,7 +31890,7 @@
         <p:spPr>
           <a:xfrm>
             <a:off x="685800" y="1627632"/>
-            <a:ext cx="50292" cy="965200"/>
+            <a:ext cx="50292" cy="472186"/>
           </a:xfrm>
           <a:prstGeom prst="rect">
             <a:avLst/>
@@ -31727,7 +31934,7 @@
         <p:spPr>
           <a:xfrm>
             <a:off x="941832" y="1719072"/>
-            <a:ext cx="10362895" cy="818896"/>
+            <a:ext cx="10362895" cy="325882"/>
           </a:xfrm>
           <a:prstGeom prst="rect">
             <a:avLst/>
@@ -31735,13 +31942,13 @@
           <a:noFill/>
         </p:spPr>
         <p:txBody>
-          <a:bodyPr wrap="square" anchor="ctr">
+          <a:bodyPr wrap="square" anchor="ctr" lIns="0" rIns="0" tIns="0" bIns="0">
             <a:spAutoFit/>
           </a:bodyPr>
           <a:lstStyle/>
           <a:p>
             <a:r>
-              <a:rPr sz="2000" b="1">
+              <a:rPr sz="1300" b="1">
                 <a:solidFill>
                   <a:srgbClr val="2B4A7D"/>
                 </a:solidFill>
@@ -31750,7 +31957,7 @@
               <a:t>The claim. </a:t>
             </a:r>
             <a:r>
-              <a:rPr sz="2000" b="0">
+              <a:rPr sz="1300" b="0">
                 <a:solidFill>
                   <a:srgbClr val="1C1C1A"/>
                 </a:solidFill>
@@ -31770,8 +31977,8 @@
           <p:nvPr/>
         </p:nvGraphicFramePr>
         <p:xfrm>
-          <a:off x="685800" y="2757424"/>
-          <a:ext cx="10820095" cy="2325624"/>
+          <a:off x="685800" y="2264410"/>
+          <a:ext cx="10820094" cy="1243584"/>
         </p:xfrm>
         <a:graphic>
           <a:graphicData uri="http://schemas.openxmlformats.org/drawingml/2006/table">
@@ -31780,17 +31987,17 @@
                 <a:tableStyleId>{2D5ABB26-0587-4C30-8999-92F81FD0307C}</a:tableStyleId>
               </a:tblPr>
               <a:tblGrid>
-                <a:gridCol w="5410047"/>
-                <a:gridCol w="5410048"/>
+                <a:gridCol w="2546747"/>
+                <a:gridCol w="8273347"/>
               </a:tblGrid>
-              <a:tr h="387096">
+              <a:tr h="310896">
                 <a:tc>
                   <a:txBody>
                     <a:bodyPr/>
                     <a:lstStyle/>
                     <a:p>
                       <a:r>
-                        <a:rPr sz="1600" b="1">
+                        <a:rPr sz="1000" b="1">
                           <a:solidFill>
                             <a:srgbClr val="FFFFFF"/>
                           </a:solidFill>
@@ -31812,7 +32019,7 @@
                     <a:lstStyle/>
                     <a:p>
                       <a:r>
-                        <a:rPr sz="1600" b="1">
+                        <a:rPr sz="1000" b="1">
                           <a:solidFill>
                             <a:srgbClr val="FFFFFF"/>
                           </a:solidFill>
@@ -31829,14 +32036,14 @@
                   </a:tcPr>
                 </a:tc>
               </a:tr>
-              <a:tr h="646176">
+              <a:tr h="310896">
                 <a:tc>
                   <a:txBody>
                     <a:bodyPr/>
                     <a:lstStyle/>
                     <a:p>
                       <a:r>
-                        <a:rPr sz="1500" b="0">
+                        <a:rPr sz="900" b="0">
                           <a:solidFill>
                             <a:srgbClr val="1C1C1A"/>
                           </a:solidFill>
@@ -31858,7 +32065,7 @@
                     <a:lstStyle/>
                     <a:p>
                       <a:r>
-                        <a:rPr sz="1500" b="0">
+                        <a:rPr sz="900" b="0">
                           <a:solidFill>
                             <a:srgbClr val="1C1C1A"/>
                           </a:solidFill>
@@ -31875,14 +32082,14 @@
                   </a:tcPr>
                 </a:tc>
               </a:tr>
-              <a:tr h="646176">
+              <a:tr h="310896">
                 <a:tc>
                   <a:txBody>
                     <a:bodyPr/>
                     <a:lstStyle/>
                     <a:p>
                       <a:r>
-                        <a:rPr sz="1500" b="0">
+                        <a:rPr sz="900" b="0">
                           <a:solidFill>
                             <a:srgbClr val="1C1C1A"/>
                           </a:solidFill>
@@ -31904,7 +32111,7 @@
                     <a:lstStyle/>
                     <a:p>
                       <a:r>
-                        <a:rPr sz="1500" b="0">
+                        <a:rPr sz="900" b="0">
                           <a:solidFill>
                             <a:srgbClr val="1C1C1A"/>
                           </a:solidFill>
@@ -31921,14 +32128,14 @@
                   </a:tcPr>
                 </a:tc>
               </a:tr>
-              <a:tr h="646176">
+              <a:tr h="310896">
                 <a:tc>
                   <a:txBody>
                     <a:bodyPr/>
                     <a:lstStyle/>
                     <a:p>
                       <a:r>
-                        <a:rPr sz="1500" b="0">
+                        <a:rPr sz="900" b="0">
                           <a:solidFill>
                             <a:srgbClr val="1C1C1A"/>
                           </a:solidFill>
@@ -31950,7 +32157,7 @@
                     <a:lstStyle/>
                     <a:p>
                       <a:r>
-                        <a:rPr sz="1500" b="0">
+                        <a:rPr sz="900" b="0">
                           <a:solidFill>
                             <a:srgbClr val="1C1C1A"/>
                           </a:solidFill>
@@ -31979,8 +32186,8 @@
         </p:nvSpPr>
         <p:spPr>
           <a:xfrm>
-            <a:off x="685800" y="5339080"/>
-            <a:ext cx="10820095" cy="1255776"/>
+            <a:off x="685800" y="3764026"/>
+            <a:ext cx="10820095" cy="668528"/>
           </a:xfrm>
           <a:prstGeom prst="rect">
             <a:avLst/>
@@ -31988,18 +32195,18 @@
           <a:noFill/>
         </p:spPr>
         <p:txBody>
-          <a:bodyPr wrap="square" anchor="t">
+          <a:bodyPr wrap="square" anchor="t" lIns="0" rIns="0" tIns="0" bIns="0">
             <a:spAutoFit/>
           </a:bodyPr>
           <a:lstStyle/>
           <a:p>
             <a:pPr>
               <a:spcAft>
-                <a:spcPts val="900"/>
+                <a:spcPts val="600"/>
               </a:spcAft>
             </a:pPr>
             <a:r>
-              <a:rPr sz="2000" b="0">
+              <a:rPr sz="1300" b="0">
                 <a:solidFill>
                   <a:srgbClr val="1C1C1A"/>
                 </a:solidFill>
@@ -32013,6 +32220,161 @@
       <p:sp>
         <p:nvSpPr>
           <p:cNvPr id="11" name="Rectangle 10"/>
+          <p:cNvSpPr/>
+          <p:nvPr/>
+        </p:nvSpPr>
+        <p:spPr>
+          <a:xfrm>
+            <a:off x="685800" y="4560570"/>
+            <a:ext cx="10820095" cy="706628"/>
+          </a:xfrm>
+          <a:prstGeom prst="rect">
+            <a:avLst/>
+          </a:prstGeom>
+          <a:solidFill>
+            <a:srgbClr val="E4ECF7"/>
+          </a:solidFill>
+          <a:ln>
+            <a:noFill/>
+          </a:ln>
+          <a:effectLst/>
+        </p:spPr>
+        <p:style>
+          <a:lnRef idx="1">
+            <a:schemeClr val="accent1"/>
+          </a:lnRef>
+          <a:fillRef idx="3">
+            <a:schemeClr val="accent1"/>
+          </a:fillRef>
+          <a:effectRef idx="2">
+            <a:schemeClr val="accent1"/>
+          </a:effectRef>
+          <a:fontRef idx="minor">
+            <a:schemeClr val="lt1"/>
+          </a:fontRef>
+        </p:style>
+        <p:txBody>
+          <a:bodyPr rtlCol="0" anchor="ctr" wrap="square"/>
+          <a:lstStyle/>
+          <a:p>
+            <a:pPr algn="ctr"/>
+          </a:p>
+        </p:txBody>
+      </p:sp>
+      <p:sp>
+        <p:nvSpPr>
+          <p:cNvPr id="12" name="Rectangle 11"/>
+          <p:cNvSpPr/>
+          <p:nvPr/>
+        </p:nvSpPr>
+        <p:spPr>
+          <a:xfrm>
+            <a:off x="685800" y="4560570"/>
+            <a:ext cx="50292" cy="706628"/>
+          </a:xfrm>
+          <a:prstGeom prst="rect">
+            <a:avLst/>
+          </a:prstGeom>
+          <a:solidFill>
+            <a:srgbClr val="2B4A7D"/>
+          </a:solidFill>
+          <a:ln>
+            <a:noFill/>
+          </a:ln>
+          <a:effectLst/>
+        </p:spPr>
+        <p:style>
+          <a:lnRef idx="1">
+            <a:schemeClr val="accent1"/>
+          </a:lnRef>
+          <a:fillRef idx="3">
+            <a:schemeClr val="accent1"/>
+          </a:fillRef>
+          <a:effectRef idx="2">
+            <a:schemeClr val="accent1"/>
+          </a:effectRef>
+          <a:fontRef idx="minor">
+            <a:schemeClr val="lt1"/>
+          </a:fontRef>
+        </p:style>
+        <p:txBody>
+          <a:bodyPr rtlCol="0" anchor="ctr" wrap="square"/>
+          <a:lstStyle/>
+          <a:p>
+            <a:pPr algn="ctr"/>
+          </a:p>
+        </p:txBody>
+      </p:sp>
+      <p:sp>
+        <p:nvSpPr>
+          <p:cNvPr id="13" name="TextBox 12"/>
+          <p:cNvSpPr txBox="1"/>
+          <p:nvPr/>
+        </p:nvSpPr>
+        <p:spPr>
+          <a:xfrm>
+            <a:off x="941832" y="4652009"/>
+            <a:ext cx="10362895" cy="560324"/>
+          </a:xfrm>
+          <a:prstGeom prst="rect">
+            <a:avLst/>
+          </a:prstGeom>
+          <a:noFill/>
+        </p:spPr>
+        <p:txBody>
+          <a:bodyPr wrap="square" anchor="ctr" lIns="0" rIns="0" tIns="0" bIns="0">
+            <a:spAutoFit/>
+          </a:bodyPr>
+          <a:lstStyle/>
+          <a:p>
+            <a:r>
+              <a:rPr sz="1300" b="1">
+                <a:solidFill>
+                  <a:srgbClr val="2B4A7D"/>
+                </a:solidFill>
+                <a:latin typeface="Calibri"/>
+              </a:rPr>
+              <a:t>The mental model. </a:t>
+            </a:r>
+            <a:r>
+              <a:rPr sz="1300" b="0">
+                <a:solidFill>
+                  <a:srgbClr val="1C1C1A"/>
+                </a:solidFill>
+                <a:latin typeface="Calibri"/>
+              </a:rPr>
+              <a:t>Flattening costs one decision per nested field: drop it, promote it to a column whose name says where it came from, or lose it.</a:t>
+            </a:r>
+          </a:p>
+        </p:txBody>
+      </p:sp>
+      <p:pic>
+        <p:nvPicPr>
+          <p:cNvPr id="14" name="Picture 13" descr="1572f59cd44079de.png"/>
+          <p:cNvPicPr>
+            <a:picLocks noChangeAspect="1"/>
+          </p:cNvPicPr>
+          <p:nvPr/>
+        </p:nvPicPr>
+        <p:blipFill>
+          <a:blip r:embed="rId2"/>
+          <a:stretch>
+            <a:fillRect/>
+          </a:stretch>
+        </p:blipFill>
+        <p:spPr>
+          <a:xfrm>
+            <a:off x="2790734" y="5431790"/>
+            <a:ext cx="6610227" cy="1097280"/>
+          </a:xfrm>
+          <a:prstGeom prst="rect">
+            <a:avLst/>
+          </a:prstGeom>
+        </p:spPr>
+      </p:pic>
+      <p:sp>
+        <p:nvSpPr>
+          <p:cNvPr id="15" name="Rectangle 14"/>
           <p:cNvSpPr/>
           <p:nvPr/>
         </p:nvSpPr>
@@ -32056,7 +32418,7 @@
       </p:sp>
       <p:sp>
         <p:nvSpPr>
-          <p:cNvPr id="12" name="TextBox 11"/>
+          <p:cNvPr id="16" name="TextBox 15"/>
           <p:cNvSpPr txBox="1"/>
           <p:nvPr/>
         </p:nvSpPr>
@@ -32071,7 +32433,7 @@
           <a:noFill/>
         </p:spPr>
         <p:txBody>
-          <a:bodyPr wrap="square" anchor="t">
+          <a:bodyPr wrap="square" anchor="t" lIns="0" rIns="0" tIns="0" bIns="0">
             <a:spAutoFit/>
           </a:bodyPr>
           <a:lstStyle/>
@@ -32090,7 +32452,7 @@
       </p:sp>
       <p:sp>
         <p:nvSpPr>
-          <p:cNvPr id="13" name="TextBox 12"/>
+          <p:cNvPr id="17" name="TextBox 16"/>
           <p:cNvSpPr txBox="1"/>
           <p:nvPr/>
         </p:nvSpPr>
@@ -32105,7 +32467,7 @@
           <a:noFill/>
         </p:spPr>
         <p:txBody>
-          <a:bodyPr wrap="square" anchor="t">
+          <a:bodyPr wrap="square" anchor="t" lIns="0" rIns="0" tIns="0" bIns="0">
             <a:spAutoFit/>
           </a:bodyPr>
           <a:lstStyle/>
@@ -32308,7 +32670,7 @@
           <a:noFill/>
         </p:spPr>
         <p:txBody>
-          <a:bodyPr wrap="square" anchor="ctr">
+          <a:bodyPr wrap="square" anchor="ctr" lIns="0" rIns="0" tIns="0" bIns="0">
             <a:spAutoFit/>
           </a:bodyPr>
           <a:lstStyle/>
@@ -32377,8 +32739,8 @@
         </p:nvSpPr>
         <p:spPr>
           <a:xfrm>
-            <a:off x="685800" y="2812288"/>
-            <a:ext cx="10820095" cy="2056384"/>
+            <a:off x="685800" y="2639568"/>
+            <a:ext cx="10820095" cy="2401824"/>
           </a:xfrm>
           <a:prstGeom prst="rect">
             <a:avLst/>
@@ -32386,7 +32748,7 @@
           <a:noFill/>
         </p:spPr>
         <p:txBody>
-          <a:bodyPr wrap="square" anchor="t">
+          <a:bodyPr wrap="square" anchor="t" lIns="0" rIns="0" tIns="0" bIns="0">
             <a:spAutoFit/>
           </a:bodyPr>
           <a:lstStyle/>
@@ -32485,7 +32847,7 @@
           <a:noFill/>
         </p:spPr>
         <p:txBody>
-          <a:bodyPr wrap="square" anchor="t">
+          <a:bodyPr wrap="square" anchor="t" lIns="0" rIns="0" tIns="0" bIns="0">
             <a:spAutoFit/>
           </a:bodyPr>
           <a:lstStyle/>
@@ -32519,7 +32881,7 @@
           <a:noFill/>
         </p:spPr>
         <p:txBody>
-          <a:bodyPr wrap="square" anchor="t">
+          <a:bodyPr wrap="square" anchor="t" lIns="0" rIns="0" tIns="0" bIns="0">
             <a:spAutoFit/>
           </a:bodyPr>
           <a:lstStyle/>
@@ -32669,7 +33031,7 @@
           <a:noFill/>
         </p:spPr>
         <p:txBody>
-          <a:bodyPr wrap="square" anchor="ctr">
+          <a:bodyPr wrap="square" anchor="ctr" lIns="0" rIns="0" tIns="0" bIns="0">
             <a:spAutoFit/>
           </a:bodyPr>
           <a:lstStyle/>
@@ -32738,8 +33100,8 @@
         </p:nvSpPr>
         <p:spPr>
           <a:xfrm>
-            <a:off x="685800" y="2647696"/>
-            <a:ext cx="10820095" cy="2385568"/>
+            <a:off x="685800" y="2474976"/>
+            <a:ext cx="10820095" cy="2731008"/>
           </a:xfrm>
           <a:prstGeom prst="rect">
             <a:avLst/>
@@ -32747,7 +33109,7 @@
           <a:noFill/>
         </p:spPr>
         <p:txBody>
-          <a:bodyPr wrap="square" anchor="t">
+          <a:bodyPr wrap="square" anchor="t" lIns="0" rIns="0" tIns="0" bIns="0">
             <a:spAutoFit/>
           </a:bodyPr>
           <a:lstStyle/>
@@ -32894,7 +33256,7 @@
           <a:noFill/>
         </p:spPr>
         <p:txBody>
-          <a:bodyPr wrap="square" anchor="t">
+          <a:bodyPr wrap="square" anchor="t" lIns="0" rIns="0" tIns="0" bIns="0">
             <a:spAutoFit/>
           </a:bodyPr>
           <a:lstStyle/>
@@ -32928,7 +33290,7 @@
           <a:noFill/>
         </p:spPr>
         <p:txBody>
-          <a:bodyPr wrap="square" anchor="t">
+          <a:bodyPr wrap="square" anchor="t" lIns="0" rIns="0" tIns="0" bIns="0">
             <a:spAutoFit/>
           </a:bodyPr>
           <a:lstStyle/>
@@ -33078,7 +33440,7 @@
           <a:noFill/>
         </p:spPr>
         <p:txBody>
-          <a:bodyPr wrap="square" anchor="ctr">
+          <a:bodyPr wrap="square" anchor="ctr" lIns="0" rIns="0" tIns="0" bIns="0">
             <a:spAutoFit/>
           </a:bodyPr>
           <a:lstStyle/>
@@ -33139,40 +33501,16 @@
           </a:p>
         </p:txBody>
       </p:sp>
-      <p:pic>
-        <p:nvPicPr>
-          <p:cNvPr id="6" name="Picture 5" descr="7bd97f8db0e76883.png"/>
-          <p:cNvPicPr>
-            <a:picLocks noChangeAspect="1"/>
-          </p:cNvPicPr>
-          <p:nvPr/>
-        </p:nvPicPr>
-        <p:blipFill>
-          <a:blip r:embed="rId2"/>
-          <a:stretch>
-            <a:fillRect/>
-          </a:stretch>
-        </p:blipFill>
-        <p:spPr>
-          <a:xfrm>
-            <a:off x="890211" y="1627632"/>
-            <a:ext cx="4243818" cy="4425696"/>
-          </a:xfrm>
-          <a:prstGeom prst="rect">
-            <a:avLst/>
-          </a:prstGeom>
-        </p:spPr>
-      </p:pic>
-      <p:sp>
-        <p:nvSpPr>
-          <p:cNvPr id="7" name="Rectangle 6"/>
+      <p:sp>
+        <p:nvSpPr>
+          <p:cNvPr id="6" name="Rectangle 5"/>
           <p:cNvSpPr/>
           <p:nvPr/>
         </p:nvSpPr>
         <p:spPr>
           <a:xfrm>
-            <a:off x="5771244" y="1627632"/>
-            <a:ext cx="5734650" cy="2001520"/>
+            <a:off x="685800" y="1627632"/>
+            <a:ext cx="5135727" cy="1770633"/>
           </a:xfrm>
           <a:prstGeom prst="rect">
             <a:avLst/>
@@ -33209,14 +33547,14 @@
       </p:sp>
       <p:sp>
         <p:nvSpPr>
-          <p:cNvPr id="8" name="Rectangle 7"/>
+          <p:cNvPr id="7" name="Rectangle 6"/>
           <p:cNvSpPr/>
           <p:nvPr/>
         </p:nvSpPr>
         <p:spPr>
           <a:xfrm>
-            <a:off x="5771244" y="1627632"/>
-            <a:ext cx="50292" cy="2001520"/>
+            <a:off x="685800" y="1627632"/>
+            <a:ext cx="50292" cy="1770633"/>
           </a:xfrm>
           <a:prstGeom prst="rect">
             <a:avLst/>
@@ -33253,14 +33591,14 @@
       </p:sp>
       <p:sp>
         <p:nvSpPr>
-          <p:cNvPr id="9" name="TextBox 8"/>
+          <p:cNvPr id="8" name="TextBox 7"/>
           <p:cNvSpPr txBox="1"/>
           <p:nvPr/>
         </p:nvSpPr>
         <p:spPr>
           <a:xfrm>
-            <a:off x="6027276" y="1719072"/>
-            <a:ext cx="5277450" cy="1855216"/>
+            <a:off x="941832" y="1719072"/>
+            <a:ext cx="4678527" cy="1624330"/>
           </a:xfrm>
           <a:prstGeom prst="rect">
             <a:avLst/>
@@ -33268,13 +33606,13 @@
           <a:noFill/>
         </p:spPr>
         <p:txBody>
-          <a:bodyPr wrap="square" anchor="ctr">
+          <a:bodyPr wrap="square" anchor="ctr" lIns="0" rIns="0" tIns="0" bIns="0">
             <a:spAutoFit/>
           </a:bodyPr>
           <a:lstStyle/>
           <a:p>
             <a:r>
-              <a:rPr sz="2000" b="1">
+              <a:rPr sz="1700" b="1">
                 <a:solidFill>
                   <a:srgbClr val="2B4A7D"/>
                 </a:solidFill>
@@ -33283,7 +33621,7 @@
               <a:t>The claim. </a:t>
             </a:r>
             <a:r>
-              <a:rPr sz="2000" b="0">
+              <a:rPr sz="1700" b="0">
                 <a:solidFill>
                   <a:srgbClr val="1C1C1A"/>
                 </a:solidFill>
@@ -33296,15 +33634,15 @@
       </p:sp>
       <p:graphicFrame>
         <p:nvGraphicFramePr>
-          <p:cNvPr id="10" name="Table 9"/>
+          <p:cNvPr id="9" name="Table 8"/>
           <p:cNvGraphicFramePr>
             <a:graphicFrameLocks noGrp="1"/>
           </p:cNvGraphicFramePr>
           <p:nvPr/>
         </p:nvGraphicFramePr>
         <p:xfrm>
-          <a:off x="5771244" y="3793744"/>
-          <a:ext cx="5734650" cy="2168141"/>
+          <a:off x="685800" y="3562858"/>
+          <a:ext cx="5135726" cy="1627632"/>
         </p:xfrm>
         <a:graphic>
           <a:graphicData uri="http://schemas.openxmlformats.org/drawingml/2006/table">
@@ -33313,17 +33651,17 @@
                 <a:tableStyleId>{2D5ABB26-0587-4C30-8999-92F81FD0307C}</a:tableStyleId>
               </a:tblPr>
               <a:tblGrid>
-                <a:gridCol w="2867325"/>
-                <a:gridCol w="2867325"/>
+                <a:gridCol w="2360753"/>
+                <a:gridCol w="2774973"/>
               </a:tblGrid>
-              <a:tr h="295127">
+              <a:tr h="310896">
                 <a:tc>
                   <a:txBody>
                     <a:bodyPr/>
                     <a:lstStyle/>
                     <a:p>
                       <a:r>
-                        <a:rPr sz="1600" b="1">
+                        <a:rPr sz="1000" b="1">
                           <a:solidFill>
                             <a:srgbClr val="FFFFFF"/>
                           </a:solidFill>
@@ -33345,7 +33683,7 @@
                     <a:lstStyle/>
                     <a:p>
                       <a:r>
-                        <a:rPr sz="1600" b="1">
+                        <a:rPr sz="1000" b="1">
                           <a:solidFill>
                             <a:srgbClr val="FFFFFF"/>
                           </a:solidFill>
@@ -33362,14 +33700,14 @@
                   </a:tcPr>
                 </a:tc>
               </a:tr>
-              <a:tr h="690180">
+              <a:tr h="438912">
                 <a:tc>
                   <a:txBody>
                     <a:bodyPr/>
                     <a:lstStyle/>
                     <a:p>
                       <a:r>
-                        <a:rPr sz="1500" b="0">
+                        <a:rPr sz="900" b="0">
                           <a:solidFill>
                             <a:srgbClr val="1C1C1A"/>
                           </a:solidFill>
@@ -33391,7 +33729,7 @@
                     <a:lstStyle/>
                     <a:p>
                       <a:r>
-                        <a:rPr sz="1500" b="0">
+                        <a:rPr sz="900" b="0">
                           <a:solidFill>
                             <a:srgbClr val="1C1C1A"/>
                           </a:solidFill>
@@ -33408,14 +33746,14 @@
                   </a:tcPr>
                 </a:tc>
               </a:tr>
-              <a:tr h="492654">
+              <a:tr h="438912">
                 <a:tc>
                   <a:txBody>
                     <a:bodyPr/>
                     <a:lstStyle/>
                     <a:p>
                       <a:r>
-                        <a:rPr sz="1500" b="0">
+                        <a:rPr sz="900" b="0">
                           <a:solidFill>
                             <a:srgbClr val="1C1C1A"/>
                           </a:solidFill>
@@ -33437,7 +33775,7 @@
                     <a:lstStyle/>
                     <a:p>
                       <a:r>
-                        <a:rPr sz="1500" b="0">
+                        <a:rPr sz="900" b="0">
                           <a:solidFill>
                             <a:srgbClr val="1C1C1A"/>
                           </a:solidFill>
@@ -33454,14 +33792,14 @@
                   </a:tcPr>
                 </a:tc>
               </a:tr>
-              <a:tr h="690180">
+              <a:tr h="438912">
                 <a:tc>
                   <a:txBody>
                     <a:bodyPr/>
                     <a:lstStyle/>
                     <a:p>
                       <a:r>
-                        <a:rPr sz="1500" b="0">
+                        <a:rPr sz="900" b="0">
                           <a:solidFill>
                             <a:srgbClr val="1C1C1A"/>
                           </a:solidFill>
@@ -33483,7 +33821,7 @@
                     <a:lstStyle/>
                     <a:p>
                       <a:r>
-                        <a:rPr sz="1500" b="0">
+                        <a:rPr sz="900" b="0">
                           <a:solidFill>
                             <a:srgbClr val="1C1C1A"/>
                           </a:solidFill>
@@ -33506,7 +33844,201 @@
       </p:graphicFrame>
       <p:sp>
         <p:nvSpPr>
+          <p:cNvPr id="10" name="TextBox 9"/>
+          <p:cNvSpPr txBox="1"/>
+          <p:nvPr/>
+        </p:nvSpPr>
+        <p:spPr>
+          <a:xfrm>
+            <a:off x="6370167" y="1627632"/>
+            <a:ext cx="5135727" cy="1100328"/>
+          </a:xfrm>
+          <a:prstGeom prst="rect">
+            <a:avLst/>
+          </a:prstGeom>
+          <a:noFill/>
+        </p:spPr>
+        <p:txBody>
+          <a:bodyPr wrap="square" anchor="t" lIns="0" rIns="0" tIns="0" bIns="0">
+            <a:spAutoFit/>
+          </a:bodyPr>
+          <a:lstStyle/>
+          <a:p>
+            <a:pPr>
+              <a:spcAft>
+                <a:spcPts val="800"/>
+              </a:spcAft>
+            </a:pPr>
+            <a:r>
+              <a:rPr sz="1700" b="0">
+                <a:solidFill>
+                  <a:srgbClr val="1C1C1A"/>
+                </a:solidFill>
+                <a:latin typeface="Calibri"/>
+              </a:rPr>
+              <a:t>A leaked handle per run against a limit of about 1024 fails silently for a long time and then fails everywhere at once.</a:t>
+            </a:r>
+          </a:p>
+        </p:txBody>
+      </p:sp>
+      <p:sp>
+        <p:nvSpPr>
           <p:cNvPr id="11" name="Rectangle 10"/>
+          <p:cNvSpPr/>
+          <p:nvPr/>
+        </p:nvSpPr>
+        <p:spPr>
+          <a:xfrm>
+            <a:off x="6370167" y="2855976"/>
+            <a:ext cx="5135727" cy="850899"/>
+          </a:xfrm>
+          <a:prstGeom prst="rect">
+            <a:avLst/>
+          </a:prstGeom>
+          <a:solidFill>
+            <a:srgbClr val="E4ECF7"/>
+          </a:solidFill>
+          <a:ln>
+            <a:noFill/>
+          </a:ln>
+          <a:effectLst/>
+        </p:spPr>
+        <p:style>
+          <a:lnRef idx="1">
+            <a:schemeClr val="accent1"/>
+          </a:lnRef>
+          <a:fillRef idx="3">
+            <a:schemeClr val="accent1"/>
+          </a:fillRef>
+          <a:effectRef idx="2">
+            <a:schemeClr val="accent1"/>
+          </a:effectRef>
+          <a:fontRef idx="minor">
+            <a:schemeClr val="lt1"/>
+          </a:fontRef>
+        </p:style>
+        <p:txBody>
+          <a:bodyPr rtlCol="0" anchor="ctr" wrap="square"/>
+          <a:lstStyle/>
+          <a:p>
+            <a:pPr algn="ctr"/>
+          </a:p>
+        </p:txBody>
+      </p:sp>
+      <p:sp>
+        <p:nvSpPr>
+          <p:cNvPr id="12" name="Rectangle 11"/>
+          <p:cNvSpPr/>
+          <p:nvPr/>
+        </p:nvSpPr>
+        <p:spPr>
+          <a:xfrm>
+            <a:off x="6370167" y="2855976"/>
+            <a:ext cx="50292" cy="850899"/>
+          </a:xfrm>
+          <a:prstGeom prst="rect">
+            <a:avLst/>
+          </a:prstGeom>
+          <a:solidFill>
+            <a:srgbClr val="2B4A7D"/>
+          </a:solidFill>
+          <a:ln>
+            <a:noFill/>
+          </a:ln>
+          <a:effectLst/>
+        </p:spPr>
+        <p:style>
+          <a:lnRef idx="1">
+            <a:schemeClr val="accent1"/>
+          </a:lnRef>
+          <a:fillRef idx="3">
+            <a:schemeClr val="accent1"/>
+          </a:fillRef>
+          <a:effectRef idx="2">
+            <a:schemeClr val="accent1"/>
+          </a:effectRef>
+          <a:fontRef idx="minor">
+            <a:schemeClr val="lt1"/>
+          </a:fontRef>
+        </p:style>
+        <p:txBody>
+          <a:bodyPr rtlCol="0" anchor="ctr" wrap="square"/>
+          <a:lstStyle/>
+          <a:p>
+            <a:pPr algn="ctr"/>
+          </a:p>
+        </p:txBody>
+      </p:sp>
+      <p:sp>
+        <p:nvSpPr>
+          <p:cNvPr id="13" name="TextBox 12"/>
+          <p:cNvSpPr txBox="1"/>
+          <p:nvPr/>
+        </p:nvSpPr>
+        <p:spPr>
+          <a:xfrm>
+            <a:off x="6626199" y="2947416"/>
+            <a:ext cx="4678527" cy="704595"/>
+          </a:xfrm>
+          <a:prstGeom prst="rect">
+            <a:avLst/>
+          </a:prstGeom>
+          <a:noFill/>
+        </p:spPr>
+        <p:txBody>
+          <a:bodyPr wrap="square" anchor="ctr" lIns="0" rIns="0" tIns="0" bIns="0">
+            <a:spAutoFit/>
+          </a:bodyPr>
+          <a:lstStyle/>
+          <a:p>
+            <a:r>
+              <a:rPr sz="1700" b="1">
+                <a:solidFill>
+                  <a:srgbClr val="2B4A7D"/>
+                </a:solidFill>
+                <a:latin typeface="Calibri"/>
+              </a:rPr>
+              <a:t>The mental model. </a:t>
+            </a:r>
+            <a:r>
+              <a:rPr sz="1700" b="0">
+                <a:solidFill>
+                  <a:srgbClr val="1C1C1A"/>
+                </a:solidFill>
+                <a:latin typeface="Calibri"/>
+              </a:rPr>
+              <a:t>with is a promise about the exit, not about the entry.</a:t>
+            </a:r>
+          </a:p>
+        </p:txBody>
+      </p:sp>
+      <p:pic>
+        <p:nvPicPr>
+          <p:cNvPr id="14" name="Picture 13" descr="49a9195884c1bc99.png"/>
+          <p:cNvPicPr>
+            <a:picLocks noChangeAspect="1"/>
+          </p:cNvPicPr>
+          <p:nvPr/>
+        </p:nvPicPr>
+        <p:blipFill>
+          <a:blip r:embed="rId2"/>
+          <a:stretch>
+            <a:fillRect/>
+          </a:stretch>
+        </p:blipFill>
+        <p:spPr>
+          <a:xfrm>
+            <a:off x="7891934" y="3871468"/>
+            <a:ext cx="2092194" cy="2181860"/>
+          </a:xfrm>
+          <a:prstGeom prst="rect">
+            <a:avLst/>
+          </a:prstGeom>
+        </p:spPr>
+      </p:pic>
+      <p:sp>
+        <p:nvSpPr>
+          <p:cNvPr id="15" name="Rectangle 14"/>
           <p:cNvSpPr/>
           <p:nvPr/>
         </p:nvSpPr>
@@ -33550,7 +34082,7 @@
       </p:sp>
       <p:sp>
         <p:nvSpPr>
-          <p:cNvPr id="12" name="TextBox 11"/>
+          <p:cNvPr id="16" name="TextBox 15"/>
           <p:cNvSpPr txBox="1"/>
           <p:nvPr/>
         </p:nvSpPr>
@@ -33565,7 +34097,7 @@
           <a:noFill/>
         </p:spPr>
         <p:txBody>
-          <a:bodyPr wrap="square" anchor="t">
+          <a:bodyPr wrap="square" anchor="t" lIns="0" rIns="0" tIns="0" bIns="0">
             <a:spAutoFit/>
           </a:bodyPr>
           <a:lstStyle/>
@@ -33584,7 +34116,7 @@
       </p:sp>
       <p:sp>
         <p:nvSpPr>
-          <p:cNvPr id="13" name="TextBox 12"/>
+          <p:cNvPr id="17" name="TextBox 16"/>
           <p:cNvSpPr txBox="1"/>
           <p:nvPr/>
         </p:nvSpPr>
@@ -33599,7 +34131,7 @@
           <a:noFill/>
         </p:spPr>
         <p:txBody>
-          <a:bodyPr wrap="square" anchor="t">
+          <a:bodyPr wrap="square" anchor="t" lIns="0" rIns="0" tIns="0" bIns="0">
             <a:spAutoFit/>
           </a:bodyPr>
           <a:lstStyle/>
@@ -33749,7 +34281,7 @@
           <a:noFill/>
         </p:spPr>
         <p:txBody>
-          <a:bodyPr wrap="square" anchor="ctr">
+          <a:bodyPr wrap="square" anchor="ctr" lIns="0" rIns="0" tIns="0" bIns="0">
             <a:spAutoFit/>
           </a:bodyPr>
           <a:lstStyle/>
@@ -33827,7 +34359,7 @@
           <a:noFill/>
         </p:spPr>
         <p:txBody>
-          <a:bodyPr wrap="square" anchor="t">
+          <a:bodyPr wrap="square" anchor="t" lIns="0" rIns="0" tIns="0" bIns="0">
             <a:spAutoFit/>
           </a:bodyPr>
           <a:lstStyle/>
@@ -33974,7 +34506,7 @@
           <a:noFill/>
         </p:spPr>
         <p:txBody>
-          <a:bodyPr wrap="square" anchor="t">
+          <a:bodyPr wrap="square" anchor="t" lIns="0" rIns="0" tIns="0" bIns="0">
             <a:spAutoFit/>
           </a:bodyPr>
           <a:lstStyle/>
@@ -34008,7 +34540,7 @@
           <a:noFill/>
         </p:spPr>
         <p:txBody>
-          <a:bodyPr wrap="square" anchor="t">
+          <a:bodyPr wrap="square" anchor="t" lIns="0" rIns="0" tIns="0" bIns="0">
             <a:spAutoFit/>
           </a:bodyPr>
           <a:lstStyle/>
@@ -34158,7 +34690,7 @@
           <a:noFill/>
         </p:spPr>
         <p:txBody>
-          <a:bodyPr wrap="square" anchor="ctr">
+          <a:bodyPr wrap="square" anchor="ctr" lIns="0" rIns="0" tIns="0" bIns="0">
             <a:spAutoFit/>
           </a:bodyPr>
           <a:lstStyle/>
@@ -34228,7 +34760,7 @@
         <p:spPr>
           <a:xfrm>
             <a:off x="685800" y="1627632"/>
-            <a:ext cx="10820095" cy="965200"/>
+            <a:ext cx="10820095" cy="706628"/>
           </a:xfrm>
           <a:prstGeom prst="rect">
             <a:avLst/>
@@ -34272,7 +34804,7 @@
         <p:spPr>
           <a:xfrm>
             <a:off x="685800" y="1627632"/>
-            <a:ext cx="50292" cy="965200"/>
+            <a:ext cx="50292" cy="706628"/>
           </a:xfrm>
           <a:prstGeom prst="rect">
             <a:avLst/>
@@ -34316,7 +34848,7 @@
         <p:spPr>
           <a:xfrm>
             <a:off x="941832" y="1719072"/>
-            <a:ext cx="10362895" cy="818896"/>
+            <a:ext cx="10362895" cy="560324"/>
           </a:xfrm>
           <a:prstGeom prst="rect">
             <a:avLst/>
@@ -34324,13 +34856,13 @@
           <a:noFill/>
         </p:spPr>
         <p:txBody>
-          <a:bodyPr wrap="square" anchor="ctr">
+          <a:bodyPr wrap="square" anchor="ctr" lIns="0" rIns="0" tIns="0" bIns="0">
             <a:spAutoFit/>
           </a:bodyPr>
           <a:lstStyle/>
           <a:p>
             <a:r>
-              <a:rPr sz="2000" b="1">
+              <a:rPr sz="1300" b="1">
                 <a:solidFill>
                   <a:srgbClr val="2B4A7D"/>
                 </a:solidFill>
@@ -34339,7 +34871,7 @@
               <a:t>The claim. </a:t>
             </a:r>
             <a:r>
-              <a:rPr sz="2000" b="0">
+              <a:rPr sz="1300" b="0">
                 <a:solidFill>
                   <a:srgbClr val="1C1C1A"/>
                 </a:solidFill>
@@ -34359,8 +34891,8 @@
           <p:nvPr/>
         </p:nvGraphicFramePr>
         <p:xfrm>
-          <a:off x="685800" y="2757424"/>
-          <a:ext cx="10820095" cy="1807464"/>
+          <a:off x="685800" y="2498852"/>
+          <a:ext cx="10820094" cy="1243584"/>
         </p:xfrm>
         <a:graphic>
           <a:graphicData uri="http://schemas.openxmlformats.org/drawingml/2006/table">
@@ -34369,17 +34901,17 @@
                 <a:tableStyleId>{2D5ABB26-0587-4C30-8999-92F81FD0307C}</a:tableStyleId>
               </a:tblPr>
               <a:tblGrid>
-                <a:gridCol w="5410047"/>
-                <a:gridCol w="5410048"/>
+                <a:gridCol w="2464727"/>
+                <a:gridCol w="8355367"/>
               </a:tblGrid>
-              <a:tr h="387096">
+              <a:tr h="310896">
                 <a:tc>
                   <a:txBody>
                     <a:bodyPr/>
                     <a:lstStyle/>
                     <a:p>
                       <a:r>
-                        <a:rPr sz="1600" b="1">
+                        <a:rPr sz="1000" b="1">
                           <a:solidFill>
                             <a:srgbClr val="FFFFFF"/>
                           </a:solidFill>
@@ -34401,7 +34933,7 @@
                     <a:lstStyle/>
                     <a:p>
                       <a:r>
-                        <a:rPr sz="1600" b="1">
+                        <a:rPr sz="1000" b="1">
                           <a:solidFill>
                             <a:srgbClr val="FFFFFF"/>
                           </a:solidFill>
@@ -34418,14 +34950,14 @@
                   </a:tcPr>
                 </a:tc>
               </a:tr>
-              <a:tr h="387096">
+              <a:tr h="310896">
                 <a:tc>
                   <a:txBody>
                     <a:bodyPr/>
                     <a:lstStyle/>
                     <a:p>
                       <a:r>
-                        <a:rPr sz="1500" b="0">
+                        <a:rPr sz="900" b="0">
                           <a:solidFill>
                             <a:srgbClr val="1C1C1A"/>
                           </a:solidFill>
@@ -34447,7 +34979,7 @@
                     <a:lstStyle/>
                     <a:p>
                       <a:r>
-                        <a:rPr sz="1500" b="0">
+                        <a:rPr sz="900" b="0">
                           <a:solidFill>
                             <a:srgbClr val="1C1C1A"/>
                           </a:solidFill>
@@ -34464,14 +34996,14 @@
                   </a:tcPr>
                 </a:tc>
               </a:tr>
-              <a:tr h="387096">
+              <a:tr h="310896">
                 <a:tc>
                   <a:txBody>
                     <a:bodyPr/>
                     <a:lstStyle/>
                     <a:p>
                       <a:r>
-                        <a:rPr sz="1500" b="0">
+                        <a:rPr sz="900" b="0">
                           <a:solidFill>
                             <a:srgbClr val="1C1C1A"/>
                           </a:solidFill>
@@ -34493,7 +35025,7 @@
                     <a:lstStyle/>
                     <a:p>
                       <a:r>
-                        <a:rPr sz="1500" b="0">
+                        <a:rPr sz="900" b="0">
                           <a:solidFill>
                             <a:srgbClr val="1C1C1A"/>
                           </a:solidFill>
@@ -34510,14 +35042,14 @@
                   </a:tcPr>
                 </a:tc>
               </a:tr>
-              <a:tr h="646176">
+              <a:tr h="310896">
                 <a:tc>
                   <a:txBody>
                     <a:bodyPr/>
                     <a:lstStyle/>
                     <a:p>
                       <a:r>
-                        <a:rPr sz="1500" b="0">
+                        <a:rPr sz="900" b="0">
                           <a:solidFill>
                             <a:srgbClr val="1C1C1A"/>
                           </a:solidFill>
@@ -34539,7 +35071,7 @@
                     <a:lstStyle/>
                     <a:p>
                       <a:r>
-                        <a:rPr sz="1500" b="0">
+                        <a:rPr sz="900" b="0">
                           <a:solidFill>
                             <a:srgbClr val="1C1C1A"/>
                           </a:solidFill>
@@ -34568,8 +35100,8 @@
         </p:nvSpPr>
         <p:spPr>
           <a:xfrm>
-            <a:off x="685800" y="4820920"/>
-            <a:ext cx="10820095" cy="910336"/>
+            <a:off x="685800" y="3998468"/>
+            <a:ext cx="10820095" cy="668528"/>
           </a:xfrm>
           <a:prstGeom prst="rect">
             <a:avLst/>
@@ -34577,18 +35109,18 @@
           <a:noFill/>
         </p:spPr>
         <p:txBody>
-          <a:bodyPr wrap="square" anchor="t">
+          <a:bodyPr wrap="square" anchor="t" lIns="0" rIns="0" tIns="0" bIns="0">
             <a:spAutoFit/>
           </a:bodyPr>
           <a:lstStyle/>
           <a:p>
             <a:pPr>
               <a:spcAft>
-                <a:spcPts val="900"/>
+                <a:spcPts val="600"/>
               </a:spcAft>
             </a:pPr>
             <a:r>
-              <a:rPr sz="2000" b="0">
+              <a:rPr sz="1300" b="0">
                 <a:solidFill>
                   <a:srgbClr val="1C1C1A"/>
                 </a:solidFill>
@@ -34602,6 +35134,161 @@
       <p:sp>
         <p:nvSpPr>
           <p:cNvPr id="11" name="Rectangle 10"/>
+          <p:cNvSpPr/>
+          <p:nvPr/>
+        </p:nvSpPr>
+        <p:spPr>
+          <a:xfrm>
+            <a:off x="685800" y="4795012"/>
+            <a:ext cx="10820095" cy="472186"/>
+          </a:xfrm>
+          <a:prstGeom prst="rect">
+            <a:avLst/>
+          </a:prstGeom>
+          <a:solidFill>
+            <a:srgbClr val="E4ECF7"/>
+          </a:solidFill>
+          <a:ln>
+            <a:noFill/>
+          </a:ln>
+          <a:effectLst/>
+        </p:spPr>
+        <p:style>
+          <a:lnRef idx="1">
+            <a:schemeClr val="accent1"/>
+          </a:lnRef>
+          <a:fillRef idx="3">
+            <a:schemeClr val="accent1"/>
+          </a:fillRef>
+          <a:effectRef idx="2">
+            <a:schemeClr val="accent1"/>
+          </a:effectRef>
+          <a:fontRef idx="minor">
+            <a:schemeClr val="lt1"/>
+          </a:fontRef>
+        </p:style>
+        <p:txBody>
+          <a:bodyPr rtlCol="0" anchor="ctr" wrap="square"/>
+          <a:lstStyle/>
+          <a:p>
+            <a:pPr algn="ctr"/>
+          </a:p>
+        </p:txBody>
+      </p:sp>
+      <p:sp>
+        <p:nvSpPr>
+          <p:cNvPr id="12" name="Rectangle 11"/>
+          <p:cNvSpPr/>
+          <p:nvPr/>
+        </p:nvSpPr>
+        <p:spPr>
+          <a:xfrm>
+            <a:off x="685800" y="4795012"/>
+            <a:ext cx="50292" cy="472186"/>
+          </a:xfrm>
+          <a:prstGeom prst="rect">
+            <a:avLst/>
+          </a:prstGeom>
+          <a:solidFill>
+            <a:srgbClr val="2B4A7D"/>
+          </a:solidFill>
+          <a:ln>
+            <a:noFill/>
+          </a:ln>
+          <a:effectLst/>
+        </p:spPr>
+        <p:style>
+          <a:lnRef idx="1">
+            <a:schemeClr val="accent1"/>
+          </a:lnRef>
+          <a:fillRef idx="3">
+            <a:schemeClr val="accent1"/>
+          </a:fillRef>
+          <a:effectRef idx="2">
+            <a:schemeClr val="accent1"/>
+          </a:effectRef>
+          <a:fontRef idx="minor">
+            <a:schemeClr val="lt1"/>
+          </a:fontRef>
+        </p:style>
+        <p:txBody>
+          <a:bodyPr rtlCol="0" anchor="ctr" wrap="square"/>
+          <a:lstStyle/>
+          <a:p>
+            <a:pPr algn="ctr"/>
+          </a:p>
+        </p:txBody>
+      </p:sp>
+      <p:sp>
+        <p:nvSpPr>
+          <p:cNvPr id="13" name="TextBox 12"/>
+          <p:cNvSpPr txBox="1"/>
+          <p:nvPr/>
+        </p:nvSpPr>
+        <p:spPr>
+          <a:xfrm>
+            <a:off x="941832" y="4886452"/>
+            <a:ext cx="10362895" cy="325882"/>
+          </a:xfrm>
+          <a:prstGeom prst="rect">
+            <a:avLst/>
+          </a:prstGeom>
+          <a:noFill/>
+        </p:spPr>
+        <p:txBody>
+          <a:bodyPr wrap="square" anchor="ctr" lIns="0" rIns="0" tIns="0" bIns="0">
+            <a:spAutoFit/>
+          </a:bodyPr>
+          <a:lstStyle/>
+          <a:p>
+            <a:r>
+              <a:rPr sz="1300" b="1">
+                <a:solidFill>
+                  <a:srgbClr val="2B4A7D"/>
+                </a:solidFill>
+                <a:latin typeface="Calibri"/>
+              </a:rPr>
+              <a:t>The mental model. </a:t>
+            </a:r>
+            <a:r>
+              <a:rPr sz="1300" b="0">
+                <a:solidFill>
+                  <a:srgbClr val="1C1C1A"/>
+                </a:solidFill>
+                <a:latin typeface="Calibri"/>
+              </a:rPr>
+              <a:t>Finished means somebody could reconstruct your count from your files without asking you.</a:t>
+            </a:r>
+          </a:p>
+        </p:txBody>
+      </p:sp>
+      <p:pic>
+        <p:nvPicPr>
+          <p:cNvPr id="14" name="Picture 13" descr="fed3029ccc90a417.png"/>
+          <p:cNvPicPr>
+            <a:picLocks noChangeAspect="1"/>
+          </p:cNvPicPr>
+          <p:nvPr/>
+        </p:nvPicPr>
+        <p:blipFill>
+          <a:blip r:embed="rId2"/>
+          <a:stretch>
+            <a:fillRect/>
+          </a:stretch>
+        </p:blipFill>
+        <p:spPr>
+          <a:xfrm>
+            <a:off x="4076852" y="5431790"/>
+            <a:ext cx="4037990" cy="1097280"/>
+          </a:xfrm>
+          <a:prstGeom prst="rect">
+            <a:avLst/>
+          </a:prstGeom>
+        </p:spPr>
+      </p:pic>
+      <p:sp>
+        <p:nvSpPr>
+          <p:cNvPr id="15" name="Rectangle 14"/>
           <p:cNvSpPr/>
           <p:nvPr/>
         </p:nvSpPr>
@@ -34645,7 +35332,7 @@
       </p:sp>
       <p:sp>
         <p:nvSpPr>
-          <p:cNvPr id="12" name="TextBox 11"/>
+          <p:cNvPr id="16" name="TextBox 15"/>
           <p:cNvSpPr txBox="1"/>
           <p:nvPr/>
         </p:nvSpPr>
@@ -34660,7 +35347,7 @@
           <a:noFill/>
         </p:spPr>
         <p:txBody>
-          <a:bodyPr wrap="square" anchor="t">
+          <a:bodyPr wrap="square" anchor="t" lIns="0" rIns="0" tIns="0" bIns="0">
             <a:spAutoFit/>
           </a:bodyPr>
           <a:lstStyle/>
@@ -34679,7 +35366,7 @@
       </p:sp>
       <p:sp>
         <p:nvSpPr>
-          <p:cNvPr id="13" name="TextBox 12"/>
+          <p:cNvPr id="17" name="TextBox 16"/>
           <p:cNvSpPr txBox="1"/>
           <p:nvPr/>
         </p:nvSpPr>
@@ -34694,7 +35381,7 @@
           <a:noFill/>
         </p:spPr>
         <p:txBody>
-          <a:bodyPr wrap="square" anchor="t">
+          <a:bodyPr wrap="square" anchor="t" lIns="0" rIns="0" tIns="0" bIns="0">
             <a:spAutoFit/>
           </a:bodyPr>
           <a:lstStyle/>
@@ -34844,7 +35531,7 @@
           <a:noFill/>
         </p:spPr>
         <p:txBody>
-          <a:bodyPr wrap="square" anchor="ctr">
+          <a:bodyPr wrap="square" anchor="ctr" lIns="0" rIns="0" tIns="0" bIns="0">
             <a:spAutoFit/>
           </a:bodyPr>
           <a:lstStyle/>
@@ -34922,7 +35609,7 @@
           <a:noFill/>
         </p:spPr>
         <p:txBody>
-          <a:bodyPr wrap="square" anchor="t">
+          <a:bodyPr wrap="square" anchor="t" lIns="0" rIns="0" tIns="0" bIns="0">
             <a:spAutoFit/>
           </a:bodyPr>
           <a:lstStyle/>
@@ -35069,7 +35756,7 @@
           <a:noFill/>
         </p:spPr>
         <p:txBody>
-          <a:bodyPr wrap="square" anchor="t">
+          <a:bodyPr wrap="square" anchor="t" lIns="0" rIns="0" tIns="0" bIns="0">
             <a:spAutoFit/>
           </a:bodyPr>
           <a:lstStyle/>
@@ -35103,7 +35790,7 @@
           <a:noFill/>
         </p:spPr>
         <p:txBody>
-          <a:bodyPr wrap="square" anchor="t">
+          <a:bodyPr wrap="square" anchor="t" lIns="0" rIns="0" tIns="0" bIns="0">
             <a:spAutoFit/>
           </a:bodyPr>
           <a:lstStyle/>
@@ -35253,7 +35940,7 @@
           <a:noFill/>
         </p:spPr>
         <p:txBody>
-          <a:bodyPr wrap="square" anchor="ctr">
+          <a:bodyPr wrap="square" anchor="ctr" lIns="0" rIns="0" tIns="0" bIns="0">
             <a:spAutoFit/>
           </a:bodyPr>
           <a:lstStyle/>
@@ -35323,7 +36010,7 @@
         <p:spPr>
           <a:xfrm>
             <a:off x="685800" y="1627632"/>
-            <a:ext cx="10820095" cy="965200"/>
+            <a:ext cx="5135727" cy="1157477"/>
           </a:xfrm>
           <a:prstGeom prst="rect">
             <a:avLst/>
@@ -35367,7 +36054,7 @@
         <p:spPr>
           <a:xfrm>
             <a:off x="685800" y="1627632"/>
-            <a:ext cx="50292" cy="965200"/>
+            <a:ext cx="50292" cy="1157477"/>
           </a:xfrm>
           <a:prstGeom prst="rect">
             <a:avLst/>
@@ -35411,7 +36098,7 @@
         <p:spPr>
           <a:xfrm>
             <a:off x="941832" y="1719072"/>
-            <a:ext cx="10362895" cy="818896"/>
+            <a:ext cx="4678527" cy="1011173"/>
           </a:xfrm>
           <a:prstGeom prst="rect">
             <a:avLst/>
@@ -35419,13 +36106,13 @@
           <a:noFill/>
         </p:spPr>
         <p:txBody>
-          <a:bodyPr wrap="square" anchor="ctr">
+          <a:bodyPr wrap="square" anchor="ctr" lIns="0" rIns="0" tIns="0" bIns="0">
             <a:spAutoFit/>
           </a:bodyPr>
           <a:lstStyle/>
           <a:p>
             <a:r>
-              <a:rPr sz="2000" b="1">
+              <a:rPr sz="1700" b="1">
                 <a:solidFill>
                   <a:srgbClr val="2B4A7D"/>
                 </a:solidFill>
@@ -35434,7 +36121,7 @@
               <a:t>The claim. </a:t>
             </a:r>
             <a:r>
-              <a:rPr sz="2000" b="0">
+              <a:rPr sz="1700" b="0">
                 <a:solidFill>
                   <a:srgbClr val="1C1C1A"/>
                 </a:solidFill>
@@ -35454,8 +36141,8 @@
           <p:nvPr/>
         </p:nvGraphicFramePr>
         <p:xfrm>
-          <a:off x="685800" y="2757424"/>
-          <a:ext cx="10820095" cy="2066544"/>
+          <a:off x="685800" y="2949702"/>
+          <a:ext cx="5135726" cy="1499616"/>
         </p:xfrm>
         <a:graphic>
           <a:graphicData uri="http://schemas.openxmlformats.org/drawingml/2006/table">
@@ -35464,17 +36151,17 @@
                 <a:tableStyleId>{2D5ABB26-0587-4C30-8999-92F81FD0307C}</a:tableStyleId>
               </a:tblPr>
               <a:tblGrid>
-                <a:gridCol w="5410047"/>
-                <a:gridCol w="5410048"/>
+                <a:gridCol w="2145736"/>
+                <a:gridCol w="2989990"/>
               </a:tblGrid>
-              <a:tr h="387096">
+              <a:tr h="310896">
                 <a:tc>
                   <a:txBody>
                     <a:bodyPr/>
                     <a:lstStyle/>
                     <a:p>
                       <a:r>
-                        <a:rPr sz="1600" b="1">
+                        <a:rPr sz="1000" b="1">
                           <a:solidFill>
                             <a:srgbClr val="FFFFFF"/>
                           </a:solidFill>
@@ -35496,7 +36183,7 @@
                     <a:lstStyle/>
                     <a:p>
                       <a:r>
-                        <a:rPr sz="1600" b="1">
+                        <a:rPr sz="1000" b="1">
                           <a:solidFill>
                             <a:srgbClr val="FFFFFF"/>
                           </a:solidFill>
@@ -35513,14 +36200,14 @@
                   </a:tcPr>
                 </a:tc>
               </a:tr>
-              <a:tr h="646176">
+              <a:tr h="438912">
                 <a:tc>
                   <a:txBody>
                     <a:bodyPr/>
                     <a:lstStyle/>
                     <a:p>
                       <a:r>
-                        <a:rPr sz="1500" b="0">
+                        <a:rPr sz="900" b="0">
                           <a:solidFill>
                             <a:srgbClr val="1C1C1A"/>
                           </a:solidFill>
@@ -35542,7 +36229,7 @@
                     <a:lstStyle/>
                     <a:p>
                       <a:r>
-                        <a:rPr sz="1500" b="0">
+                        <a:rPr sz="900" b="0">
                           <a:solidFill>
                             <a:srgbClr val="1C1C1A"/>
                           </a:solidFill>
@@ -35559,14 +36246,14 @@
                   </a:tcPr>
                 </a:tc>
               </a:tr>
-              <a:tr h="646176">
+              <a:tr h="438912">
                 <a:tc>
                   <a:txBody>
                     <a:bodyPr/>
                     <a:lstStyle/>
                     <a:p>
                       <a:r>
-                        <a:rPr sz="1500" b="0">
+                        <a:rPr sz="900" b="0">
                           <a:solidFill>
                             <a:srgbClr val="1C1C1A"/>
                           </a:solidFill>
@@ -35588,7 +36275,7 @@
                     <a:lstStyle/>
                     <a:p>
                       <a:r>
-                        <a:rPr sz="1500" b="0">
+                        <a:rPr sz="900" b="0">
                           <a:solidFill>
                             <a:srgbClr val="1C1C1A"/>
                           </a:solidFill>
@@ -35605,14 +36292,14 @@
                   </a:tcPr>
                 </a:tc>
               </a:tr>
-              <a:tr h="387096">
+              <a:tr h="310896">
                 <a:tc>
                   <a:txBody>
                     <a:bodyPr/>
                     <a:lstStyle/>
                     <a:p>
                       <a:r>
-                        <a:rPr sz="1500" b="0">
+                        <a:rPr sz="900" b="0">
                           <a:solidFill>
                             <a:srgbClr val="1C1C1A"/>
                           </a:solidFill>
@@ -35634,7 +36321,7 @@
                     <a:lstStyle/>
                     <a:p>
                       <a:r>
-                        <a:rPr sz="1500" b="0">
+                        <a:rPr sz="900" b="0">
                           <a:solidFill>
                             <a:srgbClr val="1C1C1A"/>
                           </a:solidFill>
@@ -35663,8 +36350,8 @@
         </p:nvSpPr>
         <p:spPr>
           <a:xfrm>
-            <a:off x="685800" y="5080000"/>
-            <a:ext cx="10820095" cy="910336"/>
+            <a:off x="6370167" y="1627632"/>
+            <a:ext cx="5135727" cy="1393952"/>
           </a:xfrm>
           <a:prstGeom prst="rect">
             <a:avLst/>
@@ -35672,18 +36359,18 @@
           <a:noFill/>
         </p:spPr>
         <p:txBody>
-          <a:bodyPr wrap="square" anchor="t">
+          <a:bodyPr wrap="square" anchor="t" lIns="0" rIns="0" tIns="0" bIns="0">
             <a:spAutoFit/>
           </a:bodyPr>
           <a:lstStyle/>
           <a:p>
             <a:pPr>
               <a:spcAft>
-                <a:spcPts val="900"/>
+                <a:spcPts val="800"/>
               </a:spcAft>
             </a:pPr>
             <a:r>
-              <a:rPr sz="2000" b="0">
+              <a:rPr sz="1700" b="0">
                 <a:solidFill>
                   <a:srgbClr val="1C1C1A"/>
                 </a:solidFill>
@@ -35697,6 +36384,161 @@
       <p:sp>
         <p:nvSpPr>
           <p:cNvPr id="11" name="Rectangle 10"/>
+          <p:cNvSpPr/>
+          <p:nvPr/>
+        </p:nvSpPr>
+        <p:spPr>
+          <a:xfrm>
+            <a:off x="6370167" y="3149600"/>
+            <a:ext cx="5135727" cy="1157477"/>
+          </a:xfrm>
+          <a:prstGeom prst="rect">
+            <a:avLst/>
+          </a:prstGeom>
+          <a:solidFill>
+            <a:srgbClr val="E4ECF7"/>
+          </a:solidFill>
+          <a:ln>
+            <a:noFill/>
+          </a:ln>
+          <a:effectLst/>
+        </p:spPr>
+        <p:style>
+          <a:lnRef idx="1">
+            <a:schemeClr val="accent1"/>
+          </a:lnRef>
+          <a:fillRef idx="3">
+            <a:schemeClr val="accent1"/>
+          </a:fillRef>
+          <a:effectRef idx="2">
+            <a:schemeClr val="accent1"/>
+          </a:effectRef>
+          <a:fontRef idx="minor">
+            <a:schemeClr val="lt1"/>
+          </a:fontRef>
+        </p:style>
+        <p:txBody>
+          <a:bodyPr rtlCol="0" anchor="ctr" wrap="square"/>
+          <a:lstStyle/>
+          <a:p>
+            <a:pPr algn="ctr"/>
+          </a:p>
+        </p:txBody>
+      </p:sp>
+      <p:sp>
+        <p:nvSpPr>
+          <p:cNvPr id="12" name="Rectangle 11"/>
+          <p:cNvSpPr/>
+          <p:nvPr/>
+        </p:nvSpPr>
+        <p:spPr>
+          <a:xfrm>
+            <a:off x="6370167" y="3149600"/>
+            <a:ext cx="50292" cy="1157477"/>
+          </a:xfrm>
+          <a:prstGeom prst="rect">
+            <a:avLst/>
+          </a:prstGeom>
+          <a:solidFill>
+            <a:srgbClr val="2B4A7D"/>
+          </a:solidFill>
+          <a:ln>
+            <a:noFill/>
+          </a:ln>
+          <a:effectLst/>
+        </p:spPr>
+        <p:style>
+          <a:lnRef idx="1">
+            <a:schemeClr val="accent1"/>
+          </a:lnRef>
+          <a:fillRef idx="3">
+            <a:schemeClr val="accent1"/>
+          </a:fillRef>
+          <a:effectRef idx="2">
+            <a:schemeClr val="accent1"/>
+          </a:effectRef>
+          <a:fontRef idx="minor">
+            <a:schemeClr val="lt1"/>
+          </a:fontRef>
+        </p:style>
+        <p:txBody>
+          <a:bodyPr rtlCol="0" anchor="ctr" wrap="square"/>
+          <a:lstStyle/>
+          <a:p>
+            <a:pPr algn="ctr"/>
+          </a:p>
+        </p:txBody>
+      </p:sp>
+      <p:sp>
+        <p:nvSpPr>
+          <p:cNvPr id="13" name="TextBox 12"/>
+          <p:cNvSpPr txBox="1"/>
+          <p:nvPr/>
+        </p:nvSpPr>
+        <p:spPr>
+          <a:xfrm>
+            <a:off x="6626199" y="3241040"/>
+            <a:ext cx="4678527" cy="1011173"/>
+          </a:xfrm>
+          <a:prstGeom prst="rect">
+            <a:avLst/>
+          </a:prstGeom>
+          <a:noFill/>
+        </p:spPr>
+        <p:txBody>
+          <a:bodyPr wrap="square" anchor="ctr" lIns="0" rIns="0" tIns="0" bIns="0">
+            <a:spAutoFit/>
+          </a:bodyPr>
+          <a:lstStyle/>
+          <a:p>
+            <a:r>
+              <a:rPr sz="1700" b="1">
+                <a:solidFill>
+                  <a:srgbClr val="2B4A7D"/>
+                </a:solidFill>
+                <a:latin typeface="Calibri"/>
+              </a:rPr>
+              <a:t>The mental model. </a:t>
+            </a:r>
+            <a:r>
+              <a:rPr sz="1700" b="0">
+                <a:solidFill>
+                  <a:srgbClr val="1C1C1A"/>
+                </a:solidFill>
+                <a:latin typeface="Calibri"/>
+              </a:rPr>
+              <a:t>The header row is part of the contract, so read by name and let a rename break loudly.</a:t>
+            </a:r>
+          </a:p>
+        </p:txBody>
+      </p:sp>
+      <p:pic>
+        <p:nvPicPr>
+          <p:cNvPr id="14" name="Picture 13" descr="76d36ec8aa163f72.png"/>
+          <p:cNvPicPr>
+            <a:picLocks noChangeAspect="1"/>
+          </p:cNvPicPr>
+          <p:nvPr/>
+        </p:nvPicPr>
+        <p:blipFill>
+          <a:blip r:embed="rId2"/>
+          <a:stretch>
+            <a:fillRect/>
+          </a:stretch>
+        </p:blipFill>
+        <p:spPr>
+          <a:xfrm>
+            <a:off x="6977965" y="4471670"/>
+            <a:ext cx="3920130" cy="1581658"/>
+          </a:xfrm>
+          <a:prstGeom prst="rect">
+            <a:avLst/>
+          </a:prstGeom>
+        </p:spPr>
+      </p:pic>
+      <p:sp>
+        <p:nvSpPr>
+          <p:cNvPr id="15" name="Rectangle 14"/>
           <p:cNvSpPr/>
           <p:nvPr/>
         </p:nvSpPr>
@@ -35740,7 +36582,7 @@
       </p:sp>
       <p:sp>
         <p:nvSpPr>
-          <p:cNvPr id="12" name="TextBox 11"/>
+          <p:cNvPr id="16" name="TextBox 15"/>
           <p:cNvSpPr txBox="1"/>
           <p:nvPr/>
         </p:nvSpPr>
@@ -35755,7 +36597,7 @@
           <a:noFill/>
         </p:spPr>
         <p:txBody>
-          <a:bodyPr wrap="square" anchor="t">
+          <a:bodyPr wrap="square" anchor="t" lIns="0" rIns="0" tIns="0" bIns="0">
             <a:spAutoFit/>
           </a:bodyPr>
           <a:lstStyle/>
@@ -35774,7 +36616,7 @@
       </p:sp>
       <p:sp>
         <p:nvSpPr>
-          <p:cNvPr id="13" name="TextBox 12"/>
+          <p:cNvPr id="17" name="TextBox 16"/>
           <p:cNvSpPr txBox="1"/>
           <p:nvPr/>
         </p:nvSpPr>
@@ -35789,7 +36631,7 @@
           <a:noFill/>
         </p:spPr>
         <p:txBody>
-          <a:bodyPr wrap="square" anchor="t">
+          <a:bodyPr wrap="square" anchor="t" lIns="0" rIns="0" tIns="0" bIns="0">
             <a:spAutoFit/>
           </a:bodyPr>
           <a:lstStyle/>
@@ -35939,7 +36781,7 @@
           <a:noFill/>
         </p:spPr>
         <p:txBody>
-          <a:bodyPr wrap="square" anchor="ctr">
+          <a:bodyPr wrap="square" anchor="ctr" lIns="0" rIns="0" tIns="0" bIns="0">
             <a:spAutoFit/>
           </a:bodyPr>
           <a:lstStyle/>
@@ -36000,9 +36842,80 @@
           </a:p>
         </p:txBody>
       </p:sp>
+      <p:sp>
+        <p:nvSpPr>
+          <p:cNvPr id="6" name="TextBox 5"/>
+          <p:cNvSpPr txBox="1"/>
+          <p:nvPr/>
+        </p:nvSpPr>
+        <p:spPr>
+          <a:xfrm>
+            <a:off x="685800" y="1627632"/>
+            <a:ext cx="10820095" cy="1820672"/>
+          </a:xfrm>
+          <a:prstGeom prst="rect">
+            <a:avLst/>
+          </a:prstGeom>
+          <a:noFill/>
+        </p:spPr>
+        <p:txBody>
+          <a:bodyPr wrap="square" anchor="t" lIns="0" rIns="0" tIns="0" bIns="0">
+            <a:spAutoFit/>
+          </a:bodyPr>
+          <a:lstStyle/>
+          <a:p>
+            <a:pPr>
+              <a:spcAft>
+                <a:spcPts val="900"/>
+              </a:spcAft>
+            </a:pPr>
+            <a:r>
+              <a:rPr sz="2000" b="0">
+                <a:solidFill>
+                  <a:srgbClr val="1C1C1A"/>
+                </a:solidFill>
+                <a:latin typeface="Calibri"/>
+              </a:rPr>
+              <a:t>A file format is an agreement about structure.</a:t>
+            </a:r>
+          </a:p>
+          <a:p>
+            <a:pPr>
+              <a:spcAft>
+                <a:spcPts val="900"/>
+              </a:spcAft>
+            </a:pPr>
+            <a:r>
+              <a:rPr sz="2000" b="0">
+                <a:solidFill>
+                  <a:srgbClr val="1C1C1A"/>
+                </a:solidFill>
+                <a:latin typeface="Calibri"/>
+              </a:rPr>
+              <a:t>CSV agrees: one row per record, one comma between fields, the first row names the fields.</a:t>
+            </a:r>
+          </a:p>
+          <a:p>
+            <a:pPr>
+              <a:spcAft>
+                <a:spcPts val="900"/>
+              </a:spcAft>
+            </a:pPr>
+            <a:r>
+              <a:rPr sz="2000" b="0">
+                <a:solidFill>
+                  <a:srgbClr val="1C1C1A"/>
+                </a:solidFill>
+                <a:latin typeface="Calibri"/>
+              </a:rPr>
+              <a:t>That is the entire agreement. Nothing in it mentions types.</a:t>
+            </a:r>
+          </a:p>
+        </p:txBody>
+      </p:sp>
       <p:pic>
         <p:nvPicPr>
-          <p:cNvPr id="6" name="Picture 5" descr="52c95281222b5bb8.png"/>
+          <p:cNvPr id="7" name="Picture 6" descr="a7085ca249fb2d6e.png"/>
           <p:cNvPicPr>
             <a:picLocks noChangeAspect="1"/>
           </p:cNvPicPr>
@@ -36016,85 +36929,14 @@
         </p:blipFill>
         <p:spPr>
           <a:xfrm>
-            <a:off x="685800" y="2496503"/>
-            <a:ext cx="4652640" cy="2687952"/>
+            <a:off x="4038263" y="3675887"/>
+            <a:ext cx="4115167" cy="2377440"/>
           </a:xfrm>
           <a:prstGeom prst="rect">
             <a:avLst/>
           </a:prstGeom>
         </p:spPr>
       </p:pic>
-      <p:sp>
-        <p:nvSpPr>
-          <p:cNvPr id="7" name="TextBox 6"/>
-          <p:cNvSpPr txBox="1"/>
-          <p:nvPr/>
-        </p:nvSpPr>
-        <p:spPr>
-          <a:xfrm>
-            <a:off x="5771244" y="2757424"/>
-            <a:ext cx="5734650" cy="2166112"/>
-          </a:xfrm>
-          <a:prstGeom prst="rect">
-            <a:avLst/>
-          </a:prstGeom>
-          <a:noFill/>
-        </p:spPr>
-        <p:txBody>
-          <a:bodyPr wrap="square" anchor="t">
-            <a:spAutoFit/>
-          </a:bodyPr>
-          <a:lstStyle/>
-          <a:p>
-            <a:pPr>
-              <a:spcAft>
-                <a:spcPts val="900"/>
-              </a:spcAft>
-            </a:pPr>
-            <a:r>
-              <a:rPr sz="2000" b="0">
-                <a:solidFill>
-                  <a:srgbClr val="1C1C1A"/>
-                </a:solidFill>
-                <a:latin typeface="Calibri"/>
-              </a:rPr>
-              <a:t>A file format is an agreement about structure.</a:t>
-            </a:r>
-          </a:p>
-          <a:p>
-            <a:pPr>
-              <a:spcAft>
-                <a:spcPts val="900"/>
-              </a:spcAft>
-            </a:pPr>
-            <a:r>
-              <a:rPr sz="2000" b="0">
-                <a:solidFill>
-                  <a:srgbClr val="1C1C1A"/>
-                </a:solidFill>
-                <a:latin typeface="Calibri"/>
-              </a:rPr>
-              <a:t>CSV agrees: one row per record, one comma between fields, the first row names the fields.</a:t>
-            </a:r>
-          </a:p>
-          <a:p>
-            <a:pPr>
-              <a:spcAft>
-                <a:spcPts val="900"/>
-              </a:spcAft>
-            </a:pPr>
-            <a:r>
-              <a:rPr sz="2000" b="0">
-                <a:solidFill>
-                  <a:srgbClr val="1C1C1A"/>
-                </a:solidFill>
-                <a:latin typeface="Calibri"/>
-              </a:rPr>
-              <a:t>That is the entire agreement. Nothing in it mentions types.</a:t>
-            </a:r>
-          </a:p>
-        </p:txBody>
-      </p:sp>
       <p:sp>
         <p:nvSpPr>
           <p:cNvPr id="8" name="Rectangle 7"/>
@@ -36156,7 +36998,7 @@
           <a:noFill/>
         </p:spPr>
         <p:txBody>
-          <a:bodyPr wrap="square" anchor="t">
+          <a:bodyPr wrap="square" anchor="t" lIns="0" rIns="0" tIns="0" bIns="0">
             <a:spAutoFit/>
           </a:bodyPr>
           <a:lstStyle/>
@@ -36190,7 +37032,7 @@
           <a:noFill/>
         </p:spPr>
         <p:txBody>
-          <a:bodyPr wrap="square" anchor="t">
+          <a:bodyPr wrap="square" anchor="t" lIns="0" rIns="0" tIns="0" bIns="0">
             <a:spAutoFit/>
           </a:bodyPr>
           <a:lstStyle/>
@@ -36340,7 +37182,7 @@
           <a:noFill/>
         </p:spPr>
         <p:txBody>
-          <a:bodyPr wrap="square" anchor="ctr">
+          <a:bodyPr wrap="square" anchor="ctr" lIns="0" rIns="0" tIns="0" bIns="0">
             <a:spAutoFit/>
           </a:bodyPr>
           <a:lstStyle/>
@@ -36418,7 +37260,7 @@
           <a:noFill/>
         </p:spPr>
         <p:txBody>
-          <a:bodyPr wrap="square" anchor="t">
+          <a:bodyPr wrap="square" anchor="t" lIns="0" rIns="0" tIns="0" bIns="0">
             <a:spAutoFit/>
           </a:bodyPr>
           <a:lstStyle/>
@@ -36501,7 +37343,7 @@
           <a:noFill/>
         </p:spPr>
         <p:txBody>
-          <a:bodyPr wrap="square" anchor="t">
+          <a:bodyPr wrap="square" anchor="t" lIns="0" rIns="0" tIns="0" bIns="0">
             <a:spAutoFit/>
           </a:bodyPr>
           <a:lstStyle/>
@@ -36535,7 +37377,7 @@
           <a:noFill/>
         </p:spPr>
         <p:txBody>
-          <a:bodyPr wrap="square" anchor="t">
+          <a:bodyPr wrap="square" anchor="t" lIns="0" rIns="0" tIns="0" bIns="0">
             <a:spAutoFit/>
           </a:bodyPr>
           <a:lstStyle/>
@@ -36685,7 +37527,7 @@
           <a:noFill/>
         </p:spPr>
         <p:txBody>
-          <a:bodyPr wrap="square" anchor="ctr">
+          <a:bodyPr wrap="square" anchor="ctr" lIns="0" rIns="0" tIns="0" bIns="0">
             <a:spAutoFit/>
           </a:bodyPr>
           <a:lstStyle/>
@@ -36763,7 +37605,7 @@
           <a:noFill/>
         </p:spPr>
         <p:txBody>
-          <a:bodyPr wrap="square" anchor="t">
+          <a:bodyPr wrap="square" anchor="t" lIns="0" rIns="0" tIns="0" bIns="0">
             <a:spAutoFit/>
           </a:bodyPr>
           <a:lstStyle/>
@@ -36862,7 +37704,7 @@
           <a:noFill/>
         </p:spPr>
         <p:txBody>
-          <a:bodyPr wrap="square" anchor="t">
+          <a:bodyPr wrap="square" anchor="t" lIns="0" rIns="0" tIns="0" bIns="0">
             <a:spAutoFit/>
           </a:bodyPr>
           <a:lstStyle/>
@@ -36896,7 +37738,7 @@
           <a:noFill/>
         </p:spPr>
         <p:txBody>
-          <a:bodyPr wrap="square" anchor="t">
+          <a:bodyPr wrap="square" anchor="t" lIns="0" rIns="0" tIns="0" bIns="0">
             <a:spAutoFit/>
           </a:bodyPr>
           <a:lstStyle/>
@@ -37046,7 +37888,7 @@
           <a:noFill/>
         </p:spPr>
         <p:txBody>
-          <a:bodyPr wrap="square" anchor="ctr">
+          <a:bodyPr wrap="square" anchor="ctr" lIns="0" rIns="0" tIns="0" bIns="0">
             <a:spAutoFit/>
           </a:bodyPr>
           <a:lstStyle/>
@@ -37115,7 +37957,7 @@
         </p:nvSpPr>
         <p:spPr>
           <a:xfrm>
-            <a:off x="685800" y="2589784"/>
+            <a:off x="685800" y="2568448"/>
             <a:ext cx="10820095" cy="564896"/>
           </a:xfrm>
           <a:prstGeom prst="rect">
@@ -37124,7 +37966,7 @@
           <a:noFill/>
         </p:spPr>
         <p:txBody>
-          <a:bodyPr wrap="square" anchor="t">
+          <a:bodyPr wrap="square" anchor="t" lIns="0" rIns="0" tIns="0" bIns="0">
             <a:spAutoFit/>
           </a:bodyPr>
           <a:lstStyle/>
@@ -37154,8 +37996,8 @@
         </p:nvSpPr>
         <p:spPr>
           <a:xfrm>
-            <a:off x="685800" y="3282696"/>
-            <a:ext cx="10820095" cy="1078992"/>
+            <a:off x="685800" y="3261360"/>
+            <a:ext cx="10820095" cy="1121664"/>
           </a:xfrm>
           <a:prstGeom prst="rect">
             <a:avLst/>
@@ -37198,8 +38040,8 @@
         </p:nvSpPr>
         <p:spPr>
           <a:xfrm>
-            <a:off x="685800" y="3282696"/>
-            <a:ext cx="50292" cy="1078992"/>
+            <a:off x="685800" y="3261360"/>
+            <a:ext cx="50292" cy="1121664"/>
           </a:xfrm>
           <a:prstGeom prst="rect">
             <a:avLst/>
@@ -37242,8 +38084,8 @@
         </p:nvSpPr>
         <p:spPr>
           <a:xfrm>
-            <a:off x="923544" y="3383280"/>
-            <a:ext cx="10417759" cy="896112"/>
+            <a:off x="923544" y="3361944"/>
+            <a:ext cx="10417759" cy="938784"/>
           </a:xfrm>
           <a:prstGeom prst="rect">
             <a:avLst/>
@@ -37251,7 +38093,7 @@
           <a:noFill/>
         </p:spPr>
         <p:txBody>
-          <a:bodyPr wrap="square" anchor="t">
+          <a:bodyPr wrap="square" anchor="t" lIns="0" rIns="0" tIns="0" bIns="0">
             <a:spAutoFit/>
           </a:bodyPr>
           <a:lstStyle/>
@@ -37313,7 +38155,7 @@
         </p:nvSpPr>
         <p:spPr>
           <a:xfrm>
-            <a:off x="685800" y="4526280"/>
+            <a:off x="685800" y="4547616"/>
             <a:ext cx="10820095" cy="564896"/>
           </a:xfrm>
           <a:prstGeom prst="rect">
@@ -37322,7 +38164,7 @@
           <a:noFill/>
         </p:spPr>
         <p:txBody>
-          <a:bodyPr wrap="square" anchor="t">
+          <a:bodyPr wrap="square" anchor="t" lIns="0" rIns="0" tIns="0" bIns="0">
             <a:spAutoFit/>
           </a:bodyPr>
           <a:lstStyle/>
@@ -37405,7 +38247,7 @@
           <a:noFill/>
         </p:spPr>
         <p:txBody>
-          <a:bodyPr wrap="square" anchor="t">
+          <a:bodyPr wrap="square" anchor="t" lIns="0" rIns="0" tIns="0" bIns="0">
             <a:spAutoFit/>
           </a:bodyPr>
           <a:lstStyle/>
@@ -37439,7 +38281,7 @@
           <a:noFill/>
         </p:spPr>
         <p:txBody>
-          <a:bodyPr wrap="square" anchor="t">
+          <a:bodyPr wrap="square" anchor="t" lIns="0" rIns="0" tIns="0" bIns="0">
             <a:spAutoFit/>
           </a:bodyPr>
           <a:lstStyle/>
@@ -37589,7 +38431,7 @@
           <a:noFill/>
         </p:spPr>
         <p:txBody>
-          <a:bodyPr wrap="square" anchor="ctr">
+          <a:bodyPr wrap="square" anchor="ctr" lIns="0" rIns="0" tIns="0" bIns="0">
             <a:spAutoFit/>
           </a:bodyPr>
           <a:lstStyle/>
@@ -37652,7 +38494,7 @@
       </p:sp>
       <p:pic>
         <p:nvPicPr>
-          <p:cNvPr id="6" name="Picture 5" descr="d00783a833afbb64.png"/>
+          <p:cNvPr id="6" name="Picture 5" descr="2a08025c9d0bcf98.png"/>
           <p:cNvPicPr>
             <a:picLocks noChangeAspect="1"/>
           </p:cNvPicPr>
@@ -37666,8 +38508,8 @@
         </p:blipFill>
         <p:spPr>
           <a:xfrm>
-            <a:off x="685800" y="2371671"/>
-            <a:ext cx="4652640" cy="2937616"/>
+            <a:off x="3081898" y="1627632"/>
+            <a:ext cx="6027898" cy="3805935"/>
           </a:xfrm>
           <a:prstGeom prst="rect">
             <a:avLst/>
@@ -37682,8 +38524,8 @@
         </p:nvSpPr>
         <p:spPr>
           <a:xfrm>
-            <a:off x="5771244" y="3385312"/>
-            <a:ext cx="5734650" cy="910336"/>
+            <a:off x="685800" y="5543296"/>
+            <a:ext cx="10820095" cy="510032"/>
           </a:xfrm>
           <a:prstGeom prst="rect">
             <a:avLst/>
@@ -37691,16 +38533,11 @@
           <a:noFill/>
         </p:spPr>
         <p:txBody>
-          <a:bodyPr wrap="square" anchor="t">
+          <a:bodyPr wrap="square" anchor="t" lIns="0" rIns="0" tIns="0" bIns="0">
             <a:spAutoFit/>
           </a:bodyPr>
           <a:lstStyle/>
           <a:p>
-            <a:pPr>
-              <a:spcAft>
-                <a:spcPts val="900"/>
-              </a:spcAft>
-            </a:pPr>
             <a:r>
               <a:rPr sz="2000" b="0">
                 <a:solidFill>
@@ -37774,7 +38611,7 @@
           <a:noFill/>
         </p:spPr>
         <p:txBody>
-          <a:bodyPr wrap="square" anchor="t">
+          <a:bodyPr wrap="square" anchor="t" lIns="0" rIns="0" tIns="0" bIns="0">
             <a:spAutoFit/>
           </a:bodyPr>
           <a:lstStyle/>
@@ -37808,7 +38645,7 @@
           <a:noFill/>
         </p:spPr>
         <p:txBody>
-          <a:bodyPr wrap="square" anchor="t">
+          <a:bodyPr wrap="square" anchor="t" lIns="0" rIns="0" tIns="0" bIns="0">
             <a:spAutoFit/>
           </a:bodyPr>
           <a:lstStyle/>

--- a/content/W01/D2/slides/C2_W01_D02_half2_STUDENT.pptx
+++ b/content/W01/D2/slides/C2_W01_D02_half2_STUDENT.pptx
@@ -3349,8 +3349,8 @@
         </p:blipFill>
         <p:spPr>
           <a:xfrm>
-            <a:off x="4614495" y="1627632"/>
-            <a:ext cx="2962704" cy="3805935"/>
+            <a:off x="4532637" y="1517904"/>
+            <a:ext cx="3126420" cy="4016248"/>
           </a:xfrm>
           <a:prstGeom prst="rect">
             <a:avLst/>
@@ -3365,8 +3365,8 @@
         </p:nvSpPr>
         <p:spPr>
           <a:xfrm>
-            <a:off x="685800" y="5543296"/>
-            <a:ext cx="10820095" cy="510032"/>
+            <a:off x="685800" y="5579872"/>
+            <a:ext cx="10820095" cy="473456"/>
           </a:xfrm>
           <a:prstGeom prst="rect">
             <a:avLst/>
@@ -5289,8 +5289,8 @@
         </p:blipFill>
         <p:spPr>
           <a:xfrm>
-            <a:off x="3557338" y="1627632"/>
-            <a:ext cx="5077018" cy="3460496"/>
+            <a:off x="3403060" y="1517904"/>
+            <a:ext cx="5385575" cy="3670807"/>
           </a:xfrm>
           <a:prstGeom prst="rect">
             <a:avLst/>
@@ -5305,8 +5305,8 @@
         </p:nvSpPr>
         <p:spPr>
           <a:xfrm>
-            <a:off x="685800" y="5197856"/>
-            <a:ext cx="10820095" cy="855471"/>
+            <a:off x="685800" y="5234432"/>
+            <a:ext cx="10820095" cy="818896"/>
           </a:xfrm>
           <a:prstGeom prst="rect">
             <a:avLst/>
@@ -13354,8 +13354,8 @@
         </p:blipFill>
         <p:spPr>
           <a:xfrm>
-            <a:off x="4645888" y="1627632"/>
-            <a:ext cx="2899917" cy="3460495"/>
+            <a:off x="4557767" y="1517904"/>
+            <a:ext cx="3076159" cy="3670807"/>
           </a:xfrm>
           <a:prstGeom prst="rect">
             <a:avLst/>
@@ -13370,8 +13370,8 @@
         </p:nvSpPr>
         <p:spPr>
           <a:xfrm>
-            <a:off x="685800" y="5197856"/>
-            <a:ext cx="10820095" cy="855471"/>
+            <a:off x="685800" y="5234432"/>
+            <a:ext cx="10820095" cy="818896"/>
           </a:xfrm>
           <a:prstGeom prst="rect">
             <a:avLst/>
@@ -17907,8 +17907,8 @@
         </p:blipFill>
         <p:spPr>
           <a:xfrm>
-            <a:off x="1833145" y="1627632"/>
-            <a:ext cx="8525403" cy="3460495"/>
+            <a:off x="1574079" y="1517904"/>
+            <a:ext cx="9043536" cy="3670807"/>
           </a:xfrm>
           <a:prstGeom prst="rect">
             <a:avLst/>
@@ -17923,8 +17923,8 @@
         </p:nvSpPr>
         <p:spPr>
           <a:xfrm>
-            <a:off x="685800" y="5197856"/>
-            <a:ext cx="10820095" cy="855471"/>
+            <a:off x="685800" y="5234432"/>
+            <a:ext cx="10820095" cy="818896"/>
           </a:xfrm>
           <a:prstGeom prst="rect">
             <a:avLst/>
@@ -26051,8 +26051,8 @@
         </p:blipFill>
         <p:spPr>
           <a:xfrm>
-            <a:off x="2023685" y="1627632"/>
-            <a:ext cx="1976870" cy="4425696"/>
+            <a:off x="5276009" y="1517904"/>
+            <a:ext cx="1639676" cy="3670807"/>
           </a:xfrm>
           <a:prstGeom prst="rect">
             <a:avLst/>
@@ -26067,8 +26067,8 @@
         </p:nvSpPr>
         <p:spPr>
           <a:xfrm>
-            <a:off x="5771244" y="3212592"/>
-            <a:ext cx="5734650" cy="1255776"/>
+            <a:off x="685800" y="5234432"/>
+            <a:ext cx="10820095" cy="818896"/>
           </a:xfrm>
           <a:prstGeom prst="rect">
             <a:avLst/>
@@ -26081,11 +26081,6 @@
           </a:bodyPr>
           <a:lstStyle/>
           <a:p>
-            <a:pPr>
-              <a:spcAft>
-                <a:spcPts val="900"/>
-              </a:spcAft>
-            </a:pPr>
             <a:r>
               <a:rPr sz="2000" b="0">
                 <a:solidFill>
@@ -27543,8 +27538,8 @@
         </p:blipFill>
         <p:spPr>
           <a:xfrm>
-            <a:off x="4748947" y="1627632"/>
-            <a:ext cx="2693799" cy="3460496"/>
+            <a:off x="4667089" y="1517904"/>
+            <a:ext cx="2857515" cy="3670807"/>
           </a:xfrm>
           <a:prstGeom prst="rect">
             <a:avLst/>
@@ -27559,8 +27554,8 @@
         </p:nvSpPr>
         <p:spPr>
           <a:xfrm>
-            <a:off x="685800" y="5197856"/>
-            <a:ext cx="10820095" cy="855471"/>
+            <a:off x="685800" y="5234432"/>
+            <a:ext cx="10820095" cy="818896"/>
           </a:xfrm>
           <a:prstGeom prst="rect">
             <a:avLst/>
@@ -33510,7 +33505,7 @@
         <p:spPr>
           <a:xfrm>
             <a:off x="685800" y="1627632"/>
-            <a:ext cx="5135727" cy="1770633"/>
+            <a:ext cx="5135727" cy="1319784"/>
           </a:xfrm>
           <a:prstGeom prst="rect">
             <a:avLst/>
@@ -33554,7 +33549,7 @@
         <p:spPr>
           <a:xfrm>
             <a:off x="685800" y="1627632"/>
-            <a:ext cx="50292" cy="1770633"/>
+            <a:ext cx="50292" cy="1319784"/>
           </a:xfrm>
           <a:prstGeom prst="rect">
             <a:avLst/>
@@ -33598,7 +33593,7 @@
         <p:spPr>
           <a:xfrm>
             <a:off x="941832" y="1719072"/>
-            <a:ext cx="4678527" cy="1624330"/>
+            <a:ext cx="4678527" cy="1173480"/>
           </a:xfrm>
           <a:prstGeom prst="rect">
             <a:avLst/>
@@ -33612,7 +33607,7 @@
           <a:lstStyle/>
           <a:p>
             <a:r>
-              <a:rPr sz="1700" b="1">
+              <a:rPr sz="1500" b="1">
                 <a:solidFill>
                   <a:srgbClr val="2B4A7D"/>
                 </a:solidFill>
@@ -33621,7 +33616,7 @@
               <a:t>The claim. </a:t>
             </a:r>
             <a:r>
-              <a:rPr sz="1700" b="0">
+              <a:rPr sz="1500" b="0">
                 <a:solidFill>
                   <a:srgbClr val="1C1C1A"/>
                 </a:solidFill>
@@ -33641,7 +33636,7 @@
           <p:nvPr/>
         </p:nvGraphicFramePr>
         <p:xfrm>
-          <a:off x="685800" y="3562858"/>
+          <a:off x="685800" y="3112008"/>
           <a:ext cx="5135726" cy="1627632"/>
         </p:xfrm>
         <a:graphic>
@@ -33651,8 +33646,8 @@
                 <a:tableStyleId>{2D5ABB26-0587-4C30-8999-92F81FD0307C}</a:tableStyleId>
               </a:tblPr>
               <a:tblGrid>
-                <a:gridCol w="2360753"/>
-                <a:gridCol w="2774973"/>
+                <a:gridCol w="2172231"/>
+                <a:gridCol w="2963495"/>
               </a:tblGrid>
               <a:tr h="310896">
                 <a:tc>
@@ -33851,7 +33846,7 @@
         <p:spPr>
           <a:xfrm>
             <a:off x="6370167" y="1627632"/>
-            <a:ext cx="5135727" cy="1100328"/>
+            <a:ext cx="5135727" cy="996696"/>
           </a:xfrm>
           <a:prstGeom prst="rect">
             <a:avLst/>
@@ -33866,11 +33861,11 @@
           <a:p>
             <a:pPr>
               <a:spcAft>
-                <a:spcPts val="800"/>
+                <a:spcPts val="700"/>
               </a:spcAft>
             </a:pPr>
             <a:r>
-              <a:rPr sz="1700" b="0">
+              <a:rPr sz="1500" b="0">
                 <a:solidFill>
                   <a:srgbClr val="1C1C1A"/>
                 </a:solidFill>
@@ -33889,8 +33884,8 @@
         </p:nvSpPr>
         <p:spPr>
           <a:xfrm>
-            <a:off x="6370167" y="2855976"/>
-            <a:ext cx="5135727" cy="850899"/>
+            <a:off x="6370167" y="2752344"/>
+            <a:ext cx="5135727" cy="778764"/>
           </a:xfrm>
           <a:prstGeom prst="rect">
             <a:avLst/>
@@ -33933,8 +33928,8 @@
         </p:nvSpPr>
         <p:spPr>
           <a:xfrm>
-            <a:off x="6370167" y="2855976"/>
-            <a:ext cx="50292" cy="850899"/>
+            <a:off x="6370167" y="2752344"/>
+            <a:ext cx="50292" cy="778764"/>
           </a:xfrm>
           <a:prstGeom prst="rect">
             <a:avLst/>
@@ -33977,8 +33972,8 @@
         </p:nvSpPr>
         <p:spPr>
           <a:xfrm>
-            <a:off x="6626199" y="2947416"/>
-            <a:ext cx="4678527" cy="704595"/>
+            <a:off x="6626199" y="2843784"/>
+            <a:ext cx="4678527" cy="632460"/>
           </a:xfrm>
           <a:prstGeom prst="rect">
             <a:avLst/>
@@ -33992,7 +33987,7 @@
           <a:lstStyle/>
           <a:p>
             <a:r>
-              <a:rPr sz="1700" b="1">
+              <a:rPr sz="1500" b="1">
                 <a:solidFill>
                   <a:srgbClr val="2B4A7D"/>
                 </a:solidFill>
@@ -34001,7 +33996,7 @@
               <a:t>The mental model. </a:t>
             </a:r>
             <a:r>
-              <a:rPr sz="1700" b="0">
+              <a:rPr sz="1500" b="0">
                 <a:solidFill>
                   <a:srgbClr val="1C1C1A"/>
                 </a:solidFill>
@@ -34028,8 +34023,8 @@
         </p:blipFill>
         <p:spPr>
           <a:xfrm>
-            <a:off x="7891934" y="3871468"/>
-            <a:ext cx="2092194" cy="2181860"/>
+            <a:off x="7807661" y="3695700"/>
+            <a:ext cx="2260739" cy="2357628"/>
           </a:xfrm>
           <a:prstGeom prst="rect">
             <a:avLst/>
@@ -38508,8 +38503,8 @@
         </p:blipFill>
         <p:spPr>
           <a:xfrm>
-            <a:off x="3081898" y="1627632"/>
-            <a:ext cx="6027898" cy="3805935"/>
+            <a:off x="2915350" y="1517904"/>
+            <a:ext cx="6360993" cy="4016248"/>
           </a:xfrm>
           <a:prstGeom prst="rect">
             <a:avLst/>
@@ -38524,8 +38519,8 @@
         </p:nvSpPr>
         <p:spPr>
           <a:xfrm>
-            <a:off x="685800" y="5543296"/>
-            <a:ext cx="10820095" cy="510032"/>
+            <a:off x="685800" y="5579872"/>
+            <a:ext cx="10820095" cy="473456"/>
           </a:xfrm>
           <a:prstGeom prst="rect">
             <a:avLst/>
